--- a/artifacts/ccd-promo/public/downloads/CCDesigner-Promo.pptx
+++ b/artifacts/ccd-promo/public/downloads/CCDesigner-Promo.pptx
@@ -523,7 +523,7 @@
           <a:p>
             <a:r>
               <a:rPr lang="en-US" dirty="0"/>
-              <a:t>Scene 1 of 22 — CCDesigner — A Creative Studio for Educators</a:t>
+              <a:t/>
             </a:r>
             <a:endParaRPr lang="en-US" dirty="0"/>
           </a:p>
@@ -611,7 +611,7 @@
           <a:p>
             <a:r>
               <a:rPr lang="en-US" dirty="0"/>
-              <a:t>Scene 10 of 22 — Adapt instantly for different learners.</a:t>
+              <a:t/>
             </a:r>
             <a:endParaRPr lang="en-US" dirty="0"/>
           </a:p>
@@ -699,7 +699,7 @@
           <a:p>
             <a:r>
               <a:rPr lang="en-US" dirty="0"/>
-              <a:t>Scene 11 of 22 — Support every child meaningfully.</a:t>
+              <a:t/>
             </a:r>
             <a:endParaRPr lang="en-US" dirty="0"/>
           </a:p>
@@ -787,7 +787,7 @@
           <a:p>
             <a:r>
               <a:rPr lang="en-US" dirty="0"/>
-              <a:t>Scene 12 of 22 — Create deeper learning opportunities.</a:t>
+              <a:t/>
             </a:r>
             <a:endParaRPr lang="en-US" dirty="0"/>
           </a:p>
@@ -875,7 +875,7 @@
           <a:p>
             <a:r>
               <a:rPr lang="en-US" dirty="0"/>
-              <a:t>Scene 13 of 22 — Connect subjects naturally.</a:t>
+              <a:t/>
             </a:r>
             <a:endParaRPr lang="en-US" dirty="0"/>
           </a:p>
@@ -963,7 +963,7 @@
           <a:p>
             <a:r>
               <a:rPr lang="en-US" dirty="0"/>
-              <a:t>Scene 14 of 22 — Reflect. Adapt. Improve.</a:t>
+              <a:t/>
             </a:r>
             <a:endParaRPr lang="en-US" dirty="0"/>
           </a:p>
@@ -1051,7 +1051,7 @@
           <a:p>
             <a:r>
               <a:rPr lang="en-US" dirty="0"/>
-              <a:t>Scene 15 of 22 — Track growth over time.</a:t>
+              <a:t/>
             </a:r>
             <a:endParaRPr lang="en-US" dirty="0"/>
           </a:p>
@@ -1139,7 +1139,7 @@
           <a:p>
             <a:r>
               <a:rPr lang="en-US" dirty="0"/>
-              <a:t>Scene 16 of 22 — Build knowledge intentionally.</a:t>
+              <a:t/>
             </a:r>
             <a:endParaRPr lang="en-US" dirty="0"/>
           </a:p>
@@ -1227,7 +1227,7 @@
           <a:p>
             <a:r>
               <a:rPr lang="en-US" dirty="0"/>
-              <a:t>Scene 17 of 22 — Inspiration that grows with you.</a:t>
+              <a:t/>
             </a:r>
             <a:endParaRPr lang="en-US" dirty="0"/>
           </a:p>
@@ -1315,7 +1315,7 @@
           <a:p>
             <a:r>
               <a:rPr lang="en-US" dirty="0"/>
-              <a:t>Scene 18 of 22 — Powered by creative communities.</a:t>
+              <a:t/>
             </a:r>
             <a:endParaRPr lang="en-US" dirty="0"/>
           </a:p>
@@ -1403,7 +1403,7 @@
           <a:p>
             <a:r>
               <a:rPr lang="en-US" dirty="0"/>
-              <a:t>Scene 19 of 22 — See the bigger learning picture.</a:t>
+              <a:t/>
             </a:r>
             <a:endParaRPr lang="en-US" dirty="0"/>
           </a:p>
@@ -1491,7 +1491,7 @@
           <a:p>
             <a:r>
               <a:rPr lang="en-US" dirty="0"/>
-              <a:t>Scene 2 of 22 — Teaching is creative work.</a:t>
+              <a:t/>
             </a:r>
             <a:endParaRPr lang="en-US" dirty="0"/>
           </a:p>
@@ -1579,7 +1579,7 @@
           <a:p>
             <a:r>
               <a:rPr lang="en-US" dirty="0"/>
-              <a:t>Scene 20 of 22 — Beautiful, professional plans.</a:t>
+              <a:t/>
             </a:r>
             <a:endParaRPr lang="en-US" dirty="0"/>
           </a:p>
@@ -1667,7 +1667,7 @@
           <a:p>
             <a:r>
               <a:rPr lang="en-US" dirty="0"/>
-              <a:t>Scene 21 of 22 — Plan anywhere.</a:t>
+              <a:t/>
             </a:r>
             <a:endParaRPr lang="en-US" dirty="0"/>
           </a:p>
@@ -1755,7 +1755,7 @@
           <a:p>
             <a:r>
               <a:rPr lang="en-US" dirty="0"/>
-              <a:t>Scene 22 of 22 — CCDesigner — What’s next.</a:t>
+              <a:t/>
             </a:r>
             <a:endParaRPr lang="en-US" dirty="0"/>
           </a:p>
@@ -1843,7 +1843,7 @@
           <a:p>
             <a:r>
               <a:rPr lang="en-US" dirty="0"/>
-              <a:t>Scene 3 of 22 — Never lose a brilliant idea.</a:t>
+              <a:t/>
             </a:r>
             <a:endParaRPr lang="en-US" dirty="0"/>
           </a:p>
@@ -1931,7 +1931,7 @@
           <a:p>
             <a:r>
               <a:rPr lang="en-US" dirty="0"/>
-              <a:t>Scene 4 of 22 — Build your creative archive.</a:t>
+              <a:t/>
             </a:r>
             <a:endParaRPr lang="en-US" dirty="0"/>
           </a:p>
@@ -2019,7 +2019,7 @@
           <a:p>
             <a:r>
               <a:rPr lang="en-US" dirty="0"/>
-              <a:t>Scene 5 of 22 — Build connected learning journeys.</a:t>
+              <a:t/>
             </a:r>
             <a:endParaRPr lang="en-US" dirty="0"/>
           </a:p>
@@ -2107,7 +2107,7 @@
           <a:p>
             <a:r>
               <a:rPr lang="en-US" dirty="0"/>
-              <a:t>Scene 6 of 22 — Rich lessons, built in minutes.</a:t>
+              <a:t/>
             </a:r>
             <a:endParaRPr lang="en-US" dirty="0"/>
           </a:p>
@@ -2195,7 +2195,7 @@
           <a:p>
             <a:r>
               <a:rPr lang="en-US" dirty="0"/>
-              <a:t>Scene 7 of 22 — Drama. Dance. Music.</a:t>
+              <a:t/>
             </a:r>
             <a:endParaRPr lang="en-US" dirty="0"/>
           </a:p>
@@ -2283,7 +2283,7 @@
           <a:p>
             <a:r>
               <a:rPr lang="en-US" dirty="0"/>
-              <a:t>Scene 8 of 22 — Encourage curiosity and imagination.</a:t>
+              <a:t/>
             </a:r>
             <a:endParaRPr lang="en-US" dirty="0"/>
           </a:p>
@@ -2371,7 +2371,7 @@
           <a:p>
             <a:r>
               <a:rPr lang="en-US" dirty="0"/>
-              <a:t>Scene 9 of 22 — AI that amplifies your thinking.</a:t>
+              <a:t/>
             </a:r>
             <a:endParaRPr lang="en-US" dirty="0"/>
           </a:p>
@@ -2726,7 +2726,7 @@
     <p:bg>
       <p:bgPr>
         <a:solidFill>
-          <a:srgbClr val="000000"/>
+          <a:srgbClr val="FFFFFF"/>
         </a:solidFill>
       </p:bgPr>
     </p:bg>
@@ -2744,9 +2744,59 @@
           <a:chExt cx="0" cy="0"/>
         </a:xfrm>
       </p:grpSpPr>
+      <p:sp>
+        <p:nvSpPr>
+          <p:cNvPr id="2" name="Shape 0"/>
+          <p:cNvSpPr/>
+          <p:nvPr/>
+        </p:nvSpPr>
+        <p:spPr>
+          <a:xfrm>
+            <a:off x="0" y="0"/>
+            <a:ext cx="12191695" cy="6858000"/>
+          </a:xfrm>
+          <a:prstGeom prst="rect">
+            <a:avLst/>
+          </a:prstGeom>
+          <a:solidFill>
+            <a:srgbClr val="F4F1FB"/>
+          </a:solidFill>
+          <a:ln w="12700">
+            <a:solidFill>
+              <a:srgbClr val="F4F1FB"/>
+            </a:solidFill>
+            <a:prstDash val="solid"/>
+          </a:ln>
+        </p:spPr>
+      </p:sp>
+      <p:sp>
+        <p:nvSpPr>
+          <p:cNvPr id="3" name="Shape 1"/>
+          <p:cNvSpPr/>
+          <p:nvPr/>
+        </p:nvSpPr>
+        <p:spPr>
+          <a:xfrm>
+            <a:off x="0" y="6821424"/>
+            <a:ext cx="12191695" cy="36576"/>
+          </a:xfrm>
+          <a:prstGeom prst="rect">
+            <a:avLst/>
+          </a:prstGeom>
+          <a:solidFill>
+            <a:srgbClr val="7C3AED"/>
+          </a:solidFill>
+          <a:ln w="12700">
+            <a:solidFill>
+              <a:srgbClr val="7C3AED"/>
+            </a:solidFill>
+            <a:prstDash val="solid"/>
+          </a:ln>
+        </p:spPr>
+      </p:sp>
       <p:pic>
         <p:nvPicPr>
-          <p:cNvPr id="2" name="Image 0" descr="/home/runner/workspace/artifacts/ccd-promo/scripts/frames/scene-01.jpg">    </p:cNvPr>
+          <p:cNvPr id="4" name="Image 0" descr="/home/runner/workspace/artifacts/ccd-promo/public/cc-mark.png">    </p:cNvPr>
           <p:cNvPicPr>
             <a:picLocks noChangeAspect="1"/>
           </p:cNvPicPr>
@@ -2760,14 +2810,170 @@
         </p:blipFill>
         <p:spPr>
           <a:xfrm>
-            <a:off x="0" y="0"/>
-            <a:ext cx="12191695" cy="6858000"/>
+            <a:off x="4815688" y="1463040"/>
+            <a:ext cx="2560320" cy="2194560"/>
           </a:xfrm>
           <a:prstGeom prst="rect">
             <a:avLst/>
           </a:prstGeom>
         </p:spPr>
       </p:pic>
+      <p:sp>
+        <p:nvSpPr>
+          <p:cNvPr id="5" name="Text 2"/>
+          <p:cNvSpPr/>
+          <p:nvPr/>
+        </p:nvSpPr>
+        <p:spPr>
+          <a:xfrm>
+            <a:off x="914400" y="3931920"/>
+            <a:ext cx="10362895" cy="365760"/>
+          </a:xfrm>
+          <a:prstGeom prst="rect">
+            <a:avLst/>
+          </a:prstGeom>
+          <a:noFill/>
+          <a:ln/>
+        </p:spPr>
+        <p:txBody>
+          <a:bodyPr wrap="square" rtlCol="0" anchor="ctr"/>
+          <a:lstStyle/>
+          <a:p>
+            <a:pPr algn="ctr" indent="0" marL="0">
+              <a:buNone/>
+            </a:pPr>
+            <a:r>
+              <a:rPr lang="en-US" sz="1400" b="1" spc="600" kern="0" dirty="0">
+                <a:solidFill>
+                  <a:srgbClr val="7C3AED"/>
+                </a:solidFill>
+                <a:latin typeface="Calibri" pitchFamily="34" charset="0"/>
+                <a:ea typeface="Calibri" pitchFamily="34" charset="-122"/>
+                <a:cs typeface="Calibri" pitchFamily="34" charset="-120"/>
+              </a:rPr>
+              <a:t>A CREATIVE STUDIO FOR EDUCATORS</a:t>
+            </a:r>
+            <a:endParaRPr lang="en-US" sz="1400" dirty="0"/>
+          </a:p>
+        </p:txBody>
+      </p:sp>
+      <p:sp>
+        <p:nvSpPr>
+          <p:cNvPr id="6" name="Text 3"/>
+          <p:cNvSpPr/>
+          <p:nvPr/>
+        </p:nvSpPr>
+        <p:spPr>
+          <a:xfrm>
+            <a:off x="914400" y="4389120"/>
+            <a:ext cx="10362895" cy="914400"/>
+          </a:xfrm>
+          <a:prstGeom prst="rect">
+            <a:avLst/>
+          </a:prstGeom>
+          <a:noFill/>
+          <a:ln/>
+        </p:spPr>
+        <p:txBody>
+          <a:bodyPr wrap="square" rtlCol="0" anchor="ctr"/>
+          <a:lstStyle/>
+          <a:p>
+            <a:pPr algn="ctr" indent="0" marL="0">
+              <a:buNone/>
+            </a:pPr>
+            <a:r>
+              <a:rPr lang="en-US" sz="5400" b="1" i="1" dirty="0">
+                <a:solidFill>
+                  <a:srgbClr val="1A1033"/>
+                </a:solidFill>
+                <a:latin typeface="Calibri" pitchFamily="34" charset="0"/>
+                <a:ea typeface="Calibri" pitchFamily="34" charset="-122"/>
+                <a:cs typeface="Calibri" pitchFamily="34" charset="-120"/>
+              </a:rPr>
+              <a:t>CCDesigner</a:t>
+            </a:r>
+            <a:endParaRPr lang="en-US" sz="5400" dirty="0"/>
+          </a:p>
+        </p:txBody>
+      </p:sp>
+      <p:sp>
+        <p:nvSpPr>
+          <p:cNvPr id="7" name="Text 4"/>
+          <p:cNvSpPr/>
+          <p:nvPr/>
+        </p:nvSpPr>
+        <p:spPr>
+          <a:xfrm>
+            <a:off x="1371600" y="5440680"/>
+            <a:ext cx="9448495" cy="640080"/>
+          </a:xfrm>
+          <a:prstGeom prst="rect">
+            <a:avLst/>
+          </a:prstGeom>
+          <a:noFill/>
+          <a:ln/>
+        </p:spPr>
+        <p:txBody>
+          <a:bodyPr wrap="square" rtlCol="0" anchor="ctr"/>
+          <a:lstStyle/>
+          <a:p>
+            <a:pPr algn="ctr" indent="0" marL="0">
+              <a:buNone/>
+            </a:pPr>
+            <a:r>
+              <a:rPr lang="en-US" sz="1800" dirty="0">
+                <a:solidFill>
+                  <a:srgbClr val="4B4565"/>
+                </a:solidFill>
+                <a:latin typeface="Calibri" pitchFamily="34" charset="0"/>
+                <a:ea typeface="Calibri" pitchFamily="34" charset="-122"/>
+                <a:cs typeface="Calibri" pitchFamily="34" charset="-120"/>
+              </a:rPr>
+              <a:t>A creative studio for educators — where great teaching is captured, refined, and never lost.</a:t>
+            </a:r>
+            <a:endParaRPr lang="en-US" sz="1800" dirty="0"/>
+          </a:p>
+        </p:txBody>
+      </p:sp>
+      <p:sp>
+        <p:nvSpPr>
+          <p:cNvPr id="8" name="Text 5"/>
+          <p:cNvSpPr/>
+          <p:nvPr/>
+        </p:nvSpPr>
+        <p:spPr>
+          <a:xfrm>
+            <a:off x="10911535" y="365760"/>
+            <a:ext cx="914400" cy="274320"/>
+          </a:xfrm>
+          <a:prstGeom prst="rect">
+            <a:avLst/>
+          </a:prstGeom>
+          <a:noFill/>
+          <a:ln/>
+        </p:spPr>
+        <p:txBody>
+          <a:bodyPr wrap="square" rtlCol="0" anchor="ctr"/>
+          <a:lstStyle/>
+          <a:p>
+            <a:pPr algn="r" indent="0" marL="0">
+              <a:buNone/>
+            </a:pPr>
+            <a:r>
+              <a:rPr lang="en-US" sz="900" b="1" spc="400" kern="0" dirty="0">
+                <a:solidFill>
+                  <a:srgbClr val="8B85A8"/>
+                </a:solidFill>
+                <a:latin typeface="Calibri" pitchFamily="34" charset="0"/>
+                <a:ea typeface="Calibri" pitchFamily="34" charset="-122"/>
+                <a:cs typeface="Calibri" pitchFamily="34" charset="-120"/>
+              </a:rPr>
+              <a:t>01 / 22</a:t>
+            </a:r>
+            <a:endParaRPr lang="en-US" sz="900" dirty="0"/>
+          </a:p>
+        </p:txBody>
+      </p:sp>
     </p:spTree>
   </p:cSld>
   <p:clrMapOvr>
@@ -2782,7 +2988,7 @@
     <p:bg>
       <p:bgPr>
         <a:solidFill>
-          <a:srgbClr val="000000"/>
+          <a:srgbClr val="0B0820"/>
         </a:solidFill>
       </p:bgPr>
     </p:bg>
@@ -2800,9 +3006,245 @@
           <a:chExt cx="0" cy="0"/>
         </a:xfrm>
       </p:grpSpPr>
+      <p:sp>
+        <p:nvSpPr>
+          <p:cNvPr id="2" name="Shape 0"/>
+          <p:cNvSpPr/>
+          <p:nvPr/>
+        </p:nvSpPr>
+        <p:spPr>
+          <a:xfrm>
+            <a:off x="0" y="0"/>
+            <a:ext cx="12191695" cy="6858000"/>
+          </a:xfrm>
+          <a:prstGeom prst="rect">
+            <a:avLst/>
+          </a:prstGeom>
+          <a:solidFill>
+            <a:srgbClr val="0B0820"/>
+          </a:solidFill>
+          <a:ln w="12700">
+            <a:solidFill>
+              <a:srgbClr val="0B0820"/>
+            </a:solidFill>
+            <a:prstDash val="solid"/>
+          </a:ln>
+        </p:spPr>
+      </p:sp>
+      <p:sp>
+        <p:nvSpPr>
+          <p:cNvPr id="3" name="Shape 1"/>
+          <p:cNvSpPr/>
+          <p:nvPr/>
+        </p:nvSpPr>
+        <p:spPr>
+          <a:xfrm>
+            <a:off x="0" y="0"/>
+            <a:ext cx="7924602" cy="6858000"/>
+          </a:xfrm>
+          <a:prstGeom prst="rect">
+            <a:avLst/>
+          </a:prstGeom>
+          <a:solidFill>
+            <a:srgbClr val="120F2E">
+              <a:alpha val="75000"/>
+            </a:srgbClr>
+          </a:solidFill>
+          <a:ln w="12700">
+            <a:solidFill>
+              <a:srgbClr val="120F2E"/>
+            </a:solidFill>
+            <a:prstDash val="solid"/>
+          </a:ln>
+        </p:spPr>
+      </p:sp>
+      <p:sp>
+        <p:nvSpPr>
+          <p:cNvPr id="4" name="Shape 2"/>
+          <p:cNvSpPr/>
+          <p:nvPr/>
+        </p:nvSpPr>
+        <p:spPr>
+          <a:xfrm>
+            <a:off x="-2286000" y="3200400"/>
+            <a:ext cx="7315200" cy="7315200"/>
+          </a:xfrm>
+          <a:prstGeom prst="ellipse">
+            <a:avLst/>
+          </a:prstGeom>
+          <a:solidFill>
+            <a:srgbClr val="7C3AED">
+              <a:alpha val="20000"/>
+            </a:srgbClr>
+          </a:solidFill>
+          <a:ln/>
+        </p:spPr>
+      </p:sp>
+      <p:sp>
+        <p:nvSpPr>
+          <p:cNvPr id="5" name="Shape 3"/>
+          <p:cNvSpPr/>
+          <p:nvPr/>
+        </p:nvSpPr>
+        <p:spPr>
+          <a:xfrm>
+            <a:off x="8534095" y="-2743200"/>
+            <a:ext cx="6400800" cy="6400800"/>
+          </a:xfrm>
+          <a:prstGeom prst="ellipse">
+            <a:avLst/>
+          </a:prstGeom>
+          <a:solidFill>
+            <a:srgbClr val="14B8A6">
+              <a:alpha val="15000"/>
+            </a:srgbClr>
+          </a:solidFill>
+          <a:ln/>
+        </p:spPr>
+      </p:sp>
+      <p:sp>
+        <p:nvSpPr>
+          <p:cNvPr id="6" name="Text 4"/>
+          <p:cNvSpPr/>
+          <p:nvPr/>
+        </p:nvSpPr>
+        <p:spPr>
+          <a:xfrm>
+            <a:off x="822960" y="1783080"/>
+            <a:ext cx="10545775" cy="365760"/>
+          </a:xfrm>
+          <a:prstGeom prst="rect">
+            <a:avLst/>
+          </a:prstGeom>
+          <a:noFill/>
+          <a:ln/>
+        </p:spPr>
+        <p:txBody>
+          <a:bodyPr wrap="square" rtlCol="0" anchor="ctr"/>
+          <a:lstStyle/>
+          <a:p>
+            <a:pPr algn="l" indent="0" marL="0">
+              <a:buNone/>
+            </a:pPr>
+            <a:r>
+              <a:rPr lang="en-US" sz="1300" b="1" spc="800" kern="0" dirty="0">
+                <a:solidFill>
+                  <a:srgbClr val="5EEAD4"/>
+                </a:solidFill>
+                <a:latin typeface="Calibri" pitchFamily="34" charset="0"/>
+                <a:ea typeface="Calibri" pitchFamily="34" charset="-122"/>
+                <a:cs typeface="Calibri" pitchFamily="34" charset="-120"/>
+              </a:rPr>
+              <a:t>ADAPTIVE BY DESIGN</a:t>
+            </a:r>
+            <a:endParaRPr lang="en-US" sz="1300" dirty="0"/>
+          </a:p>
+        </p:txBody>
+      </p:sp>
+      <p:sp>
+        <p:nvSpPr>
+          <p:cNvPr id="7" name="Text 5"/>
+          <p:cNvSpPr/>
+          <p:nvPr/>
+        </p:nvSpPr>
+        <p:spPr>
+          <a:xfrm>
+            <a:off x="822960" y="2286000"/>
+            <a:ext cx="10545775" cy="2011680"/>
+          </a:xfrm>
+          <a:prstGeom prst="rect">
+            <a:avLst/>
+          </a:prstGeom>
+          <a:noFill/>
+          <a:ln/>
+        </p:spPr>
+        <p:txBody>
+          <a:bodyPr wrap="square" rtlCol="0" anchor="t"/>
+          <a:lstStyle/>
+          <a:p>
+            <a:pPr algn="l" indent="0" marL="0">
+              <a:spcAft>
+                <a:spcPts val="200"/>
+              </a:spcAft>
+              <a:buNone/>
+            </a:pPr>
+            <a:r>
+              <a:rPr lang="en-US" sz="5600" b="1" dirty="0">
+                <a:solidFill>
+                  <a:srgbClr val="FFFFFF"/>
+                </a:solidFill>
+                <a:latin typeface="Calibri" pitchFamily="34" charset="0"/>
+                <a:ea typeface="Calibri" pitchFamily="34" charset="-122"/>
+                <a:cs typeface="Calibri" pitchFamily="34" charset="-120"/>
+              </a:rPr>
+              <a:t>Adapt instantly for </a:t>
+            </a:r>
+            <a:pPr algn="l" indent="0" marL="0">
+              <a:spcAft>
+                <a:spcPts val="200"/>
+              </a:spcAft>
+              <a:buNone/>
+            </a:pPr>
+            <a:r>
+              <a:rPr lang="en-US" sz="5600" b="1" dirty="0">
+                <a:solidFill>
+                  <a:srgbClr val="5EEAD4"/>
+                </a:solidFill>
+                <a:latin typeface="Calibri" pitchFamily="34" charset="0"/>
+                <a:ea typeface="Calibri" pitchFamily="34" charset="-122"/>
+                <a:cs typeface="Calibri" pitchFamily="34" charset="-120"/>
+              </a:rPr>
+              <a:t>different learners.</a:t>
+            </a:r>
+            <a:endParaRPr lang="en-US" sz="5600" dirty="0"/>
+          </a:p>
+        </p:txBody>
+      </p:sp>
+      <p:sp>
+        <p:nvSpPr>
+          <p:cNvPr id="8" name="Text 6"/>
+          <p:cNvSpPr/>
+          <p:nvPr/>
+        </p:nvSpPr>
+        <p:spPr>
+          <a:xfrm>
+            <a:off x="822960" y="4937760"/>
+            <a:ext cx="8225705" cy="1280160"/>
+          </a:xfrm>
+          <a:prstGeom prst="rect">
+            <a:avLst/>
+          </a:prstGeom>
+          <a:noFill/>
+          <a:ln/>
+        </p:spPr>
+        <p:txBody>
+          <a:bodyPr wrap="square" rtlCol="0" anchor="ctr"/>
+          <a:lstStyle/>
+          <a:p>
+            <a:pPr algn="l" indent="0" marL="0">
+              <a:spcBef>
+                <a:spcPts val="400"/>
+              </a:spcBef>
+              <a:buNone/>
+            </a:pPr>
+            <a:r>
+              <a:rPr lang="en-US" sz="1800" dirty="0">
+                <a:solidFill>
+                  <a:srgbClr val="D7D3E8"/>
+                </a:solidFill>
+                <a:latin typeface="Calibri" pitchFamily="34" charset="0"/>
+                <a:ea typeface="Calibri" pitchFamily="34" charset="-122"/>
+                <a:cs typeface="Calibri" pitchFamily="34" charset="-120"/>
+              </a:rPr>
+              <a:t>One lesson, many pathways — generated and refined at the speed of the room.</a:t>
+            </a:r>
+            <a:endParaRPr lang="en-US" sz="1800" dirty="0"/>
+          </a:p>
+        </p:txBody>
+      </p:sp>
       <p:pic>
         <p:nvPicPr>
-          <p:cNvPr id="2" name="Image 0" descr="/home/runner/workspace/artifacts/ccd-promo/scripts/frames/scene-10.jpg">    </p:cNvPr>
+          <p:cNvPr id="9" name="Image 0" descr="/home/runner/workspace/artifacts/ccd-promo/public/ccdesigner-wordmark.png">    </p:cNvPr>
           <p:cNvPicPr>
             <a:picLocks noChangeAspect="1"/>
           </p:cNvPicPr>
@@ -2816,14 +3258,53 @@
         </p:blipFill>
         <p:spPr>
           <a:xfrm>
-            <a:off x="0" y="0"/>
-            <a:ext cx="12191695" cy="6858000"/>
+            <a:off x="411480" y="365760"/>
+            <a:ext cx="1463040" cy="384048"/>
           </a:xfrm>
           <a:prstGeom prst="rect">
             <a:avLst/>
           </a:prstGeom>
         </p:spPr>
       </p:pic>
+      <p:sp>
+        <p:nvSpPr>
+          <p:cNvPr id="10" name="Text 7"/>
+          <p:cNvSpPr/>
+          <p:nvPr/>
+        </p:nvSpPr>
+        <p:spPr>
+          <a:xfrm>
+            <a:off x="10911535" y="365760"/>
+            <a:ext cx="914400" cy="274320"/>
+          </a:xfrm>
+          <a:prstGeom prst="rect">
+            <a:avLst/>
+          </a:prstGeom>
+          <a:noFill/>
+          <a:ln/>
+        </p:spPr>
+        <p:txBody>
+          <a:bodyPr wrap="square" rtlCol="0" anchor="ctr"/>
+          <a:lstStyle/>
+          <a:p>
+            <a:pPr algn="r" indent="0" marL="0">
+              <a:buNone/>
+            </a:pPr>
+            <a:r>
+              <a:rPr lang="en-US" sz="900" b="1" spc="400" kern="0" dirty="0">
+                <a:solidFill>
+                  <a:srgbClr val="8B85A8"/>
+                </a:solidFill>
+                <a:latin typeface="Calibri" pitchFamily="34" charset="0"/>
+                <a:ea typeface="Calibri" pitchFamily="34" charset="-122"/>
+                <a:cs typeface="Calibri" pitchFamily="34" charset="-120"/>
+              </a:rPr>
+              <a:t>10 / 22</a:t>
+            </a:r>
+            <a:endParaRPr lang="en-US" sz="900" dirty="0"/>
+          </a:p>
+        </p:txBody>
+      </p:sp>
     </p:spTree>
   </p:cSld>
   <p:clrMapOvr>
@@ -2838,7 +3319,7 @@
     <p:bg>
       <p:bgPr>
         <a:solidFill>
-          <a:srgbClr val="000000"/>
+          <a:srgbClr val="0B0820"/>
         </a:solidFill>
       </p:bgPr>
     </p:bg>
@@ -2856,9 +3337,245 @@
           <a:chExt cx="0" cy="0"/>
         </a:xfrm>
       </p:grpSpPr>
+      <p:sp>
+        <p:nvSpPr>
+          <p:cNvPr id="2" name="Shape 0"/>
+          <p:cNvSpPr/>
+          <p:nvPr/>
+        </p:nvSpPr>
+        <p:spPr>
+          <a:xfrm>
+            <a:off x="0" y="0"/>
+            <a:ext cx="12191695" cy="6858000"/>
+          </a:xfrm>
+          <a:prstGeom prst="rect">
+            <a:avLst/>
+          </a:prstGeom>
+          <a:solidFill>
+            <a:srgbClr val="0B0820"/>
+          </a:solidFill>
+          <a:ln w="12700">
+            <a:solidFill>
+              <a:srgbClr val="0B0820"/>
+            </a:solidFill>
+            <a:prstDash val="solid"/>
+          </a:ln>
+        </p:spPr>
+      </p:sp>
+      <p:sp>
+        <p:nvSpPr>
+          <p:cNvPr id="3" name="Shape 1"/>
+          <p:cNvSpPr/>
+          <p:nvPr/>
+        </p:nvSpPr>
+        <p:spPr>
+          <a:xfrm>
+            <a:off x="0" y="0"/>
+            <a:ext cx="7924602" cy="6858000"/>
+          </a:xfrm>
+          <a:prstGeom prst="rect">
+            <a:avLst/>
+          </a:prstGeom>
+          <a:solidFill>
+            <a:srgbClr val="120F2E">
+              <a:alpha val="75000"/>
+            </a:srgbClr>
+          </a:solidFill>
+          <a:ln w="12700">
+            <a:solidFill>
+              <a:srgbClr val="120F2E"/>
+            </a:solidFill>
+            <a:prstDash val="solid"/>
+          </a:ln>
+        </p:spPr>
+      </p:sp>
+      <p:sp>
+        <p:nvSpPr>
+          <p:cNvPr id="4" name="Shape 2"/>
+          <p:cNvSpPr/>
+          <p:nvPr/>
+        </p:nvSpPr>
+        <p:spPr>
+          <a:xfrm>
+            <a:off x="-2286000" y="3200400"/>
+            <a:ext cx="7315200" cy="7315200"/>
+          </a:xfrm>
+          <a:prstGeom prst="ellipse">
+            <a:avLst/>
+          </a:prstGeom>
+          <a:solidFill>
+            <a:srgbClr val="7C3AED">
+              <a:alpha val="20000"/>
+            </a:srgbClr>
+          </a:solidFill>
+          <a:ln/>
+        </p:spPr>
+      </p:sp>
+      <p:sp>
+        <p:nvSpPr>
+          <p:cNvPr id="5" name="Shape 3"/>
+          <p:cNvSpPr/>
+          <p:nvPr/>
+        </p:nvSpPr>
+        <p:spPr>
+          <a:xfrm>
+            <a:off x="8534095" y="-2743200"/>
+            <a:ext cx="6400800" cy="6400800"/>
+          </a:xfrm>
+          <a:prstGeom prst="ellipse">
+            <a:avLst/>
+          </a:prstGeom>
+          <a:solidFill>
+            <a:srgbClr val="14B8A6">
+              <a:alpha val="15000"/>
+            </a:srgbClr>
+          </a:solidFill>
+          <a:ln/>
+        </p:spPr>
+      </p:sp>
+      <p:sp>
+        <p:nvSpPr>
+          <p:cNvPr id="6" name="Text 4"/>
+          <p:cNvSpPr/>
+          <p:nvPr/>
+        </p:nvSpPr>
+        <p:spPr>
+          <a:xfrm>
+            <a:off x="822960" y="1783080"/>
+            <a:ext cx="10545775" cy="365760"/>
+          </a:xfrm>
+          <a:prstGeom prst="rect">
+            <a:avLst/>
+          </a:prstGeom>
+          <a:noFill/>
+          <a:ln/>
+        </p:spPr>
+        <p:txBody>
+          <a:bodyPr wrap="square" rtlCol="0" anchor="ctr"/>
+          <a:lstStyle/>
+          <a:p>
+            <a:pPr algn="ctr" indent="0" marL="0">
+              <a:buNone/>
+            </a:pPr>
+            <a:r>
+              <a:rPr lang="en-US" sz="1300" b="1" spc="800" kern="0" dirty="0">
+                <a:solidFill>
+                  <a:srgbClr val="FB7185"/>
+                </a:solidFill>
+                <a:latin typeface="Calibri" pitchFamily="34" charset="0"/>
+                <a:ea typeface="Calibri" pitchFamily="34" charset="-122"/>
+                <a:cs typeface="Calibri" pitchFamily="34" charset="-120"/>
+              </a:rPr>
+              <a:t>INCLUSION AT THE CENTRE</a:t>
+            </a:r>
+            <a:endParaRPr lang="en-US" sz="1300" dirty="0"/>
+          </a:p>
+        </p:txBody>
+      </p:sp>
+      <p:sp>
+        <p:nvSpPr>
+          <p:cNvPr id="7" name="Text 5"/>
+          <p:cNvSpPr/>
+          <p:nvPr/>
+        </p:nvSpPr>
+        <p:spPr>
+          <a:xfrm>
+            <a:off x="822960" y="2286000"/>
+            <a:ext cx="10545775" cy="2011680"/>
+          </a:xfrm>
+          <a:prstGeom prst="rect">
+            <a:avLst/>
+          </a:prstGeom>
+          <a:noFill/>
+          <a:ln/>
+        </p:spPr>
+        <p:txBody>
+          <a:bodyPr wrap="square" rtlCol="0" anchor="t"/>
+          <a:lstStyle/>
+          <a:p>
+            <a:pPr algn="ctr" indent="0" marL="0">
+              <a:spcAft>
+                <a:spcPts val="200"/>
+              </a:spcAft>
+              <a:buNone/>
+            </a:pPr>
+            <a:r>
+              <a:rPr lang="en-US" sz="6000" b="1" dirty="0">
+                <a:solidFill>
+                  <a:srgbClr val="FFFFFF"/>
+                </a:solidFill>
+                <a:latin typeface="Calibri" pitchFamily="34" charset="0"/>
+                <a:ea typeface="Calibri" pitchFamily="34" charset="-122"/>
+                <a:cs typeface="Calibri" pitchFamily="34" charset="-120"/>
+              </a:rPr>
+              <a:t>Support every child </a:t>
+            </a:r>
+            <a:pPr algn="ctr" indent="0" marL="0">
+              <a:spcAft>
+                <a:spcPts val="200"/>
+              </a:spcAft>
+              <a:buNone/>
+            </a:pPr>
+            <a:r>
+              <a:rPr lang="en-US" sz="6000" b="1" dirty="0">
+                <a:solidFill>
+                  <a:srgbClr val="FB7185"/>
+                </a:solidFill>
+                <a:latin typeface="Calibri" pitchFamily="34" charset="0"/>
+                <a:ea typeface="Calibri" pitchFamily="34" charset="-122"/>
+                <a:cs typeface="Calibri" pitchFamily="34" charset="-120"/>
+              </a:rPr>
+              <a:t>meaningfully.</a:t>
+            </a:r>
+            <a:endParaRPr lang="en-US" sz="6000" dirty="0"/>
+          </a:p>
+        </p:txBody>
+      </p:sp>
+      <p:sp>
+        <p:nvSpPr>
+          <p:cNvPr id="8" name="Text 6"/>
+          <p:cNvSpPr/>
+          <p:nvPr/>
+        </p:nvSpPr>
+        <p:spPr>
+          <a:xfrm>
+            <a:off x="822960" y="4754880"/>
+            <a:ext cx="10545775" cy="1280160"/>
+          </a:xfrm>
+          <a:prstGeom prst="rect">
+            <a:avLst/>
+          </a:prstGeom>
+          <a:noFill/>
+          <a:ln/>
+        </p:spPr>
+        <p:txBody>
+          <a:bodyPr wrap="square" rtlCol="0" anchor="ctr"/>
+          <a:lstStyle/>
+          <a:p>
+            <a:pPr algn="ctr" indent="0" marL="0">
+              <a:spcBef>
+                <a:spcPts val="400"/>
+              </a:spcBef>
+              <a:buNone/>
+            </a:pPr>
+            <a:r>
+              <a:rPr lang="en-US" sz="1800" dirty="0">
+                <a:solidFill>
+                  <a:srgbClr val="D7D3E8"/>
+                </a:solidFill>
+                <a:latin typeface="Calibri" pitchFamily="34" charset="0"/>
+                <a:ea typeface="Calibri" pitchFamily="34" charset="-122"/>
+                <a:cs typeface="Calibri" pitchFamily="34" charset="-120"/>
+              </a:rPr>
+              <a:t>Sensory considerations, communication scaffolds, and movement-friendly options — built into the planning surface.</a:t>
+            </a:r>
+            <a:endParaRPr lang="en-US" sz="1800" dirty="0"/>
+          </a:p>
+        </p:txBody>
+      </p:sp>
       <p:pic>
         <p:nvPicPr>
-          <p:cNvPr id="2" name="Image 0" descr="/home/runner/workspace/artifacts/ccd-promo/scripts/frames/scene-11.jpg">    </p:cNvPr>
+          <p:cNvPr id="9" name="Image 0" descr="/home/runner/workspace/artifacts/ccd-promo/public/ccdesigner-wordmark.png">    </p:cNvPr>
           <p:cNvPicPr>
             <a:picLocks noChangeAspect="1"/>
           </p:cNvPicPr>
@@ -2872,14 +3589,53 @@
         </p:blipFill>
         <p:spPr>
           <a:xfrm>
-            <a:off x="0" y="0"/>
-            <a:ext cx="12191695" cy="6858000"/>
+            <a:off x="411480" y="365760"/>
+            <a:ext cx="1463040" cy="384048"/>
           </a:xfrm>
           <a:prstGeom prst="rect">
             <a:avLst/>
           </a:prstGeom>
         </p:spPr>
       </p:pic>
+      <p:sp>
+        <p:nvSpPr>
+          <p:cNvPr id="10" name="Text 7"/>
+          <p:cNvSpPr/>
+          <p:nvPr/>
+        </p:nvSpPr>
+        <p:spPr>
+          <a:xfrm>
+            <a:off x="10911535" y="365760"/>
+            <a:ext cx="914400" cy="274320"/>
+          </a:xfrm>
+          <a:prstGeom prst="rect">
+            <a:avLst/>
+          </a:prstGeom>
+          <a:noFill/>
+          <a:ln/>
+        </p:spPr>
+        <p:txBody>
+          <a:bodyPr wrap="square" rtlCol="0" anchor="ctr"/>
+          <a:lstStyle/>
+          <a:p>
+            <a:pPr algn="r" indent="0" marL="0">
+              <a:buNone/>
+            </a:pPr>
+            <a:r>
+              <a:rPr lang="en-US" sz="900" b="1" spc="400" kern="0" dirty="0">
+                <a:solidFill>
+                  <a:srgbClr val="8B85A8"/>
+                </a:solidFill>
+                <a:latin typeface="Calibri" pitchFamily="34" charset="0"/>
+                <a:ea typeface="Calibri" pitchFamily="34" charset="-122"/>
+                <a:cs typeface="Calibri" pitchFamily="34" charset="-120"/>
+              </a:rPr>
+              <a:t>11 / 22</a:t>
+            </a:r>
+            <a:endParaRPr lang="en-US" sz="900" dirty="0"/>
+          </a:p>
+        </p:txBody>
+      </p:sp>
     </p:spTree>
   </p:cSld>
   <p:clrMapOvr>
@@ -2894,7 +3650,7 @@
     <p:bg>
       <p:bgPr>
         <a:solidFill>
-          <a:srgbClr val="000000"/>
+          <a:srgbClr val="0B0820"/>
         </a:solidFill>
       </p:bgPr>
     </p:bg>
@@ -2912,9 +3668,262 @@
           <a:chExt cx="0" cy="0"/>
         </a:xfrm>
       </p:grpSpPr>
+      <p:sp>
+        <p:nvSpPr>
+          <p:cNvPr id="2" name="Shape 0"/>
+          <p:cNvSpPr/>
+          <p:nvPr/>
+        </p:nvSpPr>
+        <p:spPr>
+          <a:xfrm>
+            <a:off x="0" y="0"/>
+            <a:ext cx="12191695" cy="6858000"/>
+          </a:xfrm>
+          <a:prstGeom prst="rect">
+            <a:avLst/>
+          </a:prstGeom>
+          <a:solidFill>
+            <a:srgbClr val="0B0820"/>
+          </a:solidFill>
+          <a:ln w="12700">
+            <a:solidFill>
+              <a:srgbClr val="0B0820"/>
+            </a:solidFill>
+            <a:prstDash val="solid"/>
+          </a:ln>
+        </p:spPr>
+      </p:sp>
+      <p:sp>
+        <p:nvSpPr>
+          <p:cNvPr id="3" name="Shape 1"/>
+          <p:cNvSpPr/>
+          <p:nvPr/>
+        </p:nvSpPr>
+        <p:spPr>
+          <a:xfrm>
+            <a:off x="0" y="0"/>
+            <a:ext cx="7924602" cy="6858000"/>
+          </a:xfrm>
+          <a:prstGeom prst="rect">
+            <a:avLst/>
+          </a:prstGeom>
+          <a:solidFill>
+            <a:srgbClr val="120F2E">
+              <a:alpha val="75000"/>
+            </a:srgbClr>
+          </a:solidFill>
+          <a:ln w="12700">
+            <a:solidFill>
+              <a:srgbClr val="120F2E"/>
+            </a:solidFill>
+            <a:prstDash val="solid"/>
+          </a:ln>
+        </p:spPr>
+      </p:sp>
+      <p:sp>
+        <p:nvSpPr>
+          <p:cNvPr id="4" name="Shape 2"/>
+          <p:cNvSpPr/>
+          <p:nvPr/>
+        </p:nvSpPr>
+        <p:spPr>
+          <a:xfrm>
+            <a:off x="-2286000" y="3200400"/>
+            <a:ext cx="7315200" cy="7315200"/>
+          </a:xfrm>
+          <a:prstGeom prst="ellipse">
+            <a:avLst/>
+          </a:prstGeom>
+          <a:solidFill>
+            <a:srgbClr val="7C3AED">
+              <a:alpha val="20000"/>
+            </a:srgbClr>
+          </a:solidFill>
+          <a:ln/>
+        </p:spPr>
+      </p:sp>
+      <p:sp>
+        <p:nvSpPr>
+          <p:cNvPr id="5" name="Shape 3"/>
+          <p:cNvSpPr/>
+          <p:nvPr/>
+        </p:nvSpPr>
+        <p:spPr>
+          <a:xfrm>
+            <a:off x="8534095" y="-2743200"/>
+            <a:ext cx="6400800" cy="6400800"/>
+          </a:xfrm>
+          <a:prstGeom prst="ellipse">
+            <a:avLst/>
+          </a:prstGeom>
+          <a:solidFill>
+            <a:srgbClr val="14B8A6">
+              <a:alpha val="15000"/>
+            </a:srgbClr>
+          </a:solidFill>
+          <a:ln/>
+        </p:spPr>
+      </p:sp>
+      <p:sp>
+        <p:nvSpPr>
+          <p:cNvPr id="6" name="Text 4"/>
+          <p:cNvSpPr/>
+          <p:nvPr/>
+        </p:nvSpPr>
+        <p:spPr>
+          <a:xfrm>
+            <a:off x="822960" y="1783080"/>
+            <a:ext cx="10545775" cy="365760"/>
+          </a:xfrm>
+          <a:prstGeom prst="rect">
+            <a:avLst/>
+          </a:prstGeom>
+          <a:noFill/>
+          <a:ln/>
+        </p:spPr>
+        <p:txBody>
+          <a:bodyPr wrap="square" rtlCol="0" anchor="ctr"/>
+          <a:lstStyle/>
+          <a:p>
+            <a:pPr algn="l" indent="0" marL="0">
+              <a:buNone/>
+            </a:pPr>
+            <a:r>
+              <a:rPr lang="en-US" sz="1300" b="1" spc="800" kern="0" dirty="0">
+                <a:solidFill>
+                  <a:srgbClr val="F59E0B"/>
+                </a:solidFill>
+                <a:latin typeface="Calibri" pitchFamily="34" charset="0"/>
+                <a:ea typeface="Calibri" pitchFamily="34" charset="-122"/>
+                <a:cs typeface="Calibri" pitchFamily="34" charset="-120"/>
+              </a:rPr>
+              <a:t>DEPTH, NOT SPEED</a:t>
+            </a:r>
+            <a:endParaRPr lang="en-US" sz="1300" dirty="0"/>
+          </a:p>
+        </p:txBody>
+      </p:sp>
+      <p:sp>
+        <p:nvSpPr>
+          <p:cNvPr id="7" name="Text 5"/>
+          <p:cNvSpPr/>
+          <p:nvPr/>
+        </p:nvSpPr>
+        <p:spPr>
+          <a:xfrm>
+            <a:off x="822960" y="2286000"/>
+            <a:ext cx="10545775" cy="2011680"/>
+          </a:xfrm>
+          <a:prstGeom prst="rect">
+            <a:avLst/>
+          </a:prstGeom>
+          <a:noFill/>
+          <a:ln/>
+        </p:spPr>
+        <p:txBody>
+          <a:bodyPr wrap="square" rtlCol="0" anchor="t"/>
+          <a:lstStyle/>
+          <a:p>
+            <a:pPr algn="l" indent="0" marL="0">
+              <a:spcAft>
+                <a:spcPts val="200"/>
+              </a:spcAft>
+              <a:buNone/>
+            </a:pPr>
+            <a:r>
+              <a:rPr lang="en-US" sz="5600" b="1" dirty="0">
+                <a:solidFill>
+                  <a:srgbClr val="FFFFFF"/>
+                </a:solidFill>
+                <a:latin typeface="Calibri" pitchFamily="34" charset="0"/>
+                <a:ea typeface="Calibri" pitchFamily="34" charset="-122"/>
+                <a:cs typeface="Calibri" pitchFamily="34" charset="-120"/>
+              </a:rPr>
+              <a:t>Create </a:t>
+            </a:r>
+            <a:pPr algn="l" indent="0" marL="0">
+              <a:spcAft>
+                <a:spcPts val="200"/>
+              </a:spcAft>
+              <a:buNone/>
+            </a:pPr>
+            <a:r>
+              <a:rPr lang="en-US" sz="5600" b="1" dirty="0">
+                <a:solidFill>
+                  <a:srgbClr val="FBBF24"/>
+                </a:solidFill>
+                <a:latin typeface="Calibri" pitchFamily="34" charset="0"/>
+                <a:ea typeface="Calibri" pitchFamily="34" charset="-122"/>
+                <a:cs typeface="Calibri" pitchFamily="34" charset="-120"/>
+              </a:rPr>
+              <a:t>deeper</a:t>
+            </a:r>
+            <a:pPr algn="l" indent="0" marL="0">
+              <a:spcAft>
+                <a:spcPts val="200"/>
+              </a:spcAft>
+              <a:buNone/>
+            </a:pPr>
+            <a:r>
+              <a:rPr lang="en-US" sz="5600" b="1" dirty="0">
+                <a:solidFill>
+                  <a:srgbClr val="FFFFFF"/>
+                </a:solidFill>
+                <a:latin typeface="Calibri" pitchFamily="34" charset="0"/>
+                <a:ea typeface="Calibri" pitchFamily="34" charset="-122"/>
+                <a:cs typeface="Calibri" pitchFamily="34" charset="-120"/>
+              </a:rPr>
+              <a:t> learning opportunities.</a:t>
+            </a:r>
+            <a:endParaRPr lang="en-US" sz="5600" dirty="0"/>
+          </a:p>
+        </p:txBody>
+      </p:sp>
+      <p:sp>
+        <p:nvSpPr>
+          <p:cNvPr id="8" name="Text 6"/>
+          <p:cNvSpPr/>
+          <p:nvPr/>
+        </p:nvSpPr>
+        <p:spPr>
+          <a:xfrm>
+            <a:off x="822960" y="4937760"/>
+            <a:ext cx="8225705" cy="1280160"/>
+          </a:xfrm>
+          <a:prstGeom prst="rect">
+            <a:avLst/>
+          </a:prstGeom>
+          <a:noFill/>
+          <a:ln/>
+        </p:spPr>
+        <p:txBody>
+          <a:bodyPr wrap="square" rtlCol="0" anchor="ctr"/>
+          <a:lstStyle/>
+          <a:p>
+            <a:pPr algn="l" indent="0" marL="0">
+              <a:spcBef>
+                <a:spcPts val="400"/>
+              </a:spcBef>
+              <a:buNone/>
+            </a:pPr>
+            <a:r>
+              <a:rPr lang="en-US" sz="1800" dirty="0">
+                <a:solidFill>
+                  <a:srgbClr val="D7D3E8"/>
+                </a:solidFill>
+                <a:latin typeface="Calibri" pitchFamily="34" charset="0"/>
+                <a:ea typeface="Calibri" pitchFamily="34" charset="-122"/>
+                <a:cs typeface="Calibri" pitchFamily="34" charset="-120"/>
+              </a:rPr>
+              <a:t>Stretch tasks, metacognitive prompts, and challenge layers — woven naturally through every lesson.</a:t>
+            </a:r>
+            <a:endParaRPr lang="en-US" sz="1800" dirty="0"/>
+          </a:p>
+        </p:txBody>
+      </p:sp>
       <p:pic>
         <p:nvPicPr>
-          <p:cNvPr id="2" name="Image 0" descr="/home/runner/workspace/artifacts/ccd-promo/scripts/frames/scene-12.jpg">    </p:cNvPr>
+          <p:cNvPr id="9" name="Image 0" descr="/home/runner/workspace/artifacts/ccd-promo/public/ccdesigner-wordmark.png">    </p:cNvPr>
           <p:cNvPicPr>
             <a:picLocks noChangeAspect="1"/>
           </p:cNvPicPr>
@@ -2928,14 +3937,53 @@
         </p:blipFill>
         <p:spPr>
           <a:xfrm>
-            <a:off x="0" y="0"/>
-            <a:ext cx="12191695" cy="6858000"/>
+            <a:off x="411480" y="365760"/>
+            <a:ext cx="1463040" cy="384048"/>
           </a:xfrm>
           <a:prstGeom prst="rect">
             <a:avLst/>
           </a:prstGeom>
         </p:spPr>
       </p:pic>
+      <p:sp>
+        <p:nvSpPr>
+          <p:cNvPr id="10" name="Text 7"/>
+          <p:cNvSpPr/>
+          <p:nvPr/>
+        </p:nvSpPr>
+        <p:spPr>
+          <a:xfrm>
+            <a:off x="10911535" y="365760"/>
+            <a:ext cx="914400" cy="274320"/>
+          </a:xfrm>
+          <a:prstGeom prst="rect">
+            <a:avLst/>
+          </a:prstGeom>
+          <a:noFill/>
+          <a:ln/>
+        </p:spPr>
+        <p:txBody>
+          <a:bodyPr wrap="square" rtlCol="0" anchor="ctr"/>
+          <a:lstStyle/>
+          <a:p>
+            <a:pPr algn="r" indent="0" marL="0">
+              <a:buNone/>
+            </a:pPr>
+            <a:r>
+              <a:rPr lang="en-US" sz="900" b="1" spc="400" kern="0" dirty="0">
+                <a:solidFill>
+                  <a:srgbClr val="8B85A8"/>
+                </a:solidFill>
+                <a:latin typeface="Calibri" pitchFamily="34" charset="0"/>
+                <a:ea typeface="Calibri" pitchFamily="34" charset="-122"/>
+                <a:cs typeface="Calibri" pitchFamily="34" charset="-120"/>
+              </a:rPr>
+              <a:t>12 / 22</a:t>
+            </a:r>
+            <a:endParaRPr lang="en-US" sz="900" dirty="0"/>
+          </a:p>
+        </p:txBody>
+      </p:sp>
     </p:spTree>
   </p:cSld>
   <p:clrMapOvr>
@@ -2950,7 +3998,7 @@
     <p:bg>
       <p:bgPr>
         <a:solidFill>
-          <a:srgbClr val="000000"/>
+          <a:srgbClr val="0B0820"/>
         </a:solidFill>
       </p:bgPr>
     </p:bg>
@@ -2968,9 +4016,262 @@
           <a:chExt cx="0" cy="0"/>
         </a:xfrm>
       </p:grpSpPr>
+      <p:sp>
+        <p:nvSpPr>
+          <p:cNvPr id="2" name="Shape 0"/>
+          <p:cNvSpPr/>
+          <p:nvPr/>
+        </p:nvSpPr>
+        <p:spPr>
+          <a:xfrm>
+            <a:off x="0" y="0"/>
+            <a:ext cx="12191695" cy="6858000"/>
+          </a:xfrm>
+          <a:prstGeom prst="rect">
+            <a:avLst/>
+          </a:prstGeom>
+          <a:solidFill>
+            <a:srgbClr val="0B0820"/>
+          </a:solidFill>
+          <a:ln w="12700">
+            <a:solidFill>
+              <a:srgbClr val="0B0820"/>
+            </a:solidFill>
+            <a:prstDash val="solid"/>
+          </a:ln>
+        </p:spPr>
+      </p:sp>
+      <p:sp>
+        <p:nvSpPr>
+          <p:cNvPr id="3" name="Shape 1"/>
+          <p:cNvSpPr/>
+          <p:nvPr/>
+        </p:nvSpPr>
+        <p:spPr>
+          <a:xfrm>
+            <a:off x="0" y="0"/>
+            <a:ext cx="7924602" cy="6858000"/>
+          </a:xfrm>
+          <a:prstGeom prst="rect">
+            <a:avLst/>
+          </a:prstGeom>
+          <a:solidFill>
+            <a:srgbClr val="120F2E">
+              <a:alpha val="75000"/>
+            </a:srgbClr>
+          </a:solidFill>
+          <a:ln w="12700">
+            <a:solidFill>
+              <a:srgbClr val="120F2E"/>
+            </a:solidFill>
+            <a:prstDash val="solid"/>
+          </a:ln>
+        </p:spPr>
+      </p:sp>
+      <p:sp>
+        <p:nvSpPr>
+          <p:cNvPr id="4" name="Shape 2"/>
+          <p:cNvSpPr/>
+          <p:nvPr/>
+        </p:nvSpPr>
+        <p:spPr>
+          <a:xfrm>
+            <a:off x="-2286000" y="3200400"/>
+            <a:ext cx="7315200" cy="7315200"/>
+          </a:xfrm>
+          <a:prstGeom prst="ellipse">
+            <a:avLst/>
+          </a:prstGeom>
+          <a:solidFill>
+            <a:srgbClr val="7C3AED">
+              <a:alpha val="20000"/>
+            </a:srgbClr>
+          </a:solidFill>
+          <a:ln/>
+        </p:spPr>
+      </p:sp>
+      <p:sp>
+        <p:nvSpPr>
+          <p:cNvPr id="5" name="Shape 3"/>
+          <p:cNvSpPr/>
+          <p:nvPr/>
+        </p:nvSpPr>
+        <p:spPr>
+          <a:xfrm>
+            <a:off x="8534095" y="-2743200"/>
+            <a:ext cx="6400800" cy="6400800"/>
+          </a:xfrm>
+          <a:prstGeom prst="ellipse">
+            <a:avLst/>
+          </a:prstGeom>
+          <a:solidFill>
+            <a:srgbClr val="14B8A6">
+              <a:alpha val="15000"/>
+            </a:srgbClr>
+          </a:solidFill>
+          <a:ln/>
+        </p:spPr>
+      </p:sp>
+      <p:sp>
+        <p:nvSpPr>
+          <p:cNvPr id="6" name="Text 4"/>
+          <p:cNvSpPr/>
+          <p:nvPr/>
+        </p:nvSpPr>
+        <p:spPr>
+          <a:xfrm>
+            <a:off x="822960" y="1783080"/>
+            <a:ext cx="10545775" cy="365760"/>
+          </a:xfrm>
+          <a:prstGeom prst="rect">
+            <a:avLst/>
+          </a:prstGeom>
+          <a:noFill/>
+          <a:ln/>
+        </p:spPr>
+        <p:txBody>
+          <a:bodyPr wrap="square" rtlCol="0" anchor="ctr"/>
+          <a:lstStyle/>
+          <a:p>
+            <a:pPr algn="l" indent="0" marL="0">
+              <a:buNone/>
+            </a:pPr>
+            <a:r>
+              <a:rPr lang="en-US" sz="1300" b="1" spc="800" kern="0" dirty="0">
+                <a:solidFill>
+                  <a:srgbClr val="C084FC"/>
+                </a:solidFill>
+                <a:latin typeface="Calibri" pitchFamily="34" charset="0"/>
+                <a:ea typeface="Calibri" pitchFamily="34" charset="-122"/>
+                <a:cs typeface="Calibri" pitchFamily="34" charset="-120"/>
+              </a:rPr>
+              <a:t>ONE THREAD, MANY SUBJECTS</a:t>
+            </a:r>
+            <a:endParaRPr lang="en-US" sz="1300" dirty="0"/>
+          </a:p>
+        </p:txBody>
+      </p:sp>
+      <p:sp>
+        <p:nvSpPr>
+          <p:cNvPr id="7" name="Text 5"/>
+          <p:cNvSpPr/>
+          <p:nvPr/>
+        </p:nvSpPr>
+        <p:spPr>
+          <a:xfrm>
+            <a:off x="822960" y="2286000"/>
+            <a:ext cx="10545775" cy="2011680"/>
+          </a:xfrm>
+          <a:prstGeom prst="rect">
+            <a:avLst/>
+          </a:prstGeom>
+          <a:noFill/>
+          <a:ln/>
+        </p:spPr>
+        <p:txBody>
+          <a:bodyPr wrap="square" rtlCol="0" anchor="t"/>
+          <a:lstStyle/>
+          <a:p>
+            <a:pPr algn="l" indent="0" marL="0">
+              <a:spcAft>
+                <a:spcPts val="200"/>
+              </a:spcAft>
+              <a:buNone/>
+            </a:pPr>
+            <a:r>
+              <a:rPr lang="en-US" sz="5600" b="1" dirty="0">
+                <a:solidFill>
+                  <a:srgbClr val="FFFFFF"/>
+                </a:solidFill>
+                <a:latin typeface="Calibri" pitchFamily="34" charset="0"/>
+                <a:ea typeface="Calibri" pitchFamily="34" charset="-122"/>
+                <a:cs typeface="Calibri" pitchFamily="34" charset="-120"/>
+              </a:rPr>
+              <a:t>Connect </a:t>
+            </a:r>
+            <a:pPr algn="l" indent="0" marL="0">
+              <a:spcAft>
+                <a:spcPts val="200"/>
+              </a:spcAft>
+              <a:buNone/>
+            </a:pPr>
+            <a:r>
+              <a:rPr lang="en-US" sz="5600" b="1" dirty="0">
+                <a:solidFill>
+                  <a:srgbClr val="C084FC"/>
+                </a:solidFill>
+                <a:latin typeface="Calibri" pitchFamily="34" charset="0"/>
+                <a:ea typeface="Calibri" pitchFamily="34" charset="-122"/>
+                <a:cs typeface="Calibri" pitchFamily="34" charset="-120"/>
+              </a:rPr>
+              <a:t>subjects</a:t>
+            </a:r>
+            <a:pPr algn="l" indent="0" marL="0">
+              <a:spcAft>
+                <a:spcPts val="200"/>
+              </a:spcAft>
+              <a:buNone/>
+            </a:pPr>
+            <a:r>
+              <a:rPr lang="en-US" sz="5600" b="1" dirty="0">
+                <a:solidFill>
+                  <a:srgbClr val="FFFFFF"/>
+                </a:solidFill>
+                <a:latin typeface="Calibri" pitchFamily="34" charset="0"/>
+                <a:ea typeface="Calibri" pitchFamily="34" charset="-122"/>
+                <a:cs typeface="Calibri" pitchFamily="34" charset="-120"/>
+              </a:rPr>
+              <a:t> naturally.</a:t>
+            </a:r>
+            <a:endParaRPr lang="en-US" sz="5600" dirty="0"/>
+          </a:p>
+        </p:txBody>
+      </p:sp>
+      <p:sp>
+        <p:nvSpPr>
+          <p:cNvPr id="8" name="Text 6"/>
+          <p:cNvSpPr/>
+          <p:nvPr/>
+        </p:nvSpPr>
+        <p:spPr>
+          <a:xfrm>
+            <a:off x="822960" y="4937760"/>
+            <a:ext cx="8225705" cy="1280160"/>
+          </a:xfrm>
+          <a:prstGeom prst="rect">
+            <a:avLst/>
+          </a:prstGeom>
+          <a:noFill/>
+          <a:ln/>
+        </p:spPr>
+        <p:txBody>
+          <a:bodyPr wrap="square" rtlCol="0" anchor="ctr"/>
+          <a:lstStyle/>
+          <a:p>
+            <a:pPr algn="l" indent="0" marL="0">
+              <a:spcBef>
+                <a:spcPts val="400"/>
+              </a:spcBef>
+              <a:buNone/>
+            </a:pPr>
+            <a:r>
+              <a:rPr lang="en-US" sz="1800" dirty="0">
+                <a:solidFill>
+                  <a:srgbClr val="D7D3E8"/>
+                </a:solidFill>
+                <a:latin typeface="Calibri" pitchFamily="34" charset="0"/>
+                <a:ea typeface="Calibri" pitchFamily="34" charset="-122"/>
+                <a:cs typeface="Calibri" pitchFamily="34" charset="-120"/>
+              </a:rPr>
+              <a:t>A single creative thread can run through drama, literacy, history, and beyond — designed deliberately, not by accident.</a:t>
+            </a:r>
+            <a:endParaRPr lang="en-US" sz="1800" dirty="0"/>
+          </a:p>
+        </p:txBody>
+      </p:sp>
       <p:pic>
         <p:nvPicPr>
-          <p:cNvPr id="2" name="Image 0" descr="/home/runner/workspace/artifacts/ccd-promo/scripts/frames/scene-13.jpg">    </p:cNvPr>
+          <p:cNvPr id="9" name="Image 0" descr="/home/runner/workspace/artifacts/ccd-promo/public/ccdesigner-wordmark.png">    </p:cNvPr>
           <p:cNvPicPr>
             <a:picLocks noChangeAspect="1"/>
           </p:cNvPicPr>
@@ -2984,14 +4285,53 @@
         </p:blipFill>
         <p:spPr>
           <a:xfrm>
-            <a:off x="0" y="0"/>
-            <a:ext cx="12191695" cy="6858000"/>
+            <a:off x="411480" y="365760"/>
+            <a:ext cx="1463040" cy="384048"/>
           </a:xfrm>
           <a:prstGeom prst="rect">
             <a:avLst/>
           </a:prstGeom>
         </p:spPr>
       </p:pic>
+      <p:sp>
+        <p:nvSpPr>
+          <p:cNvPr id="10" name="Text 7"/>
+          <p:cNvSpPr/>
+          <p:nvPr/>
+        </p:nvSpPr>
+        <p:spPr>
+          <a:xfrm>
+            <a:off x="10911535" y="365760"/>
+            <a:ext cx="914400" cy="274320"/>
+          </a:xfrm>
+          <a:prstGeom prst="rect">
+            <a:avLst/>
+          </a:prstGeom>
+          <a:noFill/>
+          <a:ln/>
+        </p:spPr>
+        <p:txBody>
+          <a:bodyPr wrap="square" rtlCol="0" anchor="ctr"/>
+          <a:lstStyle/>
+          <a:p>
+            <a:pPr algn="r" indent="0" marL="0">
+              <a:buNone/>
+            </a:pPr>
+            <a:r>
+              <a:rPr lang="en-US" sz="900" b="1" spc="400" kern="0" dirty="0">
+                <a:solidFill>
+                  <a:srgbClr val="8B85A8"/>
+                </a:solidFill>
+                <a:latin typeface="Calibri" pitchFamily="34" charset="0"/>
+                <a:ea typeface="Calibri" pitchFamily="34" charset="-122"/>
+                <a:cs typeface="Calibri" pitchFamily="34" charset="-120"/>
+              </a:rPr>
+              <a:t>13 / 22</a:t>
+            </a:r>
+            <a:endParaRPr lang="en-US" sz="900" dirty="0"/>
+          </a:p>
+        </p:txBody>
+      </p:sp>
     </p:spTree>
   </p:cSld>
   <p:clrMapOvr>
@@ -3006,7 +4346,7 @@
     <p:bg>
       <p:bgPr>
         <a:solidFill>
-          <a:srgbClr val="000000"/>
+          <a:srgbClr val="0B0820"/>
         </a:solidFill>
       </p:bgPr>
     </p:bg>
@@ -3024,9 +4364,245 @@
           <a:chExt cx="0" cy="0"/>
         </a:xfrm>
       </p:grpSpPr>
+      <p:sp>
+        <p:nvSpPr>
+          <p:cNvPr id="2" name="Shape 0"/>
+          <p:cNvSpPr/>
+          <p:nvPr/>
+        </p:nvSpPr>
+        <p:spPr>
+          <a:xfrm>
+            <a:off x="0" y="0"/>
+            <a:ext cx="12191695" cy="6858000"/>
+          </a:xfrm>
+          <a:prstGeom prst="rect">
+            <a:avLst/>
+          </a:prstGeom>
+          <a:solidFill>
+            <a:srgbClr val="0B0820"/>
+          </a:solidFill>
+          <a:ln w="12700">
+            <a:solidFill>
+              <a:srgbClr val="0B0820"/>
+            </a:solidFill>
+            <a:prstDash val="solid"/>
+          </a:ln>
+        </p:spPr>
+      </p:sp>
+      <p:sp>
+        <p:nvSpPr>
+          <p:cNvPr id="3" name="Shape 1"/>
+          <p:cNvSpPr/>
+          <p:nvPr/>
+        </p:nvSpPr>
+        <p:spPr>
+          <a:xfrm>
+            <a:off x="0" y="0"/>
+            <a:ext cx="7924602" cy="6858000"/>
+          </a:xfrm>
+          <a:prstGeom prst="rect">
+            <a:avLst/>
+          </a:prstGeom>
+          <a:solidFill>
+            <a:srgbClr val="120F2E">
+              <a:alpha val="75000"/>
+            </a:srgbClr>
+          </a:solidFill>
+          <a:ln w="12700">
+            <a:solidFill>
+              <a:srgbClr val="120F2E"/>
+            </a:solidFill>
+            <a:prstDash val="solid"/>
+          </a:ln>
+        </p:spPr>
+      </p:sp>
+      <p:sp>
+        <p:nvSpPr>
+          <p:cNvPr id="4" name="Shape 2"/>
+          <p:cNvSpPr/>
+          <p:nvPr/>
+        </p:nvSpPr>
+        <p:spPr>
+          <a:xfrm>
+            <a:off x="-2286000" y="3200400"/>
+            <a:ext cx="7315200" cy="7315200"/>
+          </a:xfrm>
+          <a:prstGeom prst="ellipse">
+            <a:avLst/>
+          </a:prstGeom>
+          <a:solidFill>
+            <a:srgbClr val="7C3AED">
+              <a:alpha val="20000"/>
+            </a:srgbClr>
+          </a:solidFill>
+          <a:ln/>
+        </p:spPr>
+      </p:sp>
+      <p:sp>
+        <p:nvSpPr>
+          <p:cNvPr id="5" name="Shape 3"/>
+          <p:cNvSpPr/>
+          <p:nvPr/>
+        </p:nvSpPr>
+        <p:spPr>
+          <a:xfrm>
+            <a:off x="8534095" y="-2743200"/>
+            <a:ext cx="6400800" cy="6400800"/>
+          </a:xfrm>
+          <a:prstGeom prst="ellipse">
+            <a:avLst/>
+          </a:prstGeom>
+          <a:solidFill>
+            <a:srgbClr val="14B8A6">
+              <a:alpha val="15000"/>
+            </a:srgbClr>
+          </a:solidFill>
+          <a:ln/>
+        </p:spPr>
+      </p:sp>
+      <p:sp>
+        <p:nvSpPr>
+          <p:cNvPr id="6" name="Text 4"/>
+          <p:cNvSpPr/>
+          <p:nvPr/>
+        </p:nvSpPr>
+        <p:spPr>
+          <a:xfrm>
+            <a:off x="822960" y="1783080"/>
+            <a:ext cx="10545775" cy="365760"/>
+          </a:xfrm>
+          <a:prstGeom prst="rect">
+            <a:avLst/>
+          </a:prstGeom>
+          <a:noFill/>
+          <a:ln/>
+        </p:spPr>
+        <p:txBody>
+          <a:bodyPr wrap="square" rtlCol="0" anchor="ctr"/>
+          <a:lstStyle/>
+          <a:p>
+            <a:pPr algn="l" indent="0" marL="0">
+              <a:buNone/>
+            </a:pPr>
+            <a:r>
+              <a:rPr lang="en-US" sz="1300" b="1" spc="800" kern="0" dirty="0">
+                <a:solidFill>
+                  <a:srgbClr val="5EEAD4"/>
+                </a:solidFill>
+                <a:latin typeface="Calibri" pitchFamily="34" charset="0"/>
+                <a:ea typeface="Calibri" pitchFamily="34" charset="-122"/>
+                <a:cs typeface="Calibri" pitchFamily="34" charset="-120"/>
+              </a:rPr>
+              <a:t>A LOOP, NOT A LINE</a:t>
+            </a:r>
+            <a:endParaRPr lang="en-US" sz="1300" dirty="0"/>
+          </a:p>
+        </p:txBody>
+      </p:sp>
+      <p:sp>
+        <p:nvSpPr>
+          <p:cNvPr id="7" name="Text 5"/>
+          <p:cNvSpPr/>
+          <p:nvPr/>
+        </p:nvSpPr>
+        <p:spPr>
+          <a:xfrm>
+            <a:off x="822960" y="2286000"/>
+            <a:ext cx="10545775" cy="2011680"/>
+          </a:xfrm>
+          <a:prstGeom prst="rect">
+            <a:avLst/>
+          </a:prstGeom>
+          <a:noFill/>
+          <a:ln/>
+        </p:spPr>
+        <p:txBody>
+          <a:bodyPr wrap="square" rtlCol="0" anchor="t"/>
+          <a:lstStyle/>
+          <a:p>
+            <a:pPr algn="l" indent="0" marL="0">
+              <a:spcAft>
+                <a:spcPts val="200"/>
+              </a:spcAft>
+              <a:buNone/>
+            </a:pPr>
+            <a:r>
+              <a:rPr lang="en-US" sz="5600" b="1" dirty="0">
+                <a:solidFill>
+                  <a:srgbClr val="FFFFFF"/>
+                </a:solidFill>
+                <a:latin typeface="Calibri" pitchFamily="34" charset="0"/>
+                <a:ea typeface="Calibri" pitchFamily="34" charset="-122"/>
+                <a:cs typeface="Calibri" pitchFamily="34" charset="-120"/>
+              </a:rPr>
+              <a:t>Reflect. Adapt. </a:t>
+            </a:r>
+            <a:pPr algn="l" indent="0" marL="0">
+              <a:spcAft>
+                <a:spcPts val="200"/>
+              </a:spcAft>
+              <a:buNone/>
+            </a:pPr>
+            <a:r>
+              <a:rPr lang="en-US" sz="5600" b="1" dirty="0">
+                <a:solidFill>
+                  <a:srgbClr val="5EEAD4"/>
+                </a:solidFill>
+                <a:latin typeface="Calibri" pitchFamily="34" charset="0"/>
+                <a:ea typeface="Calibri" pitchFamily="34" charset="-122"/>
+                <a:cs typeface="Calibri" pitchFamily="34" charset="-120"/>
+              </a:rPr>
+              <a:t>Improve.</a:t>
+            </a:r>
+            <a:endParaRPr lang="en-US" sz="5600" dirty="0"/>
+          </a:p>
+        </p:txBody>
+      </p:sp>
+      <p:sp>
+        <p:nvSpPr>
+          <p:cNvPr id="8" name="Text 6"/>
+          <p:cNvSpPr/>
+          <p:nvPr/>
+        </p:nvSpPr>
+        <p:spPr>
+          <a:xfrm>
+            <a:off x="822960" y="4937760"/>
+            <a:ext cx="8225705" cy="1280160"/>
+          </a:xfrm>
+          <a:prstGeom prst="rect">
+            <a:avLst/>
+          </a:prstGeom>
+          <a:noFill/>
+          <a:ln/>
+        </p:spPr>
+        <p:txBody>
+          <a:bodyPr wrap="square" rtlCol="0" anchor="ctr"/>
+          <a:lstStyle/>
+          <a:p>
+            <a:pPr algn="l" indent="0" marL="0">
+              <a:spcBef>
+                <a:spcPts val="400"/>
+              </a:spcBef>
+              <a:buNone/>
+            </a:pPr>
+            <a:r>
+              <a:rPr lang="en-US" sz="1800" dirty="0">
+                <a:solidFill>
+                  <a:srgbClr val="D7D3E8"/>
+                </a:solidFill>
+                <a:latin typeface="Calibri" pitchFamily="34" charset="0"/>
+                <a:ea typeface="Calibri" pitchFamily="34" charset="-122"/>
+                <a:cs typeface="Calibri" pitchFamily="34" charset="-120"/>
+              </a:rPr>
+              <a:t>Capture what worked. Refine what didn't. Each lesson becomes the seed of the next.</a:t>
+            </a:r>
+            <a:endParaRPr lang="en-US" sz="1800" dirty="0"/>
+          </a:p>
+        </p:txBody>
+      </p:sp>
       <p:pic>
         <p:nvPicPr>
-          <p:cNvPr id="2" name="Image 0" descr="/home/runner/workspace/artifacts/ccd-promo/scripts/frames/scene-14.jpg">    </p:cNvPr>
+          <p:cNvPr id="9" name="Image 0" descr="/home/runner/workspace/artifacts/ccd-promo/public/ccdesigner-wordmark.png">    </p:cNvPr>
           <p:cNvPicPr>
             <a:picLocks noChangeAspect="1"/>
           </p:cNvPicPr>
@@ -3040,14 +4616,53 @@
         </p:blipFill>
         <p:spPr>
           <a:xfrm>
-            <a:off x="0" y="0"/>
-            <a:ext cx="12191695" cy="6858000"/>
+            <a:off x="411480" y="365760"/>
+            <a:ext cx="1463040" cy="384048"/>
           </a:xfrm>
           <a:prstGeom prst="rect">
             <a:avLst/>
           </a:prstGeom>
         </p:spPr>
       </p:pic>
+      <p:sp>
+        <p:nvSpPr>
+          <p:cNvPr id="10" name="Text 7"/>
+          <p:cNvSpPr/>
+          <p:nvPr/>
+        </p:nvSpPr>
+        <p:spPr>
+          <a:xfrm>
+            <a:off x="10911535" y="365760"/>
+            <a:ext cx="914400" cy="274320"/>
+          </a:xfrm>
+          <a:prstGeom prst="rect">
+            <a:avLst/>
+          </a:prstGeom>
+          <a:noFill/>
+          <a:ln/>
+        </p:spPr>
+        <p:txBody>
+          <a:bodyPr wrap="square" rtlCol="0" anchor="ctr"/>
+          <a:lstStyle/>
+          <a:p>
+            <a:pPr algn="r" indent="0" marL="0">
+              <a:buNone/>
+            </a:pPr>
+            <a:r>
+              <a:rPr lang="en-US" sz="900" b="1" spc="400" kern="0" dirty="0">
+                <a:solidFill>
+                  <a:srgbClr val="8B85A8"/>
+                </a:solidFill>
+                <a:latin typeface="Calibri" pitchFamily="34" charset="0"/>
+                <a:ea typeface="Calibri" pitchFamily="34" charset="-122"/>
+                <a:cs typeface="Calibri" pitchFamily="34" charset="-120"/>
+              </a:rPr>
+              <a:t>14 / 22</a:t>
+            </a:r>
+            <a:endParaRPr lang="en-US" sz="900" dirty="0"/>
+          </a:p>
+        </p:txBody>
+      </p:sp>
     </p:spTree>
   </p:cSld>
   <p:clrMapOvr>
@@ -3062,7 +4677,7 @@
     <p:bg>
       <p:bgPr>
         <a:solidFill>
-          <a:srgbClr val="000000"/>
+          <a:srgbClr val="0B0820"/>
         </a:solidFill>
       </p:bgPr>
     </p:bg>
@@ -3080,9 +4695,262 @@
           <a:chExt cx="0" cy="0"/>
         </a:xfrm>
       </p:grpSpPr>
+      <p:sp>
+        <p:nvSpPr>
+          <p:cNvPr id="2" name="Shape 0"/>
+          <p:cNvSpPr/>
+          <p:nvPr/>
+        </p:nvSpPr>
+        <p:spPr>
+          <a:xfrm>
+            <a:off x="0" y="0"/>
+            <a:ext cx="12191695" cy="6858000"/>
+          </a:xfrm>
+          <a:prstGeom prst="rect">
+            <a:avLst/>
+          </a:prstGeom>
+          <a:solidFill>
+            <a:srgbClr val="0B0820"/>
+          </a:solidFill>
+          <a:ln w="12700">
+            <a:solidFill>
+              <a:srgbClr val="0B0820"/>
+            </a:solidFill>
+            <a:prstDash val="solid"/>
+          </a:ln>
+        </p:spPr>
+      </p:sp>
+      <p:sp>
+        <p:nvSpPr>
+          <p:cNvPr id="3" name="Shape 1"/>
+          <p:cNvSpPr/>
+          <p:nvPr/>
+        </p:nvSpPr>
+        <p:spPr>
+          <a:xfrm>
+            <a:off x="0" y="0"/>
+            <a:ext cx="7924602" cy="6858000"/>
+          </a:xfrm>
+          <a:prstGeom prst="rect">
+            <a:avLst/>
+          </a:prstGeom>
+          <a:solidFill>
+            <a:srgbClr val="120F2E">
+              <a:alpha val="75000"/>
+            </a:srgbClr>
+          </a:solidFill>
+          <a:ln w="12700">
+            <a:solidFill>
+              <a:srgbClr val="120F2E"/>
+            </a:solidFill>
+            <a:prstDash val="solid"/>
+          </a:ln>
+        </p:spPr>
+      </p:sp>
+      <p:sp>
+        <p:nvSpPr>
+          <p:cNvPr id="4" name="Shape 2"/>
+          <p:cNvSpPr/>
+          <p:nvPr/>
+        </p:nvSpPr>
+        <p:spPr>
+          <a:xfrm>
+            <a:off x="-2286000" y="3200400"/>
+            <a:ext cx="7315200" cy="7315200"/>
+          </a:xfrm>
+          <a:prstGeom prst="ellipse">
+            <a:avLst/>
+          </a:prstGeom>
+          <a:solidFill>
+            <a:srgbClr val="7C3AED">
+              <a:alpha val="20000"/>
+            </a:srgbClr>
+          </a:solidFill>
+          <a:ln/>
+        </p:spPr>
+      </p:sp>
+      <p:sp>
+        <p:nvSpPr>
+          <p:cNvPr id="5" name="Shape 3"/>
+          <p:cNvSpPr/>
+          <p:nvPr/>
+        </p:nvSpPr>
+        <p:spPr>
+          <a:xfrm>
+            <a:off x="8534095" y="-2743200"/>
+            <a:ext cx="6400800" cy="6400800"/>
+          </a:xfrm>
+          <a:prstGeom prst="ellipse">
+            <a:avLst/>
+          </a:prstGeom>
+          <a:solidFill>
+            <a:srgbClr val="14B8A6">
+              <a:alpha val="15000"/>
+            </a:srgbClr>
+          </a:solidFill>
+          <a:ln/>
+        </p:spPr>
+      </p:sp>
+      <p:sp>
+        <p:nvSpPr>
+          <p:cNvPr id="6" name="Text 4"/>
+          <p:cNvSpPr/>
+          <p:nvPr/>
+        </p:nvSpPr>
+        <p:spPr>
+          <a:xfrm>
+            <a:off x="822960" y="1783080"/>
+            <a:ext cx="10545775" cy="365760"/>
+          </a:xfrm>
+          <a:prstGeom prst="rect">
+            <a:avLst/>
+          </a:prstGeom>
+          <a:noFill/>
+          <a:ln/>
+        </p:spPr>
+        <p:txBody>
+          <a:bodyPr wrap="square" rtlCol="0" anchor="ctr"/>
+          <a:lstStyle/>
+          <a:p>
+            <a:pPr algn="l" indent="0" marL="0">
+              <a:buNone/>
+            </a:pPr>
+            <a:r>
+              <a:rPr lang="en-US" sz="1300" b="1" spc="800" kern="0" dirty="0">
+                <a:solidFill>
+                  <a:srgbClr val="A5B4FC"/>
+                </a:solidFill>
+                <a:latin typeface="Calibri" pitchFamily="34" charset="0"/>
+                <a:ea typeface="Calibri" pitchFamily="34" charset="-122"/>
+                <a:cs typeface="Calibri" pitchFamily="34" charset="-120"/>
+              </a:rPr>
+              <a:t>SKILLS, SEQUENCED</a:t>
+            </a:r>
+            <a:endParaRPr lang="en-US" sz="1300" dirty="0"/>
+          </a:p>
+        </p:txBody>
+      </p:sp>
+      <p:sp>
+        <p:nvSpPr>
+          <p:cNvPr id="7" name="Text 5"/>
+          <p:cNvSpPr/>
+          <p:nvPr/>
+        </p:nvSpPr>
+        <p:spPr>
+          <a:xfrm>
+            <a:off x="822960" y="2286000"/>
+            <a:ext cx="10545775" cy="2011680"/>
+          </a:xfrm>
+          <a:prstGeom prst="rect">
+            <a:avLst/>
+          </a:prstGeom>
+          <a:noFill/>
+          <a:ln/>
+        </p:spPr>
+        <p:txBody>
+          <a:bodyPr wrap="square" rtlCol="0" anchor="t"/>
+          <a:lstStyle/>
+          <a:p>
+            <a:pPr algn="l" indent="0" marL="0">
+              <a:spcAft>
+                <a:spcPts val="200"/>
+              </a:spcAft>
+              <a:buNone/>
+            </a:pPr>
+            <a:r>
+              <a:rPr lang="en-US" sz="5600" b="1" dirty="0">
+                <a:solidFill>
+                  <a:srgbClr val="FFFFFF"/>
+                </a:solidFill>
+                <a:latin typeface="Calibri" pitchFamily="34" charset="0"/>
+                <a:ea typeface="Calibri" pitchFamily="34" charset="-122"/>
+                <a:cs typeface="Calibri" pitchFamily="34" charset="-120"/>
+              </a:rPr>
+              <a:t>Track </a:t>
+            </a:r>
+            <a:pPr algn="l" indent="0" marL="0">
+              <a:spcAft>
+                <a:spcPts val="200"/>
+              </a:spcAft>
+              <a:buNone/>
+            </a:pPr>
+            <a:r>
+              <a:rPr lang="en-US" sz="5600" b="1" dirty="0">
+                <a:solidFill>
+                  <a:srgbClr val="A5B4FC"/>
+                </a:solidFill>
+                <a:latin typeface="Calibri" pitchFamily="34" charset="0"/>
+                <a:ea typeface="Calibri" pitchFamily="34" charset="-122"/>
+                <a:cs typeface="Calibri" pitchFamily="34" charset="-120"/>
+              </a:rPr>
+              <a:t>growth</a:t>
+            </a:r>
+            <a:pPr algn="l" indent="0" marL="0">
+              <a:spcAft>
+                <a:spcPts val="200"/>
+              </a:spcAft>
+              <a:buNone/>
+            </a:pPr>
+            <a:r>
+              <a:rPr lang="en-US" sz="5600" b="1" dirty="0">
+                <a:solidFill>
+                  <a:srgbClr val="FFFFFF"/>
+                </a:solidFill>
+                <a:latin typeface="Calibri" pitchFamily="34" charset="0"/>
+                <a:ea typeface="Calibri" pitchFamily="34" charset="-122"/>
+                <a:cs typeface="Calibri" pitchFamily="34" charset="-120"/>
+              </a:rPr>
+              <a:t> over time.</a:t>
+            </a:r>
+            <a:endParaRPr lang="en-US" sz="5600" dirty="0"/>
+          </a:p>
+        </p:txBody>
+      </p:sp>
+      <p:sp>
+        <p:nvSpPr>
+          <p:cNvPr id="8" name="Text 6"/>
+          <p:cNvSpPr/>
+          <p:nvPr/>
+        </p:nvSpPr>
+        <p:spPr>
+          <a:xfrm>
+            <a:off x="822960" y="4937760"/>
+            <a:ext cx="8225705" cy="1280160"/>
+          </a:xfrm>
+          <a:prstGeom prst="rect">
+            <a:avLst/>
+          </a:prstGeom>
+          <a:noFill/>
+          <a:ln/>
+        </p:spPr>
+        <p:txBody>
+          <a:bodyPr wrap="square" rtlCol="0" anchor="ctr"/>
+          <a:lstStyle/>
+          <a:p>
+            <a:pPr algn="l" indent="0" marL="0">
+              <a:spcBef>
+                <a:spcPts val="400"/>
+              </a:spcBef>
+              <a:buNone/>
+            </a:pPr>
+            <a:r>
+              <a:rPr lang="en-US" sz="1800" dirty="0">
+                <a:solidFill>
+                  <a:srgbClr val="D7D3E8"/>
+                </a:solidFill>
+                <a:latin typeface="Calibri" pitchFamily="34" charset="0"/>
+                <a:ea typeface="Calibri" pitchFamily="34" charset="-122"/>
+                <a:cs typeface="Calibri" pitchFamily="34" charset="-120"/>
+              </a:rPr>
+              <a:t>Each skill builds on the last. Progress becomes visible — not assumed.</a:t>
+            </a:r>
+            <a:endParaRPr lang="en-US" sz="1800" dirty="0"/>
+          </a:p>
+        </p:txBody>
+      </p:sp>
       <p:pic>
         <p:nvPicPr>
-          <p:cNvPr id="2" name="Image 0" descr="/home/runner/workspace/artifacts/ccd-promo/scripts/frames/scene-15.jpg">    </p:cNvPr>
+          <p:cNvPr id="9" name="Image 0" descr="/home/runner/workspace/artifacts/ccd-promo/public/ccdesigner-wordmark.png">    </p:cNvPr>
           <p:cNvPicPr>
             <a:picLocks noChangeAspect="1"/>
           </p:cNvPicPr>
@@ -3096,14 +4964,53 @@
         </p:blipFill>
         <p:spPr>
           <a:xfrm>
-            <a:off x="0" y="0"/>
-            <a:ext cx="12191695" cy="6858000"/>
+            <a:off x="411480" y="365760"/>
+            <a:ext cx="1463040" cy="384048"/>
           </a:xfrm>
           <a:prstGeom prst="rect">
             <a:avLst/>
           </a:prstGeom>
         </p:spPr>
       </p:pic>
+      <p:sp>
+        <p:nvSpPr>
+          <p:cNvPr id="10" name="Text 7"/>
+          <p:cNvSpPr/>
+          <p:nvPr/>
+        </p:nvSpPr>
+        <p:spPr>
+          <a:xfrm>
+            <a:off x="10911535" y="365760"/>
+            <a:ext cx="914400" cy="274320"/>
+          </a:xfrm>
+          <a:prstGeom prst="rect">
+            <a:avLst/>
+          </a:prstGeom>
+          <a:noFill/>
+          <a:ln/>
+        </p:spPr>
+        <p:txBody>
+          <a:bodyPr wrap="square" rtlCol="0" anchor="ctr"/>
+          <a:lstStyle/>
+          <a:p>
+            <a:pPr algn="r" indent="0" marL="0">
+              <a:buNone/>
+            </a:pPr>
+            <a:r>
+              <a:rPr lang="en-US" sz="900" b="1" spc="400" kern="0" dirty="0">
+                <a:solidFill>
+                  <a:srgbClr val="8B85A8"/>
+                </a:solidFill>
+                <a:latin typeface="Calibri" pitchFamily="34" charset="0"/>
+                <a:ea typeface="Calibri" pitchFamily="34" charset="-122"/>
+                <a:cs typeface="Calibri" pitchFamily="34" charset="-120"/>
+              </a:rPr>
+              <a:t>15 / 22</a:t>
+            </a:r>
+            <a:endParaRPr lang="en-US" sz="900" dirty="0"/>
+          </a:p>
+        </p:txBody>
+      </p:sp>
     </p:spTree>
   </p:cSld>
   <p:clrMapOvr>
@@ -3118,7 +5025,7 @@
     <p:bg>
       <p:bgPr>
         <a:solidFill>
-          <a:srgbClr val="000000"/>
+          <a:srgbClr val="0B0820"/>
         </a:solidFill>
       </p:bgPr>
     </p:bg>
@@ -3136,9 +5043,245 @@
           <a:chExt cx="0" cy="0"/>
         </a:xfrm>
       </p:grpSpPr>
+      <p:sp>
+        <p:nvSpPr>
+          <p:cNvPr id="2" name="Shape 0"/>
+          <p:cNvSpPr/>
+          <p:nvPr/>
+        </p:nvSpPr>
+        <p:spPr>
+          <a:xfrm>
+            <a:off x="0" y="0"/>
+            <a:ext cx="12191695" cy="6858000"/>
+          </a:xfrm>
+          <a:prstGeom prst="rect">
+            <a:avLst/>
+          </a:prstGeom>
+          <a:solidFill>
+            <a:srgbClr val="0B0820"/>
+          </a:solidFill>
+          <a:ln w="12700">
+            <a:solidFill>
+              <a:srgbClr val="0B0820"/>
+            </a:solidFill>
+            <a:prstDash val="solid"/>
+          </a:ln>
+        </p:spPr>
+      </p:sp>
+      <p:sp>
+        <p:nvSpPr>
+          <p:cNvPr id="3" name="Shape 1"/>
+          <p:cNvSpPr/>
+          <p:nvPr/>
+        </p:nvSpPr>
+        <p:spPr>
+          <a:xfrm>
+            <a:off x="0" y="0"/>
+            <a:ext cx="7924602" cy="6858000"/>
+          </a:xfrm>
+          <a:prstGeom prst="rect">
+            <a:avLst/>
+          </a:prstGeom>
+          <a:solidFill>
+            <a:srgbClr val="120F2E">
+              <a:alpha val="75000"/>
+            </a:srgbClr>
+          </a:solidFill>
+          <a:ln w="12700">
+            <a:solidFill>
+              <a:srgbClr val="120F2E"/>
+            </a:solidFill>
+            <a:prstDash val="solid"/>
+          </a:ln>
+        </p:spPr>
+      </p:sp>
+      <p:sp>
+        <p:nvSpPr>
+          <p:cNvPr id="4" name="Shape 2"/>
+          <p:cNvSpPr/>
+          <p:nvPr/>
+        </p:nvSpPr>
+        <p:spPr>
+          <a:xfrm>
+            <a:off x="-2286000" y="3200400"/>
+            <a:ext cx="7315200" cy="7315200"/>
+          </a:xfrm>
+          <a:prstGeom prst="ellipse">
+            <a:avLst/>
+          </a:prstGeom>
+          <a:solidFill>
+            <a:srgbClr val="7C3AED">
+              <a:alpha val="20000"/>
+            </a:srgbClr>
+          </a:solidFill>
+          <a:ln/>
+        </p:spPr>
+      </p:sp>
+      <p:sp>
+        <p:nvSpPr>
+          <p:cNvPr id="5" name="Shape 3"/>
+          <p:cNvSpPr/>
+          <p:nvPr/>
+        </p:nvSpPr>
+        <p:spPr>
+          <a:xfrm>
+            <a:off x="8534095" y="-2743200"/>
+            <a:ext cx="6400800" cy="6400800"/>
+          </a:xfrm>
+          <a:prstGeom prst="ellipse">
+            <a:avLst/>
+          </a:prstGeom>
+          <a:solidFill>
+            <a:srgbClr val="14B8A6">
+              <a:alpha val="15000"/>
+            </a:srgbClr>
+          </a:solidFill>
+          <a:ln/>
+        </p:spPr>
+      </p:sp>
+      <p:sp>
+        <p:nvSpPr>
+          <p:cNvPr id="6" name="Text 4"/>
+          <p:cNvSpPr/>
+          <p:nvPr/>
+        </p:nvSpPr>
+        <p:spPr>
+          <a:xfrm>
+            <a:off x="822960" y="1783080"/>
+            <a:ext cx="10545775" cy="365760"/>
+          </a:xfrm>
+          <a:prstGeom prst="rect">
+            <a:avLst/>
+          </a:prstGeom>
+          <a:noFill/>
+          <a:ln/>
+        </p:spPr>
+        <p:txBody>
+          <a:bodyPr wrap="square" rtlCol="0" anchor="ctr"/>
+          <a:lstStyle/>
+          <a:p>
+            <a:pPr algn="l" indent="0" marL="0">
+              <a:buNone/>
+            </a:pPr>
+            <a:r>
+              <a:rPr lang="en-US" sz="1300" b="1" spc="800" kern="0" dirty="0">
+                <a:solidFill>
+                  <a:srgbClr val="7DD3FC"/>
+                </a:solidFill>
+                <a:latin typeface="Calibri" pitchFamily="34" charset="0"/>
+                <a:ea typeface="Calibri" pitchFamily="34" charset="-122"/>
+                <a:cs typeface="Calibri" pitchFamily="34" charset="-120"/>
+              </a:rPr>
+              <a:t>KNOWLEDGE, ON PURPOSE</a:t>
+            </a:r>
+            <a:endParaRPr lang="en-US" sz="1300" dirty="0"/>
+          </a:p>
+        </p:txBody>
+      </p:sp>
+      <p:sp>
+        <p:nvSpPr>
+          <p:cNvPr id="7" name="Text 5"/>
+          <p:cNvSpPr/>
+          <p:nvPr/>
+        </p:nvSpPr>
+        <p:spPr>
+          <a:xfrm>
+            <a:off x="822960" y="2286000"/>
+            <a:ext cx="10545775" cy="2011680"/>
+          </a:xfrm>
+          <a:prstGeom prst="rect">
+            <a:avLst/>
+          </a:prstGeom>
+          <a:noFill/>
+          <a:ln/>
+        </p:spPr>
+        <p:txBody>
+          <a:bodyPr wrap="square" rtlCol="0" anchor="t"/>
+          <a:lstStyle/>
+          <a:p>
+            <a:pPr algn="l" indent="0" marL="0">
+              <a:spcAft>
+                <a:spcPts val="200"/>
+              </a:spcAft>
+              <a:buNone/>
+            </a:pPr>
+            <a:r>
+              <a:rPr lang="en-US" sz="5600" b="1" dirty="0">
+                <a:solidFill>
+                  <a:srgbClr val="FFFFFF"/>
+                </a:solidFill>
+                <a:latin typeface="Calibri" pitchFamily="34" charset="0"/>
+                <a:ea typeface="Calibri" pitchFamily="34" charset="-122"/>
+                <a:cs typeface="Calibri" pitchFamily="34" charset="-120"/>
+              </a:rPr>
+              <a:t>Build knowledge </a:t>
+            </a:r>
+            <a:pPr algn="l" indent="0" marL="0">
+              <a:spcAft>
+                <a:spcPts val="200"/>
+              </a:spcAft>
+              <a:buNone/>
+            </a:pPr>
+            <a:r>
+              <a:rPr lang="en-US" sz="5600" b="1" dirty="0">
+                <a:solidFill>
+                  <a:srgbClr val="7DD3FC"/>
+                </a:solidFill>
+                <a:latin typeface="Calibri" pitchFamily="34" charset="0"/>
+                <a:ea typeface="Calibri" pitchFamily="34" charset="-122"/>
+                <a:cs typeface="Calibri" pitchFamily="34" charset="-120"/>
+              </a:rPr>
+              <a:t>intentionally.</a:t>
+            </a:r>
+            <a:endParaRPr lang="en-US" sz="5600" dirty="0"/>
+          </a:p>
+        </p:txBody>
+      </p:sp>
+      <p:sp>
+        <p:nvSpPr>
+          <p:cNvPr id="8" name="Text 6"/>
+          <p:cNvSpPr/>
+          <p:nvPr/>
+        </p:nvSpPr>
+        <p:spPr>
+          <a:xfrm>
+            <a:off x="822960" y="4937760"/>
+            <a:ext cx="8225705" cy="1280160"/>
+          </a:xfrm>
+          <a:prstGeom prst="rect">
+            <a:avLst/>
+          </a:prstGeom>
+          <a:noFill/>
+          <a:ln/>
+        </p:spPr>
+        <p:txBody>
+          <a:bodyPr wrap="square" rtlCol="0" anchor="ctr"/>
+          <a:lstStyle/>
+          <a:p>
+            <a:pPr algn="l" indent="0" marL="0">
+              <a:spcBef>
+                <a:spcPts val="400"/>
+              </a:spcBef>
+              <a:buNone/>
+            </a:pPr>
+            <a:r>
+              <a:rPr lang="en-US" sz="1800" dirty="0">
+                <a:solidFill>
+                  <a:srgbClr val="D7D3E8"/>
+                </a:solidFill>
+                <a:latin typeface="Calibri" pitchFamily="34" charset="0"/>
+                <a:ea typeface="Calibri" pitchFamily="34" charset="-122"/>
+                <a:cs typeface="Calibri" pitchFamily="34" charset="-120"/>
+              </a:rPr>
+              <a:t>Sequence what matters. Layer concepts so they hold. Nothing important left to chance.</a:t>
+            </a:r>
+            <a:endParaRPr lang="en-US" sz="1800" dirty="0"/>
+          </a:p>
+        </p:txBody>
+      </p:sp>
       <p:pic>
         <p:nvPicPr>
-          <p:cNvPr id="2" name="Image 0" descr="/home/runner/workspace/artifacts/ccd-promo/scripts/frames/scene-16.jpg">    </p:cNvPr>
+          <p:cNvPr id="9" name="Image 0" descr="/home/runner/workspace/artifacts/ccd-promo/public/ccdesigner-wordmark.png">    </p:cNvPr>
           <p:cNvPicPr>
             <a:picLocks noChangeAspect="1"/>
           </p:cNvPicPr>
@@ -3152,14 +5295,53 @@
         </p:blipFill>
         <p:spPr>
           <a:xfrm>
-            <a:off x="0" y="0"/>
-            <a:ext cx="12191695" cy="6858000"/>
+            <a:off x="411480" y="365760"/>
+            <a:ext cx="1463040" cy="384048"/>
           </a:xfrm>
           <a:prstGeom prst="rect">
             <a:avLst/>
           </a:prstGeom>
         </p:spPr>
       </p:pic>
+      <p:sp>
+        <p:nvSpPr>
+          <p:cNvPr id="10" name="Text 7"/>
+          <p:cNvSpPr/>
+          <p:nvPr/>
+        </p:nvSpPr>
+        <p:spPr>
+          <a:xfrm>
+            <a:off x="10911535" y="365760"/>
+            <a:ext cx="914400" cy="274320"/>
+          </a:xfrm>
+          <a:prstGeom prst="rect">
+            <a:avLst/>
+          </a:prstGeom>
+          <a:noFill/>
+          <a:ln/>
+        </p:spPr>
+        <p:txBody>
+          <a:bodyPr wrap="square" rtlCol="0" anchor="ctr"/>
+          <a:lstStyle/>
+          <a:p>
+            <a:pPr algn="r" indent="0" marL="0">
+              <a:buNone/>
+            </a:pPr>
+            <a:r>
+              <a:rPr lang="en-US" sz="900" b="1" spc="400" kern="0" dirty="0">
+                <a:solidFill>
+                  <a:srgbClr val="8B85A8"/>
+                </a:solidFill>
+                <a:latin typeface="Calibri" pitchFamily="34" charset="0"/>
+                <a:ea typeface="Calibri" pitchFamily="34" charset="-122"/>
+                <a:cs typeface="Calibri" pitchFamily="34" charset="-120"/>
+              </a:rPr>
+              <a:t>16 / 22</a:t>
+            </a:r>
+            <a:endParaRPr lang="en-US" sz="900" dirty="0"/>
+          </a:p>
+        </p:txBody>
+      </p:sp>
     </p:spTree>
   </p:cSld>
   <p:clrMapOvr>
@@ -3174,7 +5356,7 @@
     <p:bg>
       <p:bgPr>
         <a:solidFill>
-          <a:srgbClr val="000000"/>
+          <a:srgbClr val="0B0820"/>
         </a:solidFill>
       </p:bgPr>
     </p:bg>
@@ -3192,9 +5374,245 @@
           <a:chExt cx="0" cy="0"/>
         </a:xfrm>
       </p:grpSpPr>
+      <p:sp>
+        <p:nvSpPr>
+          <p:cNvPr id="2" name="Shape 0"/>
+          <p:cNvSpPr/>
+          <p:nvPr/>
+        </p:nvSpPr>
+        <p:spPr>
+          <a:xfrm>
+            <a:off x="0" y="0"/>
+            <a:ext cx="12191695" cy="6858000"/>
+          </a:xfrm>
+          <a:prstGeom prst="rect">
+            <a:avLst/>
+          </a:prstGeom>
+          <a:solidFill>
+            <a:srgbClr val="0B0820"/>
+          </a:solidFill>
+          <a:ln w="12700">
+            <a:solidFill>
+              <a:srgbClr val="0B0820"/>
+            </a:solidFill>
+            <a:prstDash val="solid"/>
+          </a:ln>
+        </p:spPr>
+      </p:sp>
+      <p:sp>
+        <p:nvSpPr>
+          <p:cNvPr id="3" name="Shape 1"/>
+          <p:cNvSpPr/>
+          <p:nvPr/>
+        </p:nvSpPr>
+        <p:spPr>
+          <a:xfrm>
+            <a:off x="0" y="0"/>
+            <a:ext cx="7924602" cy="6858000"/>
+          </a:xfrm>
+          <a:prstGeom prst="rect">
+            <a:avLst/>
+          </a:prstGeom>
+          <a:solidFill>
+            <a:srgbClr val="120F2E">
+              <a:alpha val="75000"/>
+            </a:srgbClr>
+          </a:solidFill>
+          <a:ln w="12700">
+            <a:solidFill>
+              <a:srgbClr val="120F2E"/>
+            </a:solidFill>
+            <a:prstDash val="solid"/>
+          </a:ln>
+        </p:spPr>
+      </p:sp>
+      <p:sp>
+        <p:nvSpPr>
+          <p:cNvPr id="4" name="Shape 2"/>
+          <p:cNvSpPr/>
+          <p:nvPr/>
+        </p:nvSpPr>
+        <p:spPr>
+          <a:xfrm>
+            <a:off x="-2286000" y="3200400"/>
+            <a:ext cx="7315200" cy="7315200"/>
+          </a:xfrm>
+          <a:prstGeom prst="ellipse">
+            <a:avLst/>
+          </a:prstGeom>
+          <a:solidFill>
+            <a:srgbClr val="7C3AED">
+              <a:alpha val="20000"/>
+            </a:srgbClr>
+          </a:solidFill>
+          <a:ln/>
+        </p:spPr>
+      </p:sp>
+      <p:sp>
+        <p:nvSpPr>
+          <p:cNvPr id="5" name="Shape 3"/>
+          <p:cNvSpPr/>
+          <p:nvPr/>
+        </p:nvSpPr>
+        <p:spPr>
+          <a:xfrm>
+            <a:off x="8534095" y="-2743200"/>
+            <a:ext cx="6400800" cy="6400800"/>
+          </a:xfrm>
+          <a:prstGeom prst="ellipse">
+            <a:avLst/>
+          </a:prstGeom>
+          <a:solidFill>
+            <a:srgbClr val="14B8A6">
+              <a:alpha val="15000"/>
+            </a:srgbClr>
+          </a:solidFill>
+          <a:ln/>
+        </p:spPr>
+      </p:sp>
+      <p:sp>
+        <p:nvSpPr>
+          <p:cNvPr id="6" name="Text 4"/>
+          <p:cNvSpPr/>
+          <p:nvPr/>
+        </p:nvSpPr>
+        <p:spPr>
+          <a:xfrm>
+            <a:off x="822960" y="1783080"/>
+            <a:ext cx="10545775" cy="365760"/>
+          </a:xfrm>
+          <a:prstGeom prst="rect">
+            <a:avLst/>
+          </a:prstGeom>
+          <a:noFill/>
+          <a:ln/>
+        </p:spPr>
+        <p:txBody>
+          <a:bodyPr wrap="square" rtlCol="0" anchor="ctr"/>
+          <a:lstStyle/>
+          <a:p>
+            <a:pPr algn="l" indent="0" marL="0">
+              <a:buNone/>
+            </a:pPr>
+            <a:r>
+              <a:rPr lang="en-US" sz="1300" b="1" spc="800" kern="0" dirty="0">
+                <a:solidFill>
+                  <a:srgbClr val="F59E0B"/>
+                </a:solidFill>
+                <a:latin typeface="Calibri" pitchFamily="34" charset="0"/>
+                <a:ea typeface="Calibri" pitchFamily="34" charset="-122"/>
+                <a:cs typeface="Calibri" pitchFamily="34" charset="-120"/>
+              </a:rPr>
+              <a:t>REMIX, DON'T RESTART</a:t>
+            </a:r>
+            <a:endParaRPr lang="en-US" sz="1300" dirty="0"/>
+          </a:p>
+        </p:txBody>
+      </p:sp>
+      <p:sp>
+        <p:nvSpPr>
+          <p:cNvPr id="7" name="Text 5"/>
+          <p:cNvSpPr/>
+          <p:nvPr/>
+        </p:nvSpPr>
+        <p:spPr>
+          <a:xfrm>
+            <a:off x="822960" y="2286000"/>
+            <a:ext cx="10545775" cy="2011680"/>
+          </a:xfrm>
+          <a:prstGeom prst="rect">
+            <a:avLst/>
+          </a:prstGeom>
+          <a:noFill/>
+          <a:ln/>
+        </p:spPr>
+        <p:txBody>
+          <a:bodyPr wrap="square" rtlCol="0" anchor="t"/>
+          <a:lstStyle/>
+          <a:p>
+            <a:pPr algn="l" indent="0" marL="0">
+              <a:spcAft>
+                <a:spcPts val="200"/>
+              </a:spcAft>
+              <a:buNone/>
+            </a:pPr>
+            <a:r>
+              <a:rPr lang="en-US" sz="5600" b="1" dirty="0">
+                <a:solidFill>
+                  <a:srgbClr val="FFFFFF"/>
+                </a:solidFill>
+                <a:latin typeface="Calibri" pitchFamily="34" charset="0"/>
+                <a:ea typeface="Calibri" pitchFamily="34" charset="-122"/>
+                <a:cs typeface="Calibri" pitchFamily="34" charset="-120"/>
+              </a:rPr>
+              <a:t>Inspiration that </a:t>
+            </a:r>
+            <a:pPr algn="l" indent="0" marL="0">
+              <a:spcAft>
+                <a:spcPts val="200"/>
+              </a:spcAft>
+              <a:buNone/>
+            </a:pPr>
+            <a:r>
+              <a:rPr lang="en-US" sz="5600" b="1" dirty="0">
+                <a:solidFill>
+                  <a:srgbClr val="FBBF24"/>
+                </a:solidFill>
+                <a:latin typeface="Calibri" pitchFamily="34" charset="0"/>
+                <a:ea typeface="Calibri" pitchFamily="34" charset="-122"/>
+                <a:cs typeface="Calibri" pitchFamily="34" charset="-120"/>
+              </a:rPr>
+              <a:t>grows with you.</a:t>
+            </a:r>
+            <a:endParaRPr lang="en-US" sz="5600" dirty="0"/>
+          </a:p>
+        </p:txBody>
+      </p:sp>
+      <p:sp>
+        <p:nvSpPr>
+          <p:cNvPr id="8" name="Text 6"/>
+          <p:cNvSpPr/>
+          <p:nvPr/>
+        </p:nvSpPr>
+        <p:spPr>
+          <a:xfrm>
+            <a:off x="822960" y="4937760"/>
+            <a:ext cx="8225705" cy="1280160"/>
+          </a:xfrm>
+          <a:prstGeom prst="rect">
+            <a:avLst/>
+          </a:prstGeom>
+          <a:noFill/>
+          <a:ln/>
+        </p:spPr>
+        <p:txBody>
+          <a:bodyPr wrap="square" rtlCol="0" anchor="ctr"/>
+          <a:lstStyle/>
+          <a:p>
+            <a:pPr algn="l" indent="0" marL="0">
+              <a:spcBef>
+                <a:spcPts val="400"/>
+              </a:spcBef>
+              <a:buNone/>
+            </a:pPr>
+            <a:r>
+              <a:rPr lang="en-US" sz="1800" dirty="0">
+                <a:solidFill>
+                  <a:srgbClr val="D7D3E8"/>
+                </a:solidFill>
+                <a:latin typeface="Calibri" pitchFamily="34" charset="0"/>
+                <a:ea typeface="Calibri" pitchFamily="34" charset="-122"/>
+                <a:cs typeface="Calibri" pitchFamily="34" charset="-120"/>
+              </a:rPr>
+              <a:t>Old ideas reconnect into new lessons. Your past teaching becomes the soil for what's next.</a:t>
+            </a:r>
+            <a:endParaRPr lang="en-US" sz="1800" dirty="0"/>
+          </a:p>
+        </p:txBody>
+      </p:sp>
       <p:pic>
         <p:nvPicPr>
-          <p:cNvPr id="2" name="Image 0" descr="/home/runner/workspace/artifacts/ccd-promo/scripts/frames/scene-17.jpg">    </p:cNvPr>
+          <p:cNvPr id="9" name="Image 0" descr="/home/runner/workspace/artifacts/ccd-promo/public/ccdesigner-wordmark.png">    </p:cNvPr>
           <p:cNvPicPr>
             <a:picLocks noChangeAspect="1"/>
           </p:cNvPicPr>
@@ -3208,14 +5626,53 @@
         </p:blipFill>
         <p:spPr>
           <a:xfrm>
-            <a:off x="0" y="0"/>
-            <a:ext cx="12191695" cy="6858000"/>
+            <a:off x="411480" y="365760"/>
+            <a:ext cx="1463040" cy="384048"/>
           </a:xfrm>
           <a:prstGeom prst="rect">
             <a:avLst/>
           </a:prstGeom>
         </p:spPr>
       </p:pic>
+      <p:sp>
+        <p:nvSpPr>
+          <p:cNvPr id="10" name="Text 7"/>
+          <p:cNvSpPr/>
+          <p:nvPr/>
+        </p:nvSpPr>
+        <p:spPr>
+          <a:xfrm>
+            <a:off x="10911535" y="365760"/>
+            <a:ext cx="914400" cy="274320"/>
+          </a:xfrm>
+          <a:prstGeom prst="rect">
+            <a:avLst/>
+          </a:prstGeom>
+          <a:noFill/>
+          <a:ln/>
+        </p:spPr>
+        <p:txBody>
+          <a:bodyPr wrap="square" rtlCol="0" anchor="ctr"/>
+          <a:lstStyle/>
+          <a:p>
+            <a:pPr algn="r" indent="0" marL="0">
+              <a:buNone/>
+            </a:pPr>
+            <a:r>
+              <a:rPr lang="en-US" sz="900" b="1" spc="400" kern="0" dirty="0">
+                <a:solidFill>
+                  <a:srgbClr val="8B85A8"/>
+                </a:solidFill>
+                <a:latin typeface="Calibri" pitchFamily="34" charset="0"/>
+                <a:ea typeface="Calibri" pitchFamily="34" charset="-122"/>
+                <a:cs typeface="Calibri" pitchFamily="34" charset="-120"/>
+              </a:rPr>
+              <a:t>17 / 22</a:t>
+            </a:r>
+            <a:endParaRPr lang="en-US" sz="900" dirty="0"/>
+          </a:p>
+        </p:txBody>
+      </p:sp>
     </p:spTree>
   </p:cSld>
   <p:clrMapOvr>
@@ -3230,7 +5687,7 @@
     <p:bg>
       <p:bgPr>
         <a:solidFill>
-          <a:srgbClr val="000000"/>
+          <a:srgbClr val="0B0820"/>
         </a:solidFill>
       </p:bgPr>
     </p:bg>
@@ -3248,9 +5705,262 @@
           <a:chExt cx="0" cy="0"/>
         </a:xfrm>
       </p:grpSpPr>
+      <p:sp>
+        <p:nvSpPr>
+          <p:cNvPr id="2" name="Shape 0"/>
+          <p:cNvSpPr/>
+          <p:nvPr/>
+        </p:nvSpPr>
+        <p:spPr>
+          <a:xfrm>
+            <a:off x="0" y="0"/>
+            <a:ext cx="12191695" cy="6858000"/>
+          </a:xfrm>
+          <a:prstGeom prst="rect">
+            <a:avLst/>
+          </a:prstGeom>
+          <a:solidFill>
+            <a:srgbClr val="0B0820"/>
+          </a:solidFill>
+          <a:ln w="12700">
+            <a:solidFill>
+              <a:srgbClr val="0B0820"/>
+            </a:solidFill>
+            <a:prstDash val="solid"/>
+          </a:ln>
+        </p:spPr>
+      </p:sp>
+      <p:sp>
+        <p:nvSpPr>
+          <p:cNvPr id="3" name="Shape 1"/>
+          <p:cNvSpPr/>
+          <p:nvPr/>
+        </p:nvSpPr>
+        <p:spPr>
+          <a:xfrm>
+            <a:off x="0" y="0"/>
+            <a:ext cx="7924602" cy="6858000"/>
+          </a:xfrm>
+          <a:prstGeom prst="rect">
+            <a:avLst/>
+          </a:prstGeom>
+          <a:solidFill>
+            <a:srgbClr val="120F2E">
+              <a:alpha val="75000"/>
+            </a:srgbClr>
+          </a:solidFill>
+          <a:ln w="12700">
+            <a:solidFill>
+              <a:srgbClr val="120F2E"/>
+            </a:solidFill>
+            <a:prstDash val="solid"/>
+          </a:ln>
+        </p:spPr>
+      </p:sp>
+      <p:sp>
+        <p:nvSpPr>
+          <p:cNvPr id="4" name="Shape 2"/>
+          <p:cNvSpPr/>
+          <p:nvPr/>
+        </p:nvSpPr>
+        <p:spPr>
+          <a:xfrm>
+            <a:off x="-2286000" y="3200400"/>
+            <a:ext cx="7315200" cy="7315200"/>
+          </a:xfrm>
+          <a:prstGeom prst="ellipse">
+            <a:avLst/>
+          </a:prstGeom>
+          <a:solidFill>
+            <a:srgbClr val="7C3AED">
+              <a:alpha val="20000"/>
+            </a:srgbClr>
+          </a:solidFill>
+          <a:ln/>
+        </p:spPr>
+      </p:sp>
+      <p:sp>
+        <p:nvSpPr>
+          <p:cNvPr id="5" name="Shape 3"/>
+          <p:cNvSpPr/>
+          <p:nvPr/>
+        </p:nvSpPr>
+        <p:spPr>
+          <a:xfrm>
+            <a:off x="8534095" y="-2743200"/>
+            <a:ext cx="6400800" cy="6400800"/>
+          </a:xfrm>
+          <a:prstGeom prst="ellipse">
+            <a:avLst/>
+          </a:prstGeom>
+          <a:solidFill>
+            <a:srgbClr val="14B8A6">
+              <a:alpha val="15000"/>
+            </a:srgbClr>
+          </a:solidFill>
+          <a:ln/>
+        </p:spPr>
+      </p:sp>
+      <p:sp>
+        <p:nvSpPr>
+          <p:cNvPr id="6" name="Text 4"/>
+          <p:cNvSpPr/>
+          <p:nvPr/>
+        </p:nvSpPr>
+        <p:spPr>
+          <a:xfrm>
+            <a:off x="822960" y="1783080"/>
+            <a:ext cx="10545775" cy="365760"/>
+          </a:xfrm>
+          <a:prstGeom prst="rect">
+            <a:avLst/>
+          </a:prstGeom>
+          <a:noFill/>
+          <a:ln/>
+        </p:spPr>
+        <p:txBody>
+          <a:bodyPr wrap="square" rtlCol="0" anchor="ctr"/>
+          <a:lstStyle/>
+          <a:p>
+            <a:pPr algn="l" indent="0" marL="0">
+              <a:buNone/>
+            </a:pPr>
+            <a:r>
+              <a:rPr lang="en-US" sz="1300" b="1" spc="800" kern="0" dirty="0">
+                <a:solidFill>
+                  <a:srgbClr val="C084FC"/>
+                </a:solidFill>
+                <a:latin typeface="Calibri" pitchFamily="34" charset="0"/>
+                <a:ea typeface="Calibri" pitchFamily="34" charset="-122"/>
+                <a:cs typeface="Calibri" pitchFamily="34" charset="-120"/>
+              </a:rPr>
+              <a:t>A GROWING ECOSYSTEM</a:t>
+            </a:r>
+            <a:endParaRPr lang="en-US" sz="1300" dirty="0"/>
+          </a:p>
+        </p:txBody>
+      </p:sp>
+      <p:sp>
+        <p:nvSpPr>
+          <p:cNvPr id="7" name="Text 5"/>
+          <p:cNvSpPr/>
+          <p:nvPr/>
+        </p:nvSpPr>
+        <p:spPr>
+          <a:xfrm>
+            <a:off x="822960" y="2286000"/>
+            <a:ext cx="10545775" cy="2011680"/>
+          </a:xfrm>
+          <a:prstGeom prst="rect">
+            <a:avLst/>
+          </a:prstGeom>
+          <a:noFill/>
+          <a:ln/>
+        </p:spPr>
+        <p:txBody>
+          <a:bodyPr wrap="square" rtlCol="0" anchor="t"/>
+          <a:lstStyle/>
+          <a:p>
+            <a:pPr algn="l" indent="0" marL="0">
+              <a:spcAft>
+                <a:spcPts val="200"/>
+              </a:spcAft>
+              <a:buNone/>
+            </a:pPr>
+            <a:r>
+              <a:rPr lang="en-US" sz="5600" b="1" dirty="0">
+                <a:solidFill>
+                  <a:srgbClr val="FFFFFF"/>
+                </a:solidFill>
+                <a:latin typeface="Calibri" pitchFamily="34" charset="0"/>
+                <a:ea typeface="Calibri" pitchFamily="34" charset="-122"/>
+                <a:cs typeface="Calibri" pitchFamily="34" charset="-120"/>
+              </a:rPr>
+              <a:t>Powered by </a:t>
+            </a:r>
+            <a:pPr algn="l" indent="0" marL="0">
+              <a:spcAft>
+                <a:spcPts val="200"/>
+              </a:spcAft>
+              <a:buNone/>
+            </a:pPr>
+            <a:r>
+              <a:rPr lang="en-US" sz="5600" b="1" dirty="0">
+                <a:solidFill>
+                  <a:srgbClr val="C084FC"/>
+                </a:solidFill>
+                <a:latin typeface="Calibri" pitchFamily="34" charset="0"/>
+                <a:ea typeface="Calibri" pitchFamily="34" charset="-122"/>
+                <a:cs typeface="Calibri" pitchFamily="34" charset="-120"/>
+              </a:rPr>
+              <a:t>creative</a:t>
+            </a:r>
+            <a:pPr algn="l" indent="0" marL="0">
+              <a:spcAft>
+                <a:spcPts val="200"/>
+              </a:spcAft>
+              <a:buNone/>
+            </a:pPr>
+            <a:r>
+              <a:rPr lang="en-US" sz="5600" b="1" dirty="0">
+                <a:solidFill>
+                  <a:srgbClr val="FFFFFF"/>
+                </a:solidFill>
+                <a:latin typeface="Calibri" pitchFamily="34" charset="0"/>
+                <a:ea typeface="Calibri" pitchFamily="34" charset="-122"/>
+                <a:cs typeface="Calibri" pitchFamily="34" charset="-120"/>
+              </a:rPr>
+              <a:t> communities.</a:t>
+            </a:r>
+            <a:endParaRPr lang="en-US" sz="5600" dirty="0"/>
+          </a:p>
+        </p:txBody>
+      </p:sp>
+      <p:sp>
+        <p:nvSpPr>
+          <p:cNvPr id="8" name="Text 6"/>
+          <p:cNvSpPr/>
+          <p:nvPr/>
+        </p:nvSpPr>
+        <p:spPr>
+          <a:xfrm>
+            <a:off x="822960" y="4937760"/>
+            <a:ext cx="8225705" cy="1280160"/>
+          </a:xfrm>
+          <a:prstGeom prst="rect">
+            <a:avLst/>
+          </a:prstGeom>
+          <a:noFill/>
+          <a:ln/>
+        </p:spPr>
+        <p:txBody>
+          <a:bodyPr wrap="square" rtlCol="0" anchor="ctr"/>
+          <a:lstStyle/>
+          <a:p>
+            <a:pPr algn="l" indent="0" marL="0">
+              <a:spcBef>
+                <a:spcPts val="400"/>
+              </a:spcBef>
+              <a:buNone/>
+            </a:pPr>
+            <a:r>
+              <a:rPr lang="en-US" sz="1800" dirty="0">
+                <a:solidFill>
+                  <a:srgbClr val="D7D3E8"/>
+                </a:solidFill>
+                <a:latin typeface="Calibri" pitchFamily="34" charset="0"/>
+                <a:ea typeface="Calibri" pitchFamily="34" charset="-122"/>
+                <a:cs typeface="Calibri" pitchFamily="34" charset="-120"/>
+              </a:rPr>
+              <a:t>Theatres, orchestras, dance companies, universities and outreach teams — all contributing to a shared, evolving ecosystem of creative practice. Free to use, made together.</a:t>
+            </a:r>
+            <a:endParaRPr lang="en-US" sz="1800" dirty="0"/>
+          </a:p>
+        </p:txBody>
+      </p:sp>
       <p:pic>
         <p:nvPicPr>
-          <p:cNvPr id="2" name="Image 0" descr="/home/runner/workspace/artifacts/ccd-promo/scripts/frames/scene-18.jpg">    </p:cNvPr>
+          <p:cNvPr id="9" name="Image 0" descr="/home/runner/workspace/artifacts/ccd-promo/public/ccdesigner-wordmark.png">    </p:cNvPr>
           <p:cNvPicPr>
             <a:picLocks noChangeAspect="1"/>
           </p:cNvPicPr>
@@ -3264,14 +5974,53 @@
         </p:blipFill>
         <p:spPr>
           <a:xfrm>
-            <a:off x="0" y="0"/>
-            <a:ext cx="12191695" cy="6858000"/>
+            <a:off x="411480" y="365760"/>
+            <a:ext cx="1463040" cy="384048"/>
           </a:xfrm>
           <a:prstGeom prst="rect">
             <a:avLst/>
           </a:prstGeom>
         </p:spPr>
       </p:pic>
+      <p:sp>
+        <p:nvSpPr>
+          <p:cNvPr id="10" name="Text 7"/>
+          <p:cNvSpPr/>
+          <p:nvPr/>
+        </p:nvSpPr>
+        <p:spPr>
+          <a:xfrm>
+            <a:off x="10911535" y="365760"/>
+            <a:ext cx="914400" cy="274320"/>
+          </a:xfrm>
+          <a:prstGeom prst="rect">
+            <a:avLst/>
+          </a:prstGeom>
+          <a:noFill/>
+          <a:ln/>
+        </p:spPr>
+        <p:txBody>
+          <a:bodyPr wrap="square" rtlCol="0" anchor="ctr"/>
+          <a:lstStyle/>
+          <a:p>
+            <a:pPr algn="r" indent="0" marL="0">
+              <a:buNone/>
+            </a:pPr>
+            <a:r>
+              <a:rPr lang="en-US" sz="900" b="1" spc="400" kern="0" dirty="0">
+                <a:solidFill>
+                  <a:srgbClr val="8B85A8"/>
+                </a:solidFill>
+                <a:latin typeface="Calibri" pitchFamily="34" charset="0"/>
+                <a:ea typeface="Calibri" pitchFamily="34" charset="-122"/>
+                <a:cs typeface="Calibri" pitchFamily="34" charset="-120"/>
+              </a:rPr>
+              <a:t>18 / 22</a:t>
+            </a:r>
+            <a:endParaRPr lang="en-US" sz="900" dirty="0"/>
+          </a:p>
+        </p:txBody>
+      </p:sp>
     </p:spTree>
   </p:cSld>
   <p:clrMapOvr>
@@ -3286,7 +6035,7 @@
     <p:bg>
       <p:bgPr>
         <a:solidFill>
-          <a:srgbClr val="000000"/>
+          <a:srgbClr val="0B0820"/>
         </a:solidFill>
       </p:bgPr>
     </p:bg>
@@ -3304,9 +6053,262 @@
           <a:chExt cx="0" cy="0"/>
         </a:xfrm>
       </p:grpSpPr>
+      <p:sp>
+        <p:nvSpPr>
+          <p:cNvPr id="2" name="Shape 0"/>
+          <p:cNvSpPr/>
+          <p:nvPr/>
+        </p:nvSpPr>
+        <p:spPr>
+          <a:xfrm>
+            <a:off x="0" y="0"/>
+            <a:ext cx="12191695" cy="6858000"/>
+          </a:xfrm>
+          <a:prstGeom prst="rect">
+            <a:avLst/>
+          </a:prstGeom>
+          <a:solidFill>
+            <a:srgbClr val="0B0820"/>
+          </a:solidFill>
+          <a:ln w="12700">
+            <a:solidFill>
+              <a:srgbClr val="0B0820"/>
+            </a:solidFill>
+            <a:prstDash val="solid"/>
+          </a:ln>
+        </p:spPr>
+      </p:sp>
+      <p:sp>
+        <p:nvSpPr>
+          <p:cNvPr id="3" name="Shape 1"/>
+          <p:cNvSpPr/>
+          <p:nvPr/>
+        </p:nvSpPr>
+        <p:spPr>
+          <a:xfrm>
+            <a:off x="0" y="0"/>
+            <a:ext cx="7924602" cy="6858000"/>
+          </a:xfrm>
+          <a:prstGeom prst="rect">
+            <a:avLst/>
+          </a:prstGeom>
+          <a:solidFill>
+            <a:srgbClr val="120F2E">
+              <a:alpha val="75000"/>
+            </a:srgbClr>
+          </a:solidFill>
+          <a:ln w="12700">
+            <a:solidFill>
+              <a:srgbClr val="120F2E"/>
+            </a:solidFill>
+            <a:prstDash val="solid"/>
+          </a:ln>
+        </p:spPr>
+      </p:sp>
+      <p:sp>
+        <p:nvSpPr>
+          <p:cNvPr id="4" name="Shape 2"/>
+          <p:cNvSpPr/>
+          <p:nvPr/>
+        </p:nvSpPr>
+        <p:spPr>
+          <a:xfrm>
+            <a:off x="-2286000" y="3200400"/>
+            <a:ext cx="7315200" cy="7315200"/>
+          </a:xfrm>
+          <a:prstGeom prst="ellipse">
+            <a:avLst/>
+          </a:prstGeom>
+          <a:solidFill>
+            <a:srgbClr val="7C3AED">
+              <a:alpha val="20000"/>
+            </a:srgbClr>
+          </a:solidFill>
+          <a:ln/>
+        </p:spPr>
+      </p:sp>
+      <p:sp>
+        <p:nvSpPr>
+          <p:cNvPr id="5" name="Shape 3"/>
+          <p:cNvSpPr/>
+          <p:nvPr/>
+        </p:nvSpPr>
+        <p:spPr>
+          <a:xfrm>
+            <a:off x="8534095" y="-2743200"/>
+            <a:ext cx="6400800" cy="6400800"/>
+          </a:xfrm>
+          <a:prstGeom prst="ellipse">
+            <a:avLst/>
+          </a:prstGeom>
+          <a:solidFill>
+            <a:srgbClr val="14B8A6">
+              <a:alpha val="15000"/>
+            </a:srgbClr>
+          </a:solidFill>
+          <a:ln/>
+        </p:spPr>
+      </p:sp>
+      <p:sp>
+        <p:nvSpPr>
+          <p:cNvPr id="6" name="Text 4"/>
+          <p:cNvSpPr/>
+          <p:nvPr/>
+        </p:nvSpPr>
+        <p:spPr>
+          <a:xfrm>
+            <a:off x="822960" y="1783080"/>
+            <a:ext cx="10545775" cy="365760"/>
+          </a:xfrm>
+          <a:prstGeom prst="rect">
+            <a:avLst/>
+          </a:prstGeom>
+          <a:noFill/>
+          <a:ln/>
+        </p:spPr>
+        <p:txBody>
+          <a:bodyPr wrap="square" rtlCol="0" anchor="ctr"/>
+          <a:lstStyle/>
+          <a:p>
+            <a:pPr algn="l" indent="0" marL="0">
+              <a:buNone/>
+            </a:pPr>
+            <a:r>
+              <a:rPr lang="en-US" sz="1300" b="1" spc="800" kern="0" dirty="0">
+                <a:solidFill>
+                  <a:srgbClr val="7DD3FC"/>
+                </a:solidFill>
+                <a:latin typeface="Calibri" pitchFamily="34" charset="0"/>
+                <a:ea typeface="Calibri" pitchFamily="34" charset="-122"/>
+                <a:cs typeface="Calibri" pitchFamily="34" charset="-120"/>
+              </a:rPr>
+              <a:t>BIGGER PICTURE, ON DEMAND</a:t>
+            </a:r>
+            <a:endParaRPr lang="en-US" sz="1300" dirty="0"/>
+          </a:p>
+        </p:txBody>
+      </p:sp>
+      <p:sp>
+        <p:nvSpPr>
+          <p:cNvPr id="7" name="Text 5"/>
+          <p:cNvSpPr/>
+          <p:nvPr/>
+        </p:nvSpPr>
+        <p:spPr>
+          <a:xfrm>
+            <a:off x="822960" y="2286000"/>
+            <a:ext cx="10545775" cy="2011680"/>
+          </a:xfrm>
+          <a:prstGeom prst="rect">
+            <a:avLst/>
+          </a:prstGeom>
+          <a:noFill/>
+          <a:ln/>
+        </p:spPr>
+        <p:txBody>
+          <a:bodyPr wrap="square" rtlCol="0" anchor="t"/>
+          <a:lstStyle/>
+          <a:p>
+            <a:pPr algn="l" indent="0" marL="0">
+              <a:spcAft>
+                <a:spcPts val="200"/>
+              </a:spcAft>
+              <a:buNone/>
+            </a:pPr>
+            <a:r>
+              <a:rPr lang="en-US" sz="5600" b="1" dirty="0">
+                <a:solidFill>
+                  <a:srgbClr val="FFFFFF"/>
+                </a:solidFill>
+                <a:latin typeface="Calibri" pitchFamily="34" charset="0"/>
+                <a:ea typeface="Calibri" pitchFamily="34" charset="-122"/>
+                <a:cs typeface="Calibri" pitchFamily="34" charset="-120"/>
+              </a:rPr>
+              <a:t>See the </a:t>
+            </a:r>
+            <a:pPr algn="l" indent="0" marL="0">
+              <a:spcAft>
+                <a:spcPts val="200"/>
+              </a:spcAft>
+              <a:buNone/>
+            </a:pPr>
+            <a:r>
+              <a:rPr lang="en-US" sz="5600" b="1" dirty="0">
+                <a:solidFill>
+                  <a:srgbClr val="7DD3FC"/>
+                </a:solidFill>
+                <a:latin typeface="Calibri" pitchFamily="34" charset="0"/>
+                <a:ea typeface="Calibri" pitchFamily="34" charset="-122"/>
+                <a:cs typeface="Calibri" pitchFamily="34" charset="-120"/>
+              </a:rPr>
+              <a:t>bigger</a:t>
+            </a:r>
+            <a:pPr algn="l" indent="0" marL="0">
+              <a:spcAft>
+                <a:spcPts val="200"/>
+              </a:spcAft>
+              <a:buNone/>
+            </a:pPr>
+            <a:r>
+              <a:rPr lang="en-US" sz="5600" b="1" dirty="0">
+                <a:solidFill>
+                  <a:srgbClr val="FFFFFF"/>
+                </a:solidFill>
+                <a:latin typeface="Calibri" pitchFamily="34" charset="0"/>
+                <a:ea typeface="Calibri" pitchFamily="34" charset="-122"/>
+                <a:cs typeface="Calibri" pitchFamily="34" charset="-120"/>
+              </a:rPr>
+              <a:t> learning picture.</a:t>
+            </a:r>
+            <a:endParaRPr lang="en-US" sz="5600" dirty="0"/>
+          </a:p>
+        </p:txBody>
+      </p:sp>
+      <p:sp>
+        <p:nvSpPr>
+          <p:cNvPr id="8" name="Text 6"/>
+          <p:cNvSpPr/>
+          <p:nvPr/>
+        </p:nvSpPr>
+        <p:spPr>
+          <a:xfrm>
+            <a:off x="822960" y="4937760"/>
+            <a:ext cx="8225705" cy="1280160"/>
+          </a:xfrm>
+          <a:prstGeom prst="rect">
+            <a:avLst/>
+          </a:prstGeom>
+          <a:noFill/>
+          <a:ln/>
+        </p:spPr>
+        <p:txBody>
+          <a:bodyPr wrap="square" rtlCol="0" anchor="ctr"/>
+          <a:lstStyle/>
+          <a:p>
+            <a:pPr algn="l" indent="0" marL="0">
+              <a:spcBef>
+                <a:spcPts val="400"/>
+              </a:spcBef>
+              <a:buNone/>
+            </a:pPr>
+            <a:r>
+              <a:rPr lang="en-US" sz="1800" dirty="0">
+                <a:solidFill>
+                  <a:srgbClr val="D7D3E8"/>
+                </a:solidFill>
+                <a:latin typeface="Calibri" pitchFamily="34" charset="0"/>
+                <a:ea typeface="Calibri" pitchFamily="34" charset="-122"/>
+                <a:cs typeface="Calibri" pitchFamily="34" charset="-120"/>
+              </a:rPr>
+              <a:t>Zoom from a single activity to a whole-school view — and back again — without losing context.</a:t>
+            </a:r>
+            <a:endParaRPr lang="en-US" sz="1800" dirty="0"/>
+          </a:p>
+        </p:txBody>
+      </p:sp>
       <p:pic>
         <p:nvPicPr>
-          <p:cNvPr id="2" name="Image 0" descr="/home/runner/workspace/artifacts/ccd-promo/scripts/frames/scene-19.jpg">    </p:cNvPr>
+          <p:cNvPr id="9" name="Image 0" descr="/home/runner/workspace/artifacts/ccd-promo/public/ccdesigner-wordmark.png">    </p:cNvPr>
           <p:cNvPicPr>
             <a:picLocks noChangeAspect="1"/>
           </p:cNvPicPr>
@@ -3320,14 +6322,53 @@
         </p:blipFill>
         <p:spPr>
           <a:xfrm>
-            <a:off x="0" y="0"/>
-            <a:ext cx="12191695" cy="6858000"/>
+            <a:off x="411480" y="365760"/>
+            <a:ext cx="1463040" cy="384048"/>
           </a:xfrm>
           <a:prstGeom prst="rect">
             <a:avLst/>
           </a:prstGeom>
         </p:spPr>
       </p:pic>
+      <p:sp>
+        <p:nvSpPr>
+          <p:cNvPr id="10" name="Text 7"/>
+          <p:cNvSpPr/>
+          <p:nvPr/>
+        </p:nvSpPr>
+        <p:spPr>
+          <a:xfrm>
+            <a:off x="10911535" y="365760"/>
+            <a:ext cx="914400" cy="274320"/>
+          </a:xfrm>
+          <a:prstGeom prst="rect">
+            <a:avLst/>
+          </a:prstGeom>
+          <a:noFill/>
+          <a:ln/>
+        </p:spPr>
+        <p:txBody>
+          <a:bodyPr wrap="square" rtlCol="0" anchor="ctr"/>
+          <a:lstStyle/>
+          <a:p>
+            <a:pPr algn="r" indent="0" marL="0">
+              <a:buNone/>
+            </a:pPr>
+            <a:r>
+              <a:rPr lang="en-US" sz="900" b="1" spc="400" kern="0" dirty="0">
+                <a:solidFill>
+                  <a:srgbClr val="8B85A8"/>
+                </a:solidFill>
+                <a:latin typeface="Calibri" pitchFamily="34" charset="0"/>
+                <a:ea typeface="Calibri" pitchFamily="34" charset="-122"/>
+                <a:cs typeface="Calibri" pitchFamily="34" charset="-120"/>
+              </a:rPr>
+              <a:t>19 / 22</a:t>
+            </a:r>
+            <a:endParaRPr lang="en-US" sz="900" dirty="0"/>
+          </a:p>
+        </p:txBody>
+      </p:sp>
     </p:spTree>
   </p:cSld>
   <p:clrMapOvr>
@@ -3342,7 +6383,7 @@
     <p:bg>
       <p:bgPr>
         <a:solidFill>
-          <a:srgbClr val="000000"/>
+          <a:srgbClr val="0B0820"/>
         </a:solidFill>
       </p:bgPr>
     </p:bg>
@@ -3360,9 +6401,245 @@
           <a:chExt cx="0" cy="0"/>
         </a:xfrm>
       </p:grpSpPr>
+      <p:sp>
+        <p:nvSpPr>
+          <p:cNvPr id="2" name="Shape 0"/>
+          <p:cNvSpPr/>
+          <p:nvPr/>
+        </p:nvSpPr>
+        <p:spPr>
+          <a:xfrm>
+            <a:off x="0" y="0"/>
+            <a:ext cx="12191695" cy="6858000"/>
+          </a:xfrm>
+          <a:prstGeom prst="rect">
+            <a:avLst/>
+          </a:prstGeom>
+          <a:solidFill>
+            <a:srgbClr val="0B0820"/>
+          </a:solidFill>
+          <a:ln w="12700">
+            <a:solidFill>
+              <a:srgbClr val="0B0820"/>
+            </a:solidFill>
+            <a:prstDash val="solid"/>
+          </a:ln>
+        </p:spPr>
+      </p:sp>
+      <p:sp>
+        <p:nvSpPr>
+          <p:cNvPr id="3" name="Shape 1"/>
+          <p:cNvSpPr/>
+          <p:nvPr/>
+        </p:nvSpPr>
+        <p:spPr>
+          <a:xfrm>
+            <a:off x="0" y="0"/>
+            <a:ext cx="7924602" cy="6858000"/>
+          </a:xfrm>
+          <a:prstGeom prst="rect">
+            <a:avLst/>
+          </a:prstGeom>
+          <a:solidFill>
+            <a:srgbClr val="120F2E">
+              <a:alpha val="75000"/>
+            </a:srgbClr>
+          </a:solidFill>
+          <a:ln w="12700">
+            <a:solidFill>
+              <a:srgbClr val="120F2E"/>
+            </a:solidFill>
+            <a:prstDash val="solid"/>
+          </a:ln>
+        </p:spPr>
+      </p:sp>
+      <p:sp>
+        <p:nvSpPr>
+          <p:cNvPr id="4" name="Shape 2"/>
+          <p:cNvSpPr/>
+          <p:nvPr/>
+        </p:nvSpPr>
+        <p:spPr>
+          <a:xfrm>
+            <a:off x="-2286000" y="3200400"/>
+            <a:ext cx="7315200" cy="7315200"/>
+          </a:xfrm>
+          <a:prstGeom prst="ellipse">
+            <a:avLst/>
+          </a:prstGeom>
+          <a:solidFill>
+            <a:srgbClr val="7C3AED">
+              <a:alpha val="20000"/>
+            </a:srgbClr>
+          </a:solidFill>
+          <a:ln/>
+        </p:spPr>
+      </p:sp>
+      <p:sp>
+        <p:nvSpPr>
+          <p:cNvPr id="5" name="Shape 3"/>
+          <p:cNvSpPr/>
+          <p:nvPr/>
+        </p:nvSpPr>
+        <p:spPr>
+          <a:xfrm>
+            <a:off x="8534095" y="-2743200"/>
+            <a:ext cx="6400800" cy="6400800"/>
+          </a:xfrm>
+          <a:prstGeom prst="ellipse">
+            <a:avLst/>
+          </a:prstGeom>
+          <a:solidFill>
+            <a:srgbClr val="14B8A6">
+              <a:alpha val="15000"/>
+            </a:srgbClr>
+          </a:solidFill>
+          <a:ln/>
+        </p:spPr>
+      </p:sp>
+      <p:sp>
+        <p:nvSpPr>
+          <p:cNvPr id="6" name="Text 4"/>
+          <p:cNvSpPr/>
+          <p:nvPr/>
+        </p:nvSpPr>
+        <p:spPr>
+          <a:xfrm>
+            <a:off x="822960" y="1783080"/>
+            <a:ext cx="10545775" cy="365760"/>
+          </a:xfrm>
+          <a:prstGeom prst="rect">
+            <a:avLst/>
+          </a:prstGeom>
+          <a:noFill/>
+          <a:ln/>
+        </p:spPr>
+        <p:txBody>
+          <a:bodyPr wrap="square" rtlCol="0" anchor="ctr"/>
+          <a:lstStyle/>
+          <a:p>
+            <a:pPr algn="l" indent="0" marL="0">
+              <a:buNone/>
+            </a:pPr>
+            <a:r>
+              <a:rPr lang="en-US" sz="1300" b="1" spc="800" kern="0" dirty="0">
+                <a:solidFill>
+                  <a:srgbClr val="F59E0B"/>
+                </a:solidFill>
+                <a:latin typeface="Calibri" pitchFamily="34" charset="0"/>
+                <a:ea typeface="Calibri" pitchFamily="34" charset="-122"/>
+                <a:cs typeface="Calibri" pitchFamily="34" charset="-120"/>
+              </a:rPr>
+              <a:t>A PHILOSOPHY, FIRST</a:t>
+            </a:r>
+            <a:endParaRPr lang="en-US" sz="1300" dirty="0"/>
+          </a:p>
+        </p:txBody>
+      </p:sp>
+      <p:sp>
+        <p:nvSpPr>
+          <p:cNvPr id="7" name="Text 5"/>
+          <p:cNvSpPr/>
+          <p:nvPr/>
+        </p:nvSpPr>
+        <p:spPr>
+          <a:xfrm>
+            <a:off x="822960" y="2286000"/>
+            <a:ext cx="10545775" cy="2011680"/>
+          </a:xfrm>
+          <a:prstGeom prst="rect">
+            <a:avLst/>
+          </a:prstGeom>
+          <a:noFill/>
+          <a:ln/>
+        </p:spPr>
+        <p:txBody>
+          <a:bodyPr wrap="square" rtlCol="0" anchor="t"/>
+          <a:lstStyle/>
+          <a:p>
+            <a:pPr algn="l" indent="0" marL="0">
+              <a:spcAft>
+                <a:spcPts val="200"/>
+              </a:spcAft>
+              <a:buNone/>
+            </a:pPr>
+            <a:r>
+              <a:rPr lang="en-US" sz="5600" b="1" dirty="0">
+                <a:solidFill>
+                  <a:srgbClr val="FFFFFF"/>
+                </a:solidFill>
+                <a:latin typeface="Calibri" pitchFamily="34" charset="0"/>
+                <a:ea typeface="Calibri" pitchFamily="34" charset="-122"/>
+                <a:cs typeface="Calibri" pitchFamily="34" charset="-120"/>
+              </a:rPr>
+              <a:t>Teaching is </a:t>
+            </a:r>
+            <a:pPr algn="l" indent="0" marL="0">
+              <a:spcAft>
+                <a:spcPts val="200"/>
+              </a:spcAft>
+              <a:buNone/>
+            </a:pPr>
+            <a:r>
+              <a:rPr lang="en-US" sz="5600" b="1" dirty="0">
+                <a:solidFill>
+                  <a:srgbClr val="FBBF24"/>
+                </a:solidFill>
+                <a:latin typeface="Calibri" pitchFamily="34" charset="0"/>
+                <a:ea typeface="Calibri" pitchFamily="34" charset="-122"/>
+                <a:cs typeface="Calibri" pitchFamily="34" charset="-120"/>
+              </a:rPr>
+              <a:t>creative work.</a:t>
+            </a:r>
+            <a:endParaRPr lang="en-US" sz="5600" dirty="0"/>
+          </a:p>
+        </p:txBody>
+      </p:sp>
+      <p:sp>
+        <p:nvSpPr>
+          <p:cNvPr id="8" name="Text 6"/>
+          <p:cNvSpPr/>
+          <p:nvPr/>
+        </p:nvSpPr>
+        <p:spPr>
+          <a:xfrm>
+            <a:off x="822960" y="4937760"/>
+            <a:ext cx="8225705" cy="1280160"/>
+          </a:xfrm>
+          <a:prstGeom prst="rect">
+            <a:avLst/>
+          </a:prstGeom>
+          <a:noFill/>
+          <a:ln/>
+        </p:spPr>
+        <p:txBody>
+          <a:bodyPr wrap="square" rtlCol="0" anchor="ctr"/>
+          <a:lstStyle/>
+          <a:p>
+            <a:pPr algn="l" indent="0" marL="0">
+              <a:spcBef>
+                <a:spcPts val="400"/>
+              </a:spcBef>
+              <a:buNone/>
+            </a:pPr>
+            <a:r>
+              <a:rPr lang="en-US" sz="1800" dirty="0">
+                <a:solidFill>
+                  <a:srgbClr val="D7D3E8"/>
+                </a:solidFill>
+                <a:latin typeface="Calibri" pitchFamily="34" charset="0"/>
+                <a:ea typeface="Calibri" pitchFamily="34" charset="-122"/>
+                <a:cs typeface="Calibri" pitchFamily="34" charset="-120"/>
+              </a:rPr>
+              <a:t>Your ideas are valuable. Your practice should grow. Great teaching should never disappear into forgotten documents.</a:t>
+            </a:r>
+            <a:endParaRPr lang="en-US" sz="1800" dirty="0"/>
+          </a:p>
+        </p:txBody>
+      </p:sp>
       <p:pic>
         <p:nvPicPr>
-          <p:cNvPr id="2" name="Image 0" descr="/home/runner/workspace/artifacts/ccd-promo/scripts/frames/scene-02.jpg">    </p:cNvPr>
+          <p:cNvPr id="9" name="Image 0" descr="/home/runner/workspace/artifacts/ccd-promo/public/ccdesigner-wordmark.png">    </p:cNvPr>
           <p:cNvPicPr>
             <a:picLocks noChangeAspect="1"/>
           </p:cNvPicPr>
@@ -3376,14 +6653,53 @@
         </p:blipFill>
         <p:spPr>
           <a:xfrm>
-            <a:off x="0" y="0"/>
-            <a:ext cx="12191695" cy="6858000"/>
+            <a:off x="411480" y="365760"/>
+            <a:ext cx="1463040" cy="384048"/>
           </a:xfrm>
           <a:prstGeom prst="rect">
             <a:avLst/>
           </a:prstGeom>
         </p:spPr>
       </p:pic>
+      <p:sp>
+        <p:nvSpPr>
+          <p:cNvPr id="10" name="Text 7"/>
+          <p:cNvSpPr/>
+          <p:nvPr/>
+        </p:nvSpPr>
+        <p:spPr>
+          <a:xfrm>
+            <a:off x="10911535" y="365760"/>
+            <a:ext cx="914400" cy="274320"/>
+          </a:xfrm>
+          <a:prstGeom prst="rect">
+            <a:avLst/>
+          </a:prstGeom>
+          <a:noFill/>
+          <a:ln/>
+        </p:spPr>
+        <p:txBody>
+          <a:bodyPr wrap="square" rtlCol="0" anchor="ctr"/>
+          <a:lstStyle/>
+          <a:p>
+            <a:pPr algn="r" indent="0" marL="0">
+              <a:buNone/>
+            </a:pPr>
+            <a:r>
+              <a:rPr lang="en-US" sz="900" b="1" spc="400" kern="0" dirty="0">
+                <a:solidFill>
+                  <a:srgbClr val="8B85A8"/>
+                </a:solidFill>
+                <a:latin typeface="Calibri" pitchFamily="34" charset="0"/>
+                <a:ea typeface="Calibri" pitchFamily="34" charset="-122"/>
+                <a:cs typeface="Calibri" pitchFamily="34" charset="-120"/>
+              </a:rPr>
+              <a:t>02 / 22</a:t>
+            </a:r>
+            <a:endParaRPr lang="en-US" sz="900" dirty="0"/>
+          </a:p>
+        </p:txBody>
+      </p:sp>
     </p:spTree>
   </p:cSld>
   <p:clrMapOvr>
@@ -3398,7 +6714,7 @@
     <p:bg>
       <p:bgPr>
         <a:solidFill>
-          <a:srgbClr val="000000"/>
+          <a:srgbClr val="0B0820"/>
         </a:solidFill>
       </p:bgPr>
     </p:bg>
@@ -3416,9 +6732,262 @@
           <a:chExt cx="0" cy="0"/>
         </a:xfrm>
       </p:grpSpPr>
+      <p:sp>
+        <p:nvSpPr>
+          <p:cNvPr id="2" name="Shape 0"/>
+          <p:cNvSpPr/>
+          <p:nvPr/>
+        </p:nvSpPr>
+        <p:spPr>
+          <a:xfrm>
+            <a:off x="0" y="0"/>
+            <a:ext cx="12191695" cy="6858000"/>
+          </a:xfrm>
+          <a:prstGeom prst="rect">
+            <a:avLst/>
+          </a:prstGeom>
+          <a:solidFill>
+            <a:srgbClr val="0B0820"/>
+          </a:solidFill>
+          <a:ln w="12700">
+            <a:solidFill>
+              <a:srgbClr val="0B0820"/>
+            </a:solidFill>
+            <a:prstDash val="solid"/>
+          </a:ln>
+        </p:spPr>
+      </p:sp>
+      <p:sp>
+        <p:nvSpPr>
+          <p:cNvPr id="3" name="Shape 1"/>
+          <p:cNvSpPr/>
+          <p:nvPr/>
+        </p:nvSpPr>
+        <p:spPr>
+          <a:xfrm>
+            <a:off x="0" y="0"/>
+            <a:ext cx="7924602" cy="6858000"/>
+          </a:xfrm>
+          <a:prstGeom prst="rect">
+            <a:avLst/>
+          </a:prstGeom>
+          <a:solidFill>
+            <a:srgbClr val="120F2E">
+              <a:alpha val="75000"/>
+            </a:srgbClr>
+          </a:solidFill>
+          <a:ln w="12700">
+            <a:solidFill>
+              <a:srgbClr val="120F2E"/>
+            </a:solidFill>
+            <a:prstDash val="solid"/>
+          </a:ln>
+        </p:spPr>
+      </p:sp>
+      <p:sp>
+        <p:nvSpPr>
+          <p:cNvPr id="4" name="Shape 2"/>
+          <p:cNvSpPr/>
+          <p:nvPr/>
+        </p:nvSpPr>
+        <p:spPr>
+          <a:xfrm>
+            <a:off x="-2286000" y="3200400"/>
+            <a:ext cx="7315200" cy="7315200"/>
+          </a:xfrm>
+          <a:prstGeom prst="ellipse">
+            <a:avLst/>
+          </a:prstGeom>
+          <a:solidFill>
+            <a:srgbClr val="7C3AED">
+              <a:alpha val="20000"/>
+            </a:srgbClr>
+          </a:solidFill>
+          <a:ln/>
+        </p:spPr>
+      </p:sp>
+      <p:sp>
+        <p:nvSpPr>
+          <p:cNvPr id="5" name="Shape 3"/>
+          <p:cNvSpPr/>
+          <p:nvPr/>
+        </p:nvSpPr>
+        <p:spPr>
+          <a:xfrm>
+            <a:off x="8534095" y="-2743200"/>
+            <a:ext cx="6400800" cy="6400800"/>
+          </a:xfrm>
+          <a:prstGeom prst="ellipse">
+            <a:avLst/>
+          </a:prstGeom>
+          <a:solidFill>
+            <a:srgbClr val="14B8A6">
+              <a:alpha val="15000"/>
+            </a:srgbClr>
+          </a:solidFill>
+          <a:ln/>
+        </p:spPr>
+      </p:sp>
+      <p:sp>
+        <p:nvSpPr>
+          <p:cNvPr id="6" name="Text 4"/>
+          <p:cNvSpPr/>
+          <p:nvPr/>
+        </p:nvSpPr>
+        <p:spPr>
+          <a:xfrm>
+            <a:off x="822960" y="1783080"/>
+            <a:ext cx="10545775" cy="365760"/>
+          </a:xfrm>
+          <a:prstGeom prst="rect">
+            <a:avLst/>
+          </a:prstGeom>
+          <a:noFill/>
+          <a:ln/>
+        </p:spPr>
+        <p:txBody>
+          <a:bodyPr wrap="square" rtlCol="0" anchor="ctr"/>
+          <a:lstStyle/>
+          <a:p>
+            <a:pPr algn="l" indent="0" marL="0">
+              <a:buNone/>
+            </a:pPr>
+            <a:r>
+              <a:rPr lang="en-US" sz="1300" b="1" spc="800" kern="0" dirty="0">
+                <a:solidFill>
+                  <a:srgbClr val="5EEAD4"/>
+                </a:solidFill>
+                <a:latin typeface="Calibri" pitchFamily="34" charset="0"/>
+                <a:ea typeface="Calibri" pitchFamily="34" charset="-122"/>
+                <a:cs typeface="Calibri" pitchFamily="34" charset="-120"/>
+              </a:rPr>
+              <a:t>SHARE WITH CONFIDENCE</a:t>
+            </a:r>
+            <a:endParaRPr lang="en-US" sz="1300" dirty="0"/>
+          </a:p>
+        </p:txBody>
+      </p:sp>
+      <p:sp>
+        <p:nvSpPr>
+          <p:cNvPr id="7" name="Text 5"/>
+          <p:cNvSpPr/>
+          <p:nvPr/>
+        </p:nvSpPr>
+        <p:spPr>
+          <a:xfrm>
+            <a:off x="822960" y="2286000"/>
+            <a:ext cx="10545775" cy="2011680"/>
+          </a:xfrm>
+          <a:prstGeom prst="rect">
+            <a:avLst/>
+          </a:prstGeom>
+          <a:noFill/>
+          <a:ln/>
+        </p:spPr>
+        <p:txBody>
+          <a:bodyPr wrap="square" rtlCol="0" anchor="t"/>
+          <a:lstStyle/>
+          <a:p>
+            <a:pPr algn="l" indent="0" marL="0">
+              <a:spcAft>
+                <a:spcPts val="200"/>
+              </a:spcAft>
+              <a:buNone/>
+            </a:pPr>
+            <a:r>
+              <a:rPr lang="en-US" sz="5600" b="1" dirty="0">
+                <a:solidFill>
+                  <a:srgbClr val="FFFFFF"/>
+                </a:solidFill>
+                <a:latin typeface="Calibri" pitchFamily="34" charset="0"/>
+                <a:ea typeface="Calibri" pitchFamily="34" charset="-122"/>
+                <a:cs typeface="Calibri" pitchFamily="34" charset="-120"/>
+              </a:rPr>
+              <a:t>Beautiful, </a:t>
+            </a:r>
+            <a:pPr algn="l" indent="0" marL="0">
+              <a:spcAft>
+                <a:spcPts val="200"/>
+              </a:spcAft>
+              <a:buNone/>
+            </a:pPr>
+            <a:r>
+              <a:rPr lang="en-US" sz="5600" b="1" dirty="0">
+                <a:solidFill>
+                  <a:srgbClr val="5EEAD4"/>
+                </a:solidFill>
+                <a:latin typeface="Calibri" pitchFamily="34" charset="0"/>
+                <a:ea typeface="Calibri" pitchFamily="34" charset="-122"/>
+                <a:cs typeface="Calibri" pitchFamily="34" charset="-120"/>
+              </a:rPr>
+              <a:t>professional</a:t>
+            </a:r>
+            <a:pPr algn="l" indent="0" marL="0">
+              <a:spcAft>
+                <a:spcPts val="200"/>
+              </a:spcAft>
+              <a:buNone/>
+            </a:pPr>
+            <a:r>
+              <a:rPr lang="en-US" sz="5600" b="1" dirty="0">
+                <a:solidFill>
+                  <a:srgbClr val="FFFFFF"/>
+                </a:solidFill>
+                <a:latin typeface="Calibri" pitchFamily="34" charset="0"/>
+                <a:ea typeface="Calibri" pitchFamily="34" charset="-122"/>
+                <a:cs typeface="Calibri" pitchFamily="34" charset="-120"/>
+              </a:rPr>
+              <a:t> plans.</a:t>
+            </a:r>
+            <a:endParaRPr lang="en-US" sz="5600" dirty="0"/>
+          </a:p>
+        </p:txBody>
+      </p:sp>
+      <p:sp>
+        <p:nvSpPr>
+          <p:cNvPr id="8" name="Text 6"/>
+          <p:cNvSpPr/>
+          <p:nvPr/>
+        </p:nvSpPr>
+        <p:spPr>
+          <a:xfrm>
+            <a:off x="822960" y="4937760"/>
+            <a:ext cx="8225705" cy="1280160"/>
+          </a:xfrm>
+          <a:prstGeom prst="rect">
+            <a:avLst/>
+          </a:prstGeom>
+          <a:noFill/>
+          <a:ln/>
+        </p:spPr>
+        <p:txBody>
+          <a:bodyPr wrap="square" rtlCol="0" anchor="ctr"/>
+          <a:lstStyle/>
+          <a:p>
+            <a:pPr algn="l" indent="0" marL="0">
+              <a:spcBef>
+                <a:spcPts val="400"/>
+              </a:spcBef>
+              <a:buNone/>
+            </a:pPr>
+            <a:r>
+              <a:rPr lang="en-US" sz="1800" dirty="0">
+                <a:solidFill>
+                  <a:srgbClr val="D7D3E8"/>
+                </a:solidFill>
+                <a:latin typeface="Calibri" pitchFamily="34" charset="0"/>
+                <a:ea typeface="Calibri" pitchFamily="34" charset="-122"/>
+                <a:cs typeface="Calibri" pitchFamily="34" charset="-120"/>
+              </a:rPr>
+              <a:t>Export, print, present — for parents, leadership, inspections, and the staffroom wall.</a:t>
+            </a:r>
+            <a:endParaRPr lang="en-US" sz="1800" dirty="0"/>
+          </a:p>
+        </p:txBody>
+      </p:sp>
       <p:pic>
         <p:nvPicPr>
-          <p:cNvPr id="2" name="Image 0" descr="/home/runner/workspace/artifacts/ccd-promo/scripts/frames/scene-20.jpg">    </p:cNvPr>
+          <p:cNvPr id="9" name="Image 0" descr="/home/runner/workspace/artifacts/ccd-promo/public/ccdesigner-wordmark.png">    </p:cNvPr>
           <p:cNvPicPr>
             <a:picLocks noChangeAspect="1"/>
           </p:cNvPicPr>
@@ -3432,14 +7001,53 @@
         </p:blipFill>
         <p:spPr>
           <a:xfrm>
-            <a:off x="0" y="0"/>
-            <a:ext cx="12191695" cy="6858000"/>
+            <a:off x="411480" y="365760"/>
+            <a:ext cx="1463040" cy="384048"/>
           </a:xfrm>
           <a:prstGeom prst="rect">
             <a:avLst/>
           </a:prstGeom>
         </p:spPr>
       </p:pic>
+      <p:sp>
+        <p:nvSpPr>
+          <p:cNvPr id="10" name="Text 7"/>
+          <p:cNvSpPr/>
+          <p:nvPr/>
+        </p:nvSpPr>
+        <p:spPr>
+          <a:xfrm>
+            <a:off x="10911535" y="365760"/>
+            <a:ext cx="914400" cy="274320"/>
+          </a:xfrm>
+          <a:prstGeom prst="rect">
+            <a:avLst/>
+          </a:prstGeom>
+          <a:noFill/>
+          <a:ln/>
+        </p:spPr>
+        <p:txBody>
+          <a:bodyPr wrap="square" rtlCol="0" anchor="ctr"/>
+          <a:lstStyle/>
+          <a:p>
+            <a:pPr algn="r" indent="0" marL="0">
+              <a:buNone/>
+            </a:pPr>
+            <a:r>
+              <a:rPr lang="en-US" sz="900" b="1" spc="400" kern="0" dirty="0">
+                <a:solidFill>
+                  <a:srgbClr val="8B85A8"/>
+                </a:solidFill>
+                <a:latin typeface="Calibri" pitchFamily="34" charset="0"/>
+                <a:ea typeface="Calibri" pitchFamily="34" charset="-122"/>
+                <a:cs typeface="Calibri" pitchFamily="34" charset="-120"/>
+              </a:rPr>
+              <a:t>20 / 22</a:t>
+            </a:r>
+            <a:endParaRPr lang="en-US" sz="900" dirty="0"/>
+          </a:p>
+        </p:txBody>
+      </p:sp>
     </p:spTree>
   </p:cSld>
   <p:clrMapOvr>
@@ -3454,7 +7062,7 @@
     <p:bg>
       <p:bgPr>
         <a:solidFill>
-          <a:srgbClr val="000000"/>
+          <a:srgbClr val="0B0820"/>
         </a:solidFill>
       </p:bgPr>
     </p:bg>
@@ -3472,9 +7080,245 @@
           <a:chExt cx="0" cy="0"/>
         </a:xfrm>
       </p:grpSpPr>
+      <p:sp>
+        <p:nvSpPr>
+          <p:cNvPr id="2" name="Shape 0"/>
+          <p:cNvSpPr/>
+          <p:nvPr/>
+        </p:nvSpPr>
+        <p:spPr>
+          <a:xfrm>
+            <a:off x="0" y="0"/>
+            <a:ext cx="12191695" cy="6858000"/>
+          </a:xfrm>
+          <a:prstGeom prst="rect">
+            <a:avLst/>
+          </a:prstGeom>
+          <a:solidFill>
+            <a:srgbClr val="0B0820"/>
+          </a:solidFill>
+          <a:ln w="12700">
+            <a:solidFill>
+              <a:srgbClr val="0B0820"/>
+            </a:solidFill>
+            <a:prstDash val="solid"/>
+          </a:ln>
+        </p:spPr>
+      </p:sp>
+      <p:sp>
+        <p:nvSpPr>
+          <p:cNvPr id="3" name="Shape 1"/>
+          <p:cNvSpPr/>
+          <p:nvPr/>
+        </p:nvSpPr>
+        <p:spPr>
+          <a:xfrm>
+            <a:off x="0" y="0"/>
+            <a:ext cx="7924602" cy="6858000"/>
+          </a:xfrm>
+          <a:prstGeom prst="rect">
+            <a:avLst/>
+          </a:prstGeom>
+          <a:solidFill>
+            <a:srgbClr val="120F2E">
+              <a:alpha val="75000"/>
+            </a:srgbClr>
+          </a:solidFill>
+          <a:ln w="12700">
+            <a:solidFill>
+              <a:srgbClr val="120F2E"/>
+            </a:solidFill>
+            <a:prstDash val="solid"/>
+          </a:ln>
+        </p:spPr>
+      </p:sp>
+      <p:sp>
+        <p:nvSpPr>
+          <p:cNvPr id="4" name="Shape 2"/>
+          <p:cNvSpPr/>
+          <p:nvPr/>
+        </p:nvSpPr>
+        <p:spPr>
+          <a:xfrm>
+            <a:off x="-2286000" y="3200400"/>
+            <a:ext cx="7315200" cy="7315200"/>
+          </a:xfrm>
+          <a:prstGeom prst="ellipse">
+            <a:avLst/>
+          </a:prstGeom>
+          <a:solidFill>
+            <a:srgbClr val="7C3AED">
+              <a:alpha val="20000"/>
+            </a:srgbClr>
+          </a:solidFill>
+          <a:ln/>
+        </p:spPr>
+      </p:sp>
+      <p:sp>
+        <p:nvSpPr>
+          <p:cNvPr id="5" name="Shape 3"/>
+          <p:cNvSpPr/>
+          <p:nvPr/>
+        </p:nvSpPr>
+        <p:spPr>
+          <a:xfrm>
+            <a:off x="8534095" y="-2743200"/>
+            <a:ext cx="6400800" cy="6400800"/>
+          </a:xfrm>
+          <a:prstGeom prst="ellipse">
+            <a:avLst/>
+          </a:prstGeom>
+          <a:solidFill>
+            <a:srgbClr val="14B8A6">
+              <a:alpha val="15000"/>
+            </a:srgbClr>
+          </a:solidFill>
+          <a:ln/>
+        </p:spPr>
+      </p:sp>
+      <p:sp>
+        <p:nvSpPr>
+          <p:cNvPr id="6" name="Text 4"/>
+          <p:cNvSpPr/>
+          <p:nvPr/>
+        </p:nvSpPr>
+        <p:spPr>
+          <a:xfrm>
+            <a:off x="822960" y="1783080"/>
+            <a:ext cx="10545775" cy="365760"/>
+          </a:xfrm>
+          <a:prstGeom prst="rect">
+            <a:avLst/>
+          </a:prstGeom>
+          <a:noFill/>
+          <a:ln/>
+        </p:spPr>
+        <p:txBody>
+          <a:bodyPr wrap="square" rtlCol="0" anchor="ctr"/>
+          <a:lstStyle/>
+          <a:p>
+            <a:pPr algn="l" indent="0" marL="0">
+              <a:buNone/>
+            </a:pPr>
+            <a:r>
+              <a:rPr lang="en-US" sz="1300" b="1" spc="800" kern="0" dirty="0">
+                <a:solidFill>
+                  <a:srgbClr val="A5B4FC"/>
+                </a:solidFill>
+                <a:latin typeface="Calibri" pitchFamily="34" charset="0"/>
+                <a:ea typeface="Calibri" pitchFamily="34" charset="-122"/>
+                <a:cs typeface="Calibri" pitchFamily="34" charset="-120"/>
+              </a:rPr>
+              <a:t>PLAN FROM THE REHEARSAL ROOM</a:t>
+            </a:r>
+            <a:endParaRPr lang="en-US" sz="1300" dirty="0"/>
+          </a:p>
+        </p:txBody>
+      </p:sp>
+      <p:sp>
+        <p:nvSpPr>
+          <p:cNvPr id="7" name="Text 5"/>
+          <p:cNvSpPr/>
+          <p:nvPr/>
+        </p:nvSpPr>
+        <p:spPr>
+          <a:xfrm>
+            <a:off x="822960" y="2286000"/>
+            <a:ext cx="10545775" cy="2011680"/>
+          </a:xfrm>
+          <a:prstGeom prst="rect">
+            <a:avLst/>
+          </a:prstGeom>
+          <a:noFill/>
+          <a:ln/>
+        </p:spPr>
+        <p:txBody>
+          <a:bodyPr wrap="square" rtlCol="0" anchor="t"/>
+          <a:lstStyle/>
+          <a:p>
+            <a:pPr algn="l" indent="0" marL="0">
+              <a:spcAft>
+                <a:spcPts val="200"/>
+              </a:spcAft>
+              <a:buNone/>
+            </a:pPr>
+            <a:r>
+              <a:rPr lang="en-US" sz="5600" b="1" dirty="0">
+                <a:solidFill>
+                  <a:srgbClr val="FFFFFF"/>
+                </a:solidFill>
+                <a:latin typeface="Calibri" pitchFamily="34" charset="0"/>
+                <a:ea typeface="Calibri" pitchFamily="34" charset="-122"/>
+                <a:cs typeface="Calibri" pitchFamily="34" charset="-120"/>
+              </a:rPr>
+              <a:t>Plan </a:t>
+            </a:r>
+            <a:pPr algn="l" indent="0" marL="0">
+              <a:spcAft>
+                <a:spcPts val="200"/>
+              </a:spcAft>
+              <a:buNone/>
+            </a:pPr>
+            <a:r>
+              <a:rPr lang="en-US" sz="5600" b="1" dirty="0">
+                <a:solidFill>
+                  <a:srgbClr val="A5B4FC"/>
+                </a:solidFill>
+                <a:latin typeface="Calibri" pitchFamily="34" charset="0"/>
+                <a:ea typeface="Calibri" pitchFamily="34" charset="-122"/>
+                <a:cs typeface="Calibri" pitchFamily="34" charset="-120"/>
+              </a:rPr>
+              <a:t>anywhere.</a:t>
+            </a:r>
+            <a:endParaRPr lang="en-US" sz="5600" dirty="0"/>
+          </a:p>
+        </p:txBody>
+      </p:sp>
+      <p:sp>
+        <p:nvSpPr>
+          <p:cNvPr id="8" name="Text 6"/>
+          <p:cNvSpPr/>
+          <p:nvPr/>
+        </p:nvSpPr>
+        <p:spPr>
+          <a:xfrm>
+            <a:off x="822960" y="4937760"/>
+            <a:ext cx="8225705" cy="1280160"/>
+          </a:xfrm>
+          <a:prstGeom prst="rect">
+            <a:avLst/>
+          </a:prstGeom>
+          <a:noFill/>
+          <a:ln/>
+        </p:spPr>
+        <p:txBody>
+          <a:bodyPr wrap="square" rtlCol="0" anchor="ctr"/>
+          <a:lstStyle/>
+          <a:p>
+            <a:pPr algn="l" indent="0" marL="0">
+              <a:spcBef>
+                <a:spcPts val="400"/>
+              </a:spcBef>
+              <a:buNone/>
+            </a:pPr>
+            <a:r>
+              <a:rPr lang="en-US" sz="1800" dirty="0">
+                <a:solidFill>
+                  <a:srgbClr val="D7D3E8"/>
+                </a:solidFill>
+                <a:latin typeface="Calibri" pitchFamily="34" charset="0"/>
+                <a:ea typeface="Calibri" pitchFamily="34" charset="-122"/>
+                <a:cs typeface="Calibri" pitchFamily="34" charset="-120"/>
+              </a:rPr>
+              <a:t>Fully responsive on phone, tablet, and laptop — capture an idea the moment it lands.</a:t>
+            </a:r>
+            <a:endParaRPr lang="en-US" sz="1800" dirty="0"/>
+          </a:p>
+        </p:txBody>
+      </p:sp>
       <p:pic>
         <p:nvPicPr>
-          <p:cNvPr id="2" name="Image 0" descr="/home/runner/workspace/artifacts/ccd-promo/scripts/frames/scene-21.jpg">    </p:cNvPr>
+          <p:cNvPr id="9" name="Image 0" descr="/home/runner/workspace/artifacts/ccd-promo/public/ccdesigner-wordmark.png">    </p:cNvPr>
           <p:cNvPicPr>
             <a:picLocks noChangeAspect="1"/>
           </p:cNvPicPr>
@@ -3488,14 +7332,53 @@
         </p:blipFill>
         <p:spPr>
           <a:xfrm>
-            <a:off x="0" y="0"/>
-            <a:ext cx="12191695" cy="6858000"/>
+            <a:off x="411480" y="365760"/>
+            <a:ext cx="1463040" cy="384048"/>
           </a:xfrm>
           <a:prstGeom prst="rect">
             <a:avLst/>
           </a:prstGeom>
         </p:spPr>
       </p:pic>
+      <p:sp>
+        <p:nvSpPr>
+          <p:cNvPr id="10" name="Text 7"/>
+          <p:cNvSpPr/>
+          <p:nvPr/>
+        </p:nvSpPr>
+        <p:spPr>
+          <a:xfrm>
+            <a:off x="10911535" y="365760"/>
+            <a:ext cx="914400" cy="274320"/>
+          </a:xfrm>
+          <a:prstGeom prst="rect">
+            <a:avLst/>
+          </a:prstGeom>
+          <a:noFill/>
+          <a:ln/>
+        </p:spPr>
+        <p:txBody>
+          <a:bodyPr wrap="square" rtlCol="0" anchor="ctr"/>
+          <a:lstStyle/>
+          <a:p>
+            <a:pPr algn="r" indent="0" marL="0">
+              <a:buNone/>
+            </a:pPr>
+            <a:r>
+              <a:rPr lang="en-US" sz="900" b="1" spc="400" kern="0" dirty="0">
+                <a:solidFill>
+                  <a:srgbClr val="8B85A8"/>
+                </a:solidFill>
+                <a:latin typeface="Calibri" pitchFamily="34" charset="0"/>
+                <a:ea typeface="Calibri" pitchFamily="34" charset="-122"/>
+                <a:cs typeface="Calibri" pitchFamily="34" charset="-120"/>
+              </a:rPr>
+              <a:t>21 / 22</a:t>
+            </a:r>
+            <a:endParaRPr lang="en-US" sz="900" dirty="0"/>
+          </a:p>
+        </p:txBody>
+      </p:sp>
     </p:spTree>
   </p:cSld>
   <p:clrMapOvr>
@@ -3510,7 +7393,7 @@
     <p:bg>
       <p:bgPr>
         <a:solidFill>
-          <a:srgbClr val="000000"/>
+          <a:srgbClr val="FFFFFF"/>
         </a:solidFill>
       </p:bgPr>
     </p:bg>
@@ -3528,9 +7411,59 @@
           <a:chExt cx="0" cy="0"/>
         </a:xfrm>
       </p:grpSpPr>
+      <p:sp>
+        <p:nvSpPr>
+          <p:cNvPr id="2" name="Shape 0"/>
+          <p:cNvSpPr/>
+          <p:nvPr/>
+        </p:nvSpPr>
+        <p:spPr>
+          <a:xfrm>
+            <a:off x="0" y="0"/>
+            <a:ext cx="12191695" cy="6858000"/>
+          </a:xfrm>
+          <a:prstGeom prst="rect">
+            <a:avLst/>
+          </a:prstGeom>
+          <a:solidFill>
+            <a:srgbClr val="F4F1FB"/>
+          </a:solidFill>
+          <a:ln w="12700">
+            <a:solidFill>
+              <a:srgbClr val="F4F1FB"/>
+            </a:solidFill>
+            <a:prstDash val="solid"/>
+          </a:ln>
+        </p:spPr>
+      </p:sp>
+      <p:sp>
+        <p:nvSpPr>
+          <p:cNvPr id="3" name="Shape 1"/>
+          <p:cNvSpPr/>
+          <p:nvPr/>
+        </p:nvSpPr>
+        <p:spPr>
+          <a:xfrm>
+            <a:off x="0" y="6821424"/>
+            <a:ext cx="12191695" cy="36576"/>
+          </a:xfrm>
+          <a:prstGeom prst="rect">
+            <a:avLst/>
+          </a:prstGeom>
+          <a:solidFill>
+            <a:srgbClr val="7C3AED"/>
+          </a:solidFill>
+          <a:ln w="12700">
+            <a:solidFill>
+              <a:srgbClr val="7C3AED"/>
+            </a:solidFill>
+            <a:prstDash val="solid"/>
+          </a:ln>
+        </p:spPr>
+      </p:sp>
       <p:pic>
         <p:nvPicPr>
-          <p:cNvPr id="2" name="Image 0" descr="/home/runner/workspace/artifacts/ccd-promo/scripts/frames/scene-22.jpg">    </p:cNvPr>
+          <p:cNvPr id="4" name="Image 0" descr="/home/runner/workspace/artifacts/ccd-promo/public/cc-mark.png">    </p:cNvPr>
           <p:cNvPicPr>
             <a:picLocks noChangeAspect="1"/>
           </p:cNvPicPr>
@@ -3544,14 +7477,170 @@
         </p:blipFill>
         <p:spPr>
           <a:xfrm>
-            <a:off x="0" y="0"/>
-            <a:ext cx="12191695" cy="6858000"/>
+            <a:off x="4815688" y="1463040"/>
+            <a:ext cx="2560320" cy="2194560"/>
           </a:xfrm>
           <a:prstGeom prst="rect">
             <a:avLst/>
           </a:prstGeom>
         </p:spPr>
       </p:pic>
+      <p:sp>
+        <p:nvSpPr>
+          <p:cNvPr id="5" name="Text 2"/>
+          <p:cNvSpPr/>
+          <p:nvPr/>
+        </p:nvSpPr>
+        <p:spPr>
+          <a:xfrm>
+            <a:off x="914400" y="3931920"/>
+            <a:ext cx="10362895" cy="365760"/>
+          </a:xfrm>
+          <a:prstGeom prst="rect">
+            <a:avLst/>
+          </a:prstGeom>
+          <a:noFill/>
+          <a:ln/>
+        </p:spPr>
+        <p:txBody>
+          <a:bodyPr wrap="square" rtlCol="0" anchor="ctr"/>
+          <a:lstStyle/>
+          <a:p>
+            <a:pPr algn="ctr" indent="0" marL="0">
+              <a:buNone/>
+            </a:pPr>
+            <a:r>
+              <a:rPr lang="en-US" sz="1400" b="1" spc="600" kern="0" dirty="0">
+                <a:solidFill>
+                  <a:srgbClr val="7C3AED"/>
+                </a:solidFill>
+                <a:latin typeface="Calibri" pitchFamily="34" charset="0"/>
+                <a:ea typeface="Calibri" pitchFamily="34" charset="-122"/>
+                <a:cs typeface="Calibri" pitchFamily="34" charset="-120"/>
+              </a:rPr>
+              <a:t>WHAT'S NEXT</a:t>
+            </a:r>
+            <a:endParaRPr lang="en-US" sz="1400" dirty="0"/>
+          </a:p>
+        </p:txBody>
+      </p:sp>
+      <p:sp>
+        <p:nvSpPr>
+          <p:cNvPr id="6" name="Text 3"/>
+          <p:cNvSpPr/>
+          <p:nvPr/>
+        </p:nvSpPr>
+        <p:spPr>
+          <a:xfrm>
+            <a:off x="914400" y="4389120"/>
+            <a:ext cx="10362895" cy="914400"/>
+          </a:xfrm>
+          <a:prstGeom prst="rect">
+            <a:avLst/>
+          </a:prstGeom>
+          <a:noFill/>
+          <a:ln/>
+        </p:spPr>
+        <p:txBody>
+          <a:bodyPr wrap="square" rtlCol="0" anchor="ctr"/>
+          <a:lstStyle/>
+          <a:p>
+            <a:pPr algn="ctr" indent="0" marL="0">
+              <a:buNone/>
+            </a:pPr>
+            <a:r>
+              <a:rPr lang="en-US" sz="5400" b="1" i="1" dirty="0">
+                <a:solidFill>
+                  <a:srgbClr val="1A1033"/>
+                </a:solidFill>
+                <a:latin typeface="Calibri" pitchFamily="34" charset="0"/>
+                <a:ea typeface="Calibri" pitchFamily="34" charset="-122"/>
+                <a:cs typeface="Calibri" pitchFamily="34" charset="-120"/>
+              </a:rPr>
+              <a:t>CCDesigner</a:t>
+            </a:r>
+            <a:endParaRPr lang="en-US" sz="5400" dirty="0"/>
+          </a:p>
+        </p:txBody>
+      </p:sp>
+      <p:sp>
+        <p:nvSpPr>
+          <p:cNvPr id="7" name="Text 4"/>
+          <p:cNvSpPr/>
+          <p:nvPr/>
+        </p:nvSpPr>
+        <p:spPr>
+          <a:xfrm>
+            <a:off x="1371600" y="5440680"/>
+            <a:ext cx="9448495" cy="640080"/>
+          </a:xfrm>
+          <a:prstGeom prst="rect">
+            <a:avLst/>
+          </a:prstGeom>
+          <a:noFill/>
+          <a:ln/>
+        </p:spPr>
+        <p:txBody>
+          <a:bodyPr wrap="square" rtlCol="0" anchor="ctr"/>
+          <a:lstStyle/>
+          <a:p>
+            <a:pPr algn="ctr" indent="0" marL="0">
+              <a:buNone/>
+            </a:pPr>
+            <a:r>
+              <a:rPr lang="en-US" sz="1800" dirty="0">
+                <a:solidFill>
+                  <a:srgbClr val="4B4565"/>
+                </a:solidFill>
+                <a:latin typeface="Calibri" pitchFamily="34" charset="0"/>
+                <a:ea typeface="Calibri" pitchFamily="34" charset="-122"/>
+                <a:cs typeface="Calibri" pitchFamily="34" charset="-120"/>
+              </a:rPr>
+              <a:t>creativecurriculumdesigner.com</a:t>
+            </a:r>
+            <a:endParaRPr lang="en-US" sz="1800" dirty="0"/>
+          </a:p>
+        </p:txBody>
+      </p:sp>
+      <p:sp>
+        <p:nvSpPr>
+          <p:cNvPr id="8" name="Text 5"/>
+          <p:cNvSpPr/>
+          <p:nvPr/>
+        </p:nvSpPr>
+        <p:spPr>
+          <a:xfrm>
+            <a:off x="10911535" y="365760"/>
+            <a:ext cx="914400" cy="274320"/>
+          </a:xfrm>
+          <a:prstGeom prst="rect">
+            <a:avLst/>
+          </a:prstGeom>
+          <a:noFill/>
+          <a:ln/>
+        </p:spPr>
+        <p:txBody>
+          <a:bodyPr wrap="square" rtlCol="0" anchor="ctr"/>
+          <a:lstStyle/>
+          <a:p>
+            <a:pPr algn="r" indent="0" marL="0">
+              <a:buNone/>
+            </a:pPr>
+            <a:r>
+              <a:rPr lang="en-US" sz="900" b="1" spc="400" kern="0" dirty="0">
+                <a:solidFill>
+                  <a:srgbClr val="8B85A8"/>
+                </a:solidFill>
+                <a:latin typeface="Calibri" pitchFamily="34" charset="0"/>
+                <a:ea typeface="Calibri" pitchFamily="34" charset="-122"/>
+                <a:cs typeface="Calibri" pitchFamily="34" charset="-120"/>
+              </a:rPr>
+              <a:t>22 / 22</a:t>
+            </a:r>
+            <a:endParaRPr lang="en-US" sz="900" dirty="0"/>
+          </a:p>
+        </p:txBody>
+      </p:sp>
     </p:spTree>
   </p:cSld>
   <p:clrMapOvr>
@@ -3566,7 +7655,7 @@
     <p:bg>
       <p:bgPr>
         <a:solidFill>
-          <a:srgbClr val="000000"/>
+          <a:srgbClr val="0B0820"/>
         </a:solidFill>
       </p:bgPr>
     </p:bg>
@@ -3584,9 +7673,228 @@
           <a:chExt cx="0" cy="0"/>
         </a:xfrm>
       </p:grpSpPr>
+      <p:sp>
+        <p:nvSpPr>
+          <p:cNvPr id="2" name="Shape 0"/>
+          <p:cNvSpPr/>
+          <p:nvPr/>
+        </p:nvSpPr>
+        <p:spPr>
+          <a:xfrm>
+            <a:off x="0" y="0"/>
+            <a:ext cx="12191695" cy="6858000"/>
+          </a:xfrm>
+          <a:prstGeom prst="rect">
+            <a:avLst/>
+          </a:prstGeom>
+          <a:solidFill>
+            <a:srgbClr val="0B0820"/>
+          </a:solidFill>
+          <a:ln w="12700">
+            <a:solidFill>
+              <a:srgbClr val="0B0820"/>
+            </a:solidFill>
+            <a:prstDash val="solid"/>
+          </a:ln>
+        </p:spPr>
+      </p:sp>
+      <p:sp>
+        <p:nvSpPr>
+          <p:cNvPr id="3" name="Shape 1"/>
+          <p:cNvSpPr/>
+          <p:nvPr/>
+        </p:nvSpPr>
+        <p:spPr>
+          <a:xfrm>
+            <a:off x="0" y="0"/>
+            <a:ext cx="7924602" cy="6858000"/>
+          </a:xfrm>
+          <a:prstGeom prst="rect">
+            <a:avLst/>
+          </a:prstGeom>
+          <a:solidFill>
+            <a:srgbClr val="120F2E">
+              <a:alpha val="75000"/>
+            </a:srgbClr>
+          </a:solidFill>
+          <a:ln w="12700">
+            <a:solidFill>
+              <a:srgbClr val="120F2E"/>
+            </a:solidFill>
+            <a:prstDash val="solid"/>
+          </a:ln>
+        </p:spPr>
+      </p:sp>
+      <p:sp>
+        <p:nvSpPr>
+          <p:cNvPr id="4" name="Shape 2"/>
+          <p:cNvSpPr/>
+          <p:nvPr/>
+        </p:nvSpPr>
+        <p:spPr>
+          <a:xfrm>
+            <a:off x="-2286000" y="3200400"/>
+            <a:ext cx="7315200" cy="7315200"/>
+          </a:xfrm>
+          <a:prstGeom prst="ellipse">
+            <a:avLst/>
+          </a:prstGeom>
+          <a:solidFill>
+            <a:srgbClr val="7C3AED">
+              <a:alpha val="20000"/>
+            </a:srgbClr>
+          </a:solidFill>
+          <a:ln/>
+        </p:spPr>
+      </p:sp>
+      <p:sp>
+        <p:nvSpPr>
+          <p:cNvPr id="5" name="Shape 3"/>
+          <p:cNvSpPr/>
+          <p:nvPr/>
+        </p:nvSpPr>
+        <p:spPr>
+          <a:xfrm>
+            <a:off x="8534095" y="-2743200"/>
+            <a:ext cx="6400800" cy="6400800"/>
+          </a:xfrm>
+          <a:prstGeom prst="ellipse">
+            <a:avLst/>
+          </a:prstGeom>
+          <a:solidFill>
+            <a:srgbClr val="14B8A6">
+              <a:alpha val="15000"/>
+            </a:srgbClr>
+          </a:solidFill>
+          <a:ln/>
+        </p:spPr>
+      </p:sp>
+      <p:sp>
+        <p:nvSpPr>
+          <p:cNvPr id="6" name="Text 4"/>
+          <p:cNvSpPr/>
+          <p:nvPr/>
+        </p:nvSpPr>
+        <p:spPr>
+          <a:xfrm>
+            <a:off x="822960" y="1783080"/>
+            <a:ext cx="10545775" cy="365760"/>
+          </a:xfrm>
+          <a:prstGeom prst="rect">
+            <a:avLst/>
+          </a:prstGeom>
+          <a:noFill/>
+          <a:ln/>
+        </p:spPr>
+        <p:txBody>
+          <a:bodyPr wrap="square" rtlCol="0" anchor="ctr"/>
+          <a:lstStyle/>
+          <a:p>
+            <a:pPr algn="ctr" indent="0" marL="0">
+              <a:buNone/>
+            </a:pPr>
+            <a:r>
+              <a:rPr lang="en-US" sz="1300" b="1" spc="800" kern="0" dirty="0">
+                <a:solidFill>
+                  <a:srgbClr val="A5B4FC"/>
+                </a:solidFill>
+                <a:latin typeface="Calibri" pitchFamily="34" charset="0"/>
+                <a:ea typeface="Calibri" pitchFamily="34" charset="-122"/>
+                <a:cs typeface="Calibri" pitchFamily="34" charset="-120"/>
+              </a:rPr>
+              <a:t>YOUR IDEAS, CAPTURED FOREVER</a:t>
+            </a:r>
+            <a:endParaRPr lang="en-US" sz="1300" dirty="0"/>
+          </a:p>
+        </p:txBody>
+      </p:sp>
+      <p:sp>
+        <p:nvSpPr>
+          <p:cNvPr id="7" name="Text 5"/>
+          <p:cNvSpPr/>
+          <p:nvPr/>
+        </p:nvSpPr>
+        <p:spPr>
+          <a:xfrm>
+            <a:off x="822960" y="2286000"/>
+            <a:ext cx="10545775" cy="2011680"/>
+          </a:xfrm>
+          <a:prstGeom prst="rect">
+            <a:avLst/>
+          </a:prstGeom>
+          <a:noFill/>
+          <a:ln/>
+        </p:spPr>
+        <p:txBody>
+          <a:bodyPr wrap="square" rtlCol="0" anchor="t"/>
+          <a:lstStyle/>
+          <a:p>
+            <a:pPr algn="ctr" indent="0" marL="0">
+              <a:spcAft>
+                <a:spcPts val="200"/>
+              </a:spcAft>
+              <a:buNone/>
+            </a:pPr>
+            <a:r>
+              <a:rPr lang="en-US" sz="6000" b="1" dirty="0">
+                <a:solidFill>
+                  <a:srgbClr val="A5B4FC"/>
+                </a:solidFill>
+                <a:latin typeface="Calibri" pitchFamily="34" charset="0"/>
+                <a:ea typeface="Calibri" pitchFamily="34" charset="-122"/>
+                <a:cs typeface="Calibri" pitchFamily="34" charset="-120"/>
+              </a:rPr>
+              <a:t>Never lose a brilliant idea.</a:t>
+            </a:r>
+            <a:endParaRPr lang="en-US" sz="6000" dirty="0"/>
+          </a:p>
+        </p:txBody>
+      </p:sp>
+      <p:sp>
+        <p:nvSpPr>
+          <p:cNvPr id="8" name="Text 6"/>
+          <p:cNvSpPr/>
+          <p:nvPr/>
+        </p:nvSpPr>
+        <p:spPr>
+          <a:xfrm>
+            <a:off x="822960" y="4754880"/>
+            <a:ext cx="10545775" cy="1280160"/>
+          </a:xfrm>
+          <a:prstGeom prst="rect">
+            <a:avLst/>
+          </a:prstGeom>
+          <a:noFill/>
+          <a:ln/>
+        </p:spPr>
+        <p:txBody>
+          <a:bodyPr wrap="square" rtlCol="0" anchor="ctr"/>
+          <a:lstStyle/>
+          <a:p>
+            <a:pPr algn="ctr" indent="0" marL="0">
+              <a:spcBef>
+                <a:spcPts val="400"/>
+              </a:spcBef>
+              <a:buNone/>
+            </a:pPr>
+            <a:r>
+              <a:rPr lang="en-US" sz="1800" dirty="0">
+                <a:solidFill>
+                  <a:srgbClr val="D7D3E8"/>
+                </a:solidFill>
+                <a:latin typeface="Calibri" pitchFamily="34" charset="0"/>
+                <a:ea typeface="Calibri" pitchFamily="34" charset="-122"/>
+                <a:cs typeface="Calibri" pitchFamily="34" charset="-120"/>
+              </a:rPr>
+              <a:t>Every warm-up, rehearsal note, and lesson spark — captured the moment it happens, and ready to use again.</a:t>
+            </a:r>
+            <a:endParaRPr lang="en-US" sz="1800" dirty="0"/>
+          </a:p>
+        </p:txBody>
+      </p:sp>
       <p:pic>
         <p:nvPicPr>
-          <p:cNvPr id="2" name="Image 0" descr="/home/runner/workspace/artifacts/ccd-promo/scripts/frames/scene-03.jpg">    </p:cNvPr>
+          <p:cNvPr id="9" name="Image 0" descr="/home/runner/workspace/artifacts/ccd-promo/public/ccdesigner-wordmark.png">    </p:cNvPr>
           <p:cNvPicPr>
             <a:picLocks noChangeAspect="1"/>
           </p:cNvPicPr>
@@ -3600,14 +7908,53 @@
         </p:blipFill>
         <p:spPr>
           <a:xfrm>
-            <a:off x="0" y="0"/>
-            <a:ext cx="12191695" cy="6858000"/>
+            <a:off x="411480" y="365760"/>
+            <a:ext cx="1463040" cy="384048"/>
           </a:xfrm>
           <a:prstGeom prst="rect">
             <a:avLst/>
           </a:prstGeom>
         </p:spPr>
       </p:pic>
+      <p:sp>
+        <p:nvSpPr>
+          <p:cNvPr id="10" name="Text 7"/>
+          <p:cNvSpPr/>
+          <p:nvPr/>
+        </p:nvSpPr>
+        <p:spPr>
+          <a:xfrm>
+            <a:off x="10911535" y="365760"/>
+            <a:ext cx="914400" cy="274320"/>
+          </a:xfrm>
+          <a:prstGeom prst="rect">
+            <a:avLst/>
+          </a:prstGeom>
+          <a:noFill/>
+          <a:ln/>
+        </p:spPr>
+        <p:txBody>
+          <a:bodyPr wrap="square" rtlCol="0" anchor="ctr"/>
+          <a:lstStyle/>
+          <a:p>
+            <a:pPr algn="r" indent="0" marL="0">
+              <a:buNone/>
+            </a:pPr>
+            <a:r>
+              <a:rPr lang="en-US" sz="900" b="1" spc="400" kern="0" dirty="0">
+                <a:solidFill>
+                  <a:srgbClr val="8B85A8"/>
+                </a:solidFill>
+                <a:latin typeface="Calibri" pitchFamily="34" charset="0"/>
+                <a:ea typeface="Calibri" pitchFamily="34" charset="-122"/>
+                <a:cs typeface="Calibri" pitchFamily="34" charset="-120"/>
+              </a:rPr>
+              <a:t>03 / 22</a:t>
+            </a:r>
+            <a:endParaRPr lang="en-US" sz="900" dirty="0"/>
+          </a:p>
+        </p:txBody>
+      </p:sp>
     </p:spTree>
   </p:cSld>
   <p:clrMapOvr>
@@ -3622,7 +7969,7 @@
     <p:bg>
       <p:bgPr>
         <a:solidFill>
-          <a:srgbClr val="000000"/>
+          <a:srgbClr val="0B0820"/>
         </a:solidFill>
       </p:bgPr>
     </p:bg>
@@ -3640,9 +7987,245 @@
           <a:chExt cx="0" cy="0"/>
         </a:xfrm>
       </p:grpSpPr>
+      <p:sp>
+        <p:nvSpPr>
+          <p:cNvPr id="2" name="Shape 0"/>
+          <p:cNvSpPr/>
+          <p:nvPr/>
+        </p:nvSpPr>
+        <p:spPr>
+          <a:xfrm>
+            <a:off x="0" y="0"/>
+            <a:ext cx="12191695" cy="6858000"/>
+          </a:xfrm>
+          <a:prstGeom prst="rect">
+            <a:avLst/>
+          </a:prstGeom>
+          <a:solidFill>
+            <a:srgbClr val="0B0820"/>
+          </a:solidFill>
+          <a:ln w="12700">
+            <a:solidFill>
+              <a:srgbClr val="0B0820"/>
+            </a:solidFill>
+            <a:prstDash val="solid"/>
+          </a:ln>
+        </p:spPr>
+      </p:sp>
+      <p:sp>
+        <p:nvSpPr>
+          <p:cNvPr id="3" name="Shape 1"/>
+          <p:cNvSpPr/>
+          <p:nvPr/>
+        </p:nvSpPr>
+        <p:spPr>
+          <a:xfrm>
+            <a:off x="0" y="0"/>
+            <a:ext cx="7924602" cy="6858000"/>
+          </a:xfrm>
+          <a:prstGeom prst="rect">
+            <a:avLst/>
+          </a:prstGeom>
+          <a:solidFill>
+            <a:srgbClr val="120F2E">
+              <a:alpha val="75000"/>
+            </a:srgbClr>
+          </a:solidFill>
+          <a:ln w="12700">
+            <a:solidFill>
+              <a:srgbClr val="120F2E"/>
+            </a:solidFill>
+            <a:prstDash val="solid"/>
+          </a:ln>
+        </p:spPr>
+      </p:sp>
+      <p:sp>
+        <p:nvSpPr>
+          <p:cNvPr id="4" name="Shape 2"/>
+          <p:cNvSpPr/>
+          <p:nvPr/>
+        </p:nvSpPr>
+        <p:spPr>
+          <a:xfrm>
+            <a:off x="-2286000" y="3200400"/>
+            <a:ext cx="7315200" cy="7315200"/>
+          </a:xfrm>
+          <a:prstGeom prst="ellipse">
+            <a:avLst/>
+          </a:prstGeom>
+          <a:solidFill>
+            <a:srgbClr val="7C3AED">
+              <a:alpha val="20000"/>
+            </a:srgbClr>
+          </a:solidFill>
+          <a:ln/>
+        </p:spPr>
+      </p:sp>
+      <p:sp>
+        <p:nvSpPr>
+          <p:cNvPr id="5" name="Shape 3"/>
+          <p:cNvSpPr/>
+          <p:nvPr/>
+        </p:nvSpPr>
+        <p:spPr>
+          <a:xfrm>
+            <a:off x="8534095" y="-2743200"/>
+            <a:ext cx="6400800" cy="6400800"/>
+          </a:xfrm>
+          <a:prstGeom prst="ellipse">
+            <a:avLst/>
+          </a:prstGeom>
+          <a:solidFill>
+            <a:srgbClr val="14B8A6">
+              <a:alpha val="15000"/>
+            </a:srgbClr>
+          </a:solidFill>
+          <a:ln/>
+        </p:spPr>
+      </p:sp>
+      <p:sp>
+        <p:nvSpPr>
+          <p:cNvPr id="6" name="Text 4"/>
+          <p:cNvSpPr/>
+          <p:nvPr/>
+        </p:nvSpPr>
+        <p:spPr>
+          <a:xfrm>
+            <a:off x="822960" y="1783080"/>
+            <a:ext cx="10545775" cy="365760"/>
+          </a:xfrm>
+          <a:prstGeom prst="rect">
+            <a:avLst/>
+          </a:prstGeom>
+          <a:noFill/>
+          <a:ln/>
+        </p:spPr>
+        <p:txBody>
+          <a:bodyPr wrap="square" rtlCol="0" anchor="ctr"/>
+          <a:lstStyle/>
+          <a:p>
+            <a:pPr algn="l" indent="0" marL="0">
+              <a:buNone/>
+            </a:pPr>
+            <a:r>
+              <a:rPr lang="en-US" sz="1300" b="1" spc="800" kern="0" dirty="0">
+                <a:solidFill>
+                  <a:srgbClr val="C084FC"/>
+                </a:solidFill>
+                <a:latin typeface="Calibri" pitchFamily="34" charset="0"/>
+                <a:ea typeface="Calibri" pitchFamily="34" charset="-122"/>
+                <a:cs typeface="Calibri" pitchFamily="34" charset="-120"/>
+              </a:rPr>
+              <a:t>A LIBRARY ONLY YOU CAN BUILD</a:t>
+            </a:r>
+            <a:endParaRPr lang="en-US" sz="1300" dirty="0"/>
+          </a:p>
+        </p:txBody>
+      </p:sp>
+      <p:sp>
+        <p:nvSpPr>
+          <p:cNvPr id="7" name="Text 5"/>
+          <p:cNvSpPr/>
+          <p:nvPr/>
+        </p:nvSpPr>
+        <p:spPr>
+          <a:xfrm>
+            <a:off x="822960" y="2286000"/>
+            <a:ext cx="10545775" cy="2011680"/>
+          </a:xfrm>
+          <a:prstGeom prst="rect">
+            <a:avLst/>
+          </a:prstGeom>
+          <a:noFill/>
+          <a:ln/>
+        </p:spPr>
+        <p:txBody>
+          <a:bodyPr wrap="square" rtlCol="0" anchor="t"/>
+          <a:lstStyle/>
+          <a:p>
+            <a:pPr algn="l" indent="0" marL="0">
+              <a:spcAft>
+                <a:spcPts val="200"/>
+              </a:spcAft>
+              <a:buNone/>
+            </a:pPr>
+            <a:r>
+              <a:rPr lang="en-US" sz="5600" b="1" dirty="0">
+                <a:solidFill>
+                  <a:srgbClr val="FFFFFF"/>
+                </a:solidFill>
+                <a:latin typeface="Calibri" pitchFamily="34" charset="0"/>
+                <a:ea typeface="Calibri" pitchFamily="34" charset="-122"/>
+                <a:cs typeface="Calibri" pitchFamily="34" charset="-120"/>
+              </a:rPr>
+              <a:t>Build your creative </a:t>
+            </a:r>
+            <a:pPr algn="l" indent="0" marL="0">
+              <a:spcAft>
+                <a:spcPts val="200"/>
+              </a:spcAft>
+              <a:buNone/>
+            </a:pPr>
+            <a:r>
+              <a:rPr lang="en-US" sz="5600" b="1" dirty="0">
+                <a:solidFill>
+                  <a:srgbClr val="C084FC"/>
+                </a:solidFill>
+                <a:latin typeface="Calibri" pitchFamily="34" charset="0"/>
+                <a:ea typeface="Calibri" pitchFamily="34" charset="-122"/>
+                <a:cs typeface="Calibri" pitchFamily="34" charset="-120"/>
+              </a:rPr>
+              <a:t>archive.</a:t>
+            </a:r>
+            <a:endParaRPr lang="en-US" sz="5600" dirty="0"/>
+          </a:p>
+        </p:txBody>
+      </p:sp>
+      <p:sp>
+        <p:nvSpPr>
+          <p:cNvPr id="8" name="Text 6"/>
+          <p:cNvSpPr/>
+          <p:nvPr/>
+        </p:nvSpPr>
+        <p:spPr>
+          <a:xfrm>
+            <a:off x="822960" y="4937760"/>
+            <a:ext cx="8225705" cy="1280160"/>
+          </a:xfrm>
+          <a:prstGeom prst="rect">
+            <a:avLst/>
+          </a:prstGeom>
+          <a:noFill/>
+          <a:ln/>
+        </p:spPr>
+        <p:txBody>
+          <a:bodyPr wrap="square" rtlCol="0" anchor="ctr"/>
+          <a:lstStyle/>
+          <a:p>
+            <a:pPr algn="l" indent="0" marL="0">
+              <a:spcBef>
+                <a:spcPts val="400"/>
+              </a:spcBef>
+              <a:buNone/>
+            </a:pPr>
+            <a:r>
+              <a:rPr lang="en-US" sz="1800" dirty="0">
+                <a:solidFill>
+                  <a:srgbClr val="D7D3E8"/>
+                </a:solidFill>
+                <a:latin typeface="Calibri" pitchFamily="34" charset="0"/>
+                <a:ea typeface="Calibri" pitchFamily="34" charset="-122"/>
+                <a:cs typeface="Calibri" pitchFamily="34" charset="-120"/>
+              </a:rPr>
+              <a:t>Activities, rehearsal techniques, reflections, and warm-ups — preserved, tagged, and always within reach.</a:t>
+            </a:r>
+            <a:endParaRPr lang="en-US" sz="1800" dirty="0"/>
+          </a:p>
+        </p:txBody>
+      </p:sp>
       <p:pic>
         <p:nvPicPr>
-          <p:cNvPr id="2" name="Image 0" descr="/home/runner/workspace/artifacts/ccd-promo/scripts/frames/scene-04.jpg">    </p:cNvPr>
+          <p:cNvPr id="9" name="Image 0" descr="/home/runner/workspace/artifacts/ccd-promo/public/ccdesigner-wordmark.png">    </p:cNvPr>
           <p:cNvPicPr>
             <a:picLocks noChangeAspect="1"/>
           </p:cNvPicPr>
@@ -3656,14 +8239,53 @@
         </p:blipFill>
         <p:spPr>
           <a:xfrm>
-            <a:off x="0" y="0"/>
-            <a:ext cx="12191695" cy="6858000"/>
+            <a:off x="411480" y="365760"/>
+            <a:ext cx="1463040" cy="384048"/>
           </a:xfrm>
           <a:prstGeom prst="rect">
             <a:avLst/>
           </a:prstGeom>
         </p:spPr>
       </p:pic>
+      <p:sp>
+        <p:nvSpPr>
+          <p:cNvPr id="10" name="Text 7"/>
+          <p:cNvSpPr/>
+          <p:nvPr/>
+        </p:nvSpPr>
+        <p:spPr>
+          <a:xfrm>
+            <a:off x="10911535" y="365760"/>
+            <a:ext cx="914400" cy="274320"/>
+          </a:xfrm>
+          <a:prstGeom prst="rect">
+            <a:avLst/>
+          </a:prstGeom>
+          <a:noFill/>
+          <a:ln/>
+        </p:spPr>
+        <p:txBody>
+          <a:bodyPr wrap="square" rtlCol="0" anchor="ctr"/>
+          <a:lstStyle/>
+          <a:p>
+            <a:pPr algn="r" indent="0" marL="0">
+              <a:buNone/>
+            </a:pPr>
+            <a:r>
+              <a:rPr lang="en-US" sz="900" b="1" spc="400" kern="0" dirty="0">
+                <a:solidFill>
+                  <a:srgbClr val="8B85A8"/>
+                </a:solidFill>
+                <a:latin typeface="Calibri" pitchFamily="34" charset="0"/>
+                <a:ea typeface="Calibri" pitchFamily="34" charset="-122"/>
+                <a:cs typeface="Calibri" pitchFamily="34" charset="-120"/>
+              </a:rPr>
+              <a:t>04 / 22</a:t>
+            </a:r>
+            <a:endParaRPr lang="en-US" sz="900" dirty="0"/>
+          </a:p>
+        </p:txBody>
+      </p:sp>
     </p:spTree>
   </p:cSld>
   <p:clrMapOvr>
@@ -3678,7 +8300,7 @@
     <p:bg>
       <p:bgPr>
         <a:solidFill>
-          <a:srgbClr val="000000"/>
+          <a:srgbClr val="0B0820"/>
         </a:solidFill>
       </p:bgPr>
     </p:bg>
@@ -3696,9 +8318,245 @@
           <a:chExt cx="0" cy="0"/>
         </a:xfrm>
       </p:grpSpPr>
+      <p:sp>
+        <p:nvSpPr>
+          <p:cNvPr id="2" name="Shape 0"/>
+          <p:cNvSpPr/>
+          <p:nvPr/>
+        </p:nvSpPr>
+        <p:spPr>
+          <a:xfrm>
+            <a:off x="0" y="0"/>
+            <a:ext cx="12191695" cy="6858000"/>
+          </a:xfrm>
+          <a:prstGeom prst="rect">
+            <a:avLst/>
+          </a:prstGeom>
+          <a:solidFill>
+            <a:srgbClr val="0B0820"/>
+          </a:solidFill>
+          <a:ln w="12700">
+            <a:solidFill>
+              <a:srgbClr val="0B0820"/>
+            </a:solidFill>
+            <a:prstDash val="solid"/>
+          </a:ln>
+        </p:spPr>
+      </p:sp>
+      <p:sp>
+        <p:nvSpPr>
+          <p:cNvPr id="3" name="Shape 1"/>
+          <p:cNvSpPr/>
+          <p:nvPr/>
+        </p:nvSpPr>
+        <p:spPr>
+          <a:xfrm>
+            <a:off x="0" y="0"/>
+            <a:ext cx="7924602" cy="6858000"/>
+          </a:xfrm>
+          <a:prstGeom prst="rect">
+            <a:avLst/>
+          </a:prstGeom>
+          <a:solidFill>
+            <a:srgbClr val="120F2E">
+              <a:alpha val="75000"/>
+            </a:srgbClr>
+          </a:solidFill>
+          <a:ln w="12700">
+            <a:solidFill>
+              <a:srgbClr val="120F2E"/>
+            </a:solidFill>
+            <a:prstDash val="solid"/>
+          </a:ln>
+        </p:spPr>
+      </p:sp>
+      <p:sp>
+        <p:nvSpPr>
+          <p:cNvPr id="4" name="Shape 2"/>
+          <p:cNvSpPr/>
+          <p:nvPr/>
+        </p:nvSpPr>
+        <p:spPr>
+          <a:xfrm>
+            <a:off x="-2286000" y="3200400"/>
+            <a:ext cx="7315200" cy="7315200"/>
+          </a:xfrm>
+          <a:prstGeom prst="ellipse">
+            <a:avLst/>
+          </a:prstGeom>
+          <a:solidFill>
+            <a:srgbClr val="7C3AED">
+              <a:alpha val="20000"/>
+            </a:srgbClr>
+          </a:solidFill>
+          <a:ln/>
+        </p:spPr>
+      </p:sp>
+      <p:sp>
+        <p:nvSpPr>
+          <p:cNvPr id="5" name="Shape 3"/>
+          <p:cNvSpPr/>
+          <p:nvPr/>
+        </p:nvSpPr>
+        <p:spPr>
+          <a:xfrm>
+            <a:off x="8534095" y="-2743200"/>
+            <a:ext cx="6400800" cy="6400800"/>
+          </a:xfrm>
+          <a:prstGeom prst="ellipse">
+            <a:avLst/>
+          </a:prstGeom>
+          <a:solidFill>
+            <a:srgbClr val="14B8A6">
+              <a:alpha val="15000"/>
+            </a:srgbClr>
+          </a:solidFill>
+          <a:ln/>
+        </p:spPr>
+      </p:sp>
+      <p:sp>
+        <p:nvSpPr>
+          <p:cNvPr id="6" name="Text 4"/>
+          <p:cNvSpPr/>
+          <p:nvPr/>
+        </p:nvSpPr>
+        <p:spPr>
+          <a:xfrm>
+            <a:off x="822960" y="1783080"/>
+            <a:ext cx="10545775" cy="365760"/>
+          </a:xfrm>
+          <a:prstGeom prst="rect">
+            <a:avLst/>
+          </a:prstGeom>
+          <a:noFill/>
+          <a:ln/>
+        </p:spPr>
+        <p:txBody>
+          <a:bodyPr wrap="square" rtlCol="0" anchor="ctr"/>
+          <a:lstStyle/>
+          <a:p>
+            <a:pPr algn="l" indent="0" marL="0">
+              <a:buNone/>
+            </a:pPr>
+            <a:r>
+              <a:rPr lang="en-US" sz="1300" b="1" spc="800" kern="0" dirty="0">
+                <a:solidFill>
+                  <a:srgbClr val="5EEAD4"/>
+                </a:solidFill>
+                <a:latin typeface="Calibri" pitchFamily="34" charset="0"/>
+                <a:ea typeface="Calibri" pitchFamily="34" charset="-122"/>
+                <a:cs typeface="Calibri" pitchFamily="34" charset="-120"/>
+              </a:rPr>
+              <a:t>CURRICULUM MAPPING</a:t>
+            </a:r>
+            <a:endParaRPr lang="en-US" sz="1300" dirty="0"/>
+          </a:p>
+        </p:txBody>
+      </p:sp>
+      <p:sp>
+        <p:nvSpPr>
+          <p:cNvPr id="7" name="Text 5"/>
+          <p:cNvSpPr/>
+          <p:nvPr/>
+        </p:nvSpPr>
+        <p:spPr>
+          <a:xfrm>
+            <a:off x="822960" y="2286000"/>
+            <a:ext cx="10545775" cy="2011680"/>
+          </a:xfrm>
+          <a:prstGeom prst="rect">
+            <a:avLst/>
+          </a:prstGeom>
+          <a:noFill/>
+          <a:ln/>
+        </p:spPr>
+        <p:txBody>
+          <a:bodyPr wrap="square" rtlCol="0" anchor="t"/>
+          <a:lstStyle/>
+          <a:p>
+            <a:pPr algn="l" indent="0" marL="0">
+              <a:spcAft>
+                <a:spcPts val="200"/>
+              </a:spcAft>
+              <a:buNone/>
+            </a:pPr>
+            <a:r>
+              <a:rPr lang="en-US" sz="5600" b="1" dirty="0">
+                <a:solidFill>
+                  <a:srgbClr val="FFFFFF"/>
+                </a:solidFill>
+                <a:latin typeface="Calibri" pitchFamily="34" charset="0"/>
+                <a:ea typeface="Calibri" pitchFamily="34" charset="-122"/>
+                <a:cs typeface="Calibri" pitchFamily="34" charset="-120"/>
+              </a:rPr>
+              <a:t>Build connected </a:t>
+            </a:r>
+            <a:pPr algn="l" indent="0" marL="0">
+              <a:spcAft>
+                <a:spcPts val="200"/>
+              </a:spcAft>
+              <a:buNone/>
+            </a:pPr>
+            <a:r>
+              <a:rPr lang="en-US" sz="5600" b="1" dirty="0">
+                <a:solidFill>
+                  <a:srgbClr val="5EEAD4"/>
+                </a:solidFill>
+                <a:latin typeface="Calibri" pitchFamily="34" charset="0"/>
+                <a:ea typeface="Calibri" pitchFamily="34" charset="-122"/>
+                <a:cs typeface="Calibri" pitchFamily="34" charset="-120"/>
+              </a:rPr>
+              <a:t>learning journeys.</a:t>
+            </a:r>
+            <a:endParaRPr lang="en-US" sz="5600" dirty="0"/>
+          </a:p>
+        </p:txBody>
+      </p:sp>
+      <p:sp>
+        <p:nvSpPr>
+          <p:cNvPr id="8" name="Text 6"/>
+          <p:cNvSpPr/>
+          <p:nvPr/>
+        </p:nvSpPr>
+        <p:spPr>
+          <a:xfrm>
+            <a:off x="822960" y="4937760"/>
+            <a:ext cx="8225705" cy="1280160"/>
+          </a:xfrm>
+          <a:prstGeom prst="rect">
+            <a:avLst/>
+          </a:prstGeom>
+          <a:noFill/>
+          <a:ln/>
+        </p:spPr>
+        <p:txBody>
+          <a:bodyPr wrap="square" rtlCol="0" anchor="ctr"/>
+          <a:lstStyle/>
+          <a:p>
+            <a:pPr algn="l" indent="0" marL="0">
+              <a:spcBef>
+                <a:spcPts val="400"/>
+              </a:spcBef>
+              <a:buNone/>
+            </a:pPr>
+            <a:r>
+              <a:rPr lang="en-US" sz="1800" dirty="0">
+                <a:solidFill>
+                  <a:srgbClr val="D7D3E8"/>
+                </a:solidFill>
+                <a:latin typeface="Calibri" pitchFamily="34" charset="0"/>
+                <a:ea typeface="Calibri" pitchFamily="34" charset="-122"/>
+                <a:cs typeface="Calibri" pitchFamily="34" charset="-120"/>
+              </a:rPr>
+              <a:t>See how every lesson, skill, and outcome links across the year — and across subjects.</a:t>
+            </a:r>
+            <a:endParaRPr lang="en-US" sz="1800" dirty="0"/>
+          </a:p>
+        </p:txBody>
+      </p:sp>
       <p:pic>
         <p:nvPicPr>
-          <p:cNvPr id="2" name="Image 0" descr="/home/runner/workspace/artifacts/ccd-promo/scripts/frames/scene-05.jpg">    </p:cNvPr>
+          <p:cNvPr id="9" name="Image 0" descr="/home/runner/workspace/artifacts/ccd-promo/public/ccdesigner-wordmark.png">    </p:cNvPr>
           <p:cNvPicPr>
             <a:picLocks noChangeAspect="1"/>
           </p:cNvPicPr>
@@ -3712,14 +8570,53 @@
         </p:blipFill>
         <p:spPr>
           <a:xfrm>
-            <a:off x="0" y="0"/>
-            <a:ext cx="12191695" cy="6858000"/>
+            <a:off x="411480" y="365760"/>
+            <a:ext cx="1463040" cy="384048"/>
           </a:xfrm>
           <a:prstGeom prst="rect">
             <a:avLst/>
           </a:prstGeom>
         </p:spPr>
       </p:pic>
+      <p:sp>
+        <p:nvSpPr>
+          <p:cNvPr id="10" name="Text 7"/>
+          <p:cNvSpPr/>
+          <p:nvPr/>
+        </p:nvSpPr>
+        <p:spPr>
+          <a:xfrm>
+            <a:off x="10911535" y="365760"/>
+            <a:ext cx="914400" cy="274320"/>
+          </a:xfrm>
+          <a:prstGeom prst="rect">
+            <a:avLst/>
+          </a:prstGeom>
+          <a:noFill/>
+          <a:ln/>
+        </p:spPr>
+        <p:txBody>
+          <a:bodyPr wrap="square" rtlCol="0" anchor="ctr"/>
+          <a:lstStyle/>
+          <a:p>
+            <a:pPr algn="r" indent="0" marL="0">
+              <a:buNone/>
+            </a:pPr>
+            <a:r>
+              <a:rPr lang="en-US" sz="900" b="1" spc="400" kern="0" dirty="0">
+                <a:solidFill>
+                  <a:srgbClr val="8B85A8"/>
+                </a:solidFill>
+                <a:latin typeface="Calibri" pitchFamily="34" charset="0"/>
+                <a:ea typeface="Calibri" pitchFamily="34" charset="-122"/>
+                <a:cs typeface="Calibri" pitchFamily="34" charset="-120"/>
+              </a:rPr>
+              <a:t>05 / 22</a:t>
+            </a:r>
+            <a:endParaRPr lang="en-US" sz="900" dirty="0"/>
+          </a:p>
+        </p:txBody>
+      </p:sp>
     </p:spTree>
   </p:cSld>
   <p:clrMapOvr>
@@ -3734,7 +8631,7 @@
     <p:bg>
       <p:bgPr>
         <a:solidFill>
-          <a:srgbClr val="000000"/>
+          <a:srgbClr val="0B0820"/>
         </a:solidFill>
       </p:bgPr>
     </p:bg>
@@ -3752,9 +8649,245 @@
           <a:chExt cx="0" cy="0"/>
         </a:xfrm>
       </p:grpSpPr>
+      <p:sp>
+        <p:nvSpPr>
+          <p:cNvPr id="2" name="Shape 0"/>
+          <p:cNvSpPr/>
+          <p:nvPr/>
+        </p:nvSpPr>
+        <p:spPr>
+          <a:xfrm>
+            <a:off x="0" y="0"/>
+            <a:ext cx="12191695" cy="6858000"/>
+          </a:xfrm>
+          <a:prstGeom prst="rect">
+            <a:avLst/>
+          </a:prstGeom>
+          <a:solidFill>
+            <a:srgbClr val="0B0820"/>
+          </a:solidFill>
+          <a:ln w="12700">
+            <a:solidFill>
+              <a:srgbClr val="0B0820"/>
+            </a:solidFill>
+            <a:prstDash val="solid"/>
+          </a:ln>
+        </p:spPr>
+      </p:sp>
+      <p:sp>
+        <p:nvSpPr>
+          <p:cNvPr id="3" name="Shape 1"/>
+          <p:cNvSpPr/>
+          <p:nvPr/>
+        </p:nvSpPr>
+        <p:spPr>
+          <a:xfrm>
+            <a:off x="0" y="0"/>
+            <a:ext cx="7924602" cy="6858000"/>
+          </a:xfrm>
+          <a:prstGeom prst="rect">
+            <a:avLst/>
+          </a:prstGeom>
+          <a:solidFill>
+            <a:srgbClr val="120F2E">
+              <a:alpha val="75000"/>
+            </a:srgbClr>
+          </a:solidFill>
+          <a:ln w="12700">
+            <a:solidFill>
+              <a:srgbClr val="120F2E"/>
+            </a:solidFill>
+            <a:prstDash val="solid"/>
+          </a:ln>
+        </p:spPr>
+      </p:sp>
+      <p:sp>
+        <p:nvSpPr>
+          <p:cNvPr id="4" name="Shape 2"/>
+          <p:cNvSpPr/>
+          <p:nvPr/>
+        </p:nvSpPr>
+        <p:spPr>
+          <a:xfrm>
+            <a:off x="-2286000" y="3200400"/>
+            <a:ext cx="7315200" cy="7315200"/>
+          </a:xfrm>
+          <a:prstGeom prst="ellipse">
+            <a:avLst/>
+          </a:prstGeom>
+          <a:solidFill>
+            <a:srgbClr val="7C3AED">
+              <a:alpha val="20000"/>
+            </a:srgbClr>
+          </a:solidFill>
+          <a:ln/>
+        </p:spPr>
+      </p:sp>
+      <p:sp>
+        <p:nvSpPr>
+          <p:cNvPr id="5" name="Shape 3"/>
+          <p:cNvSpPr/>
+          <p:nvPr/>
+        </p:nvSpPr>
+        <p:spPr>
+          <a:xfrm>
+            <a:off x="8534095" y="-2743200"/>
+            <a:ext cx="6400800" cy="6400800"/>
+          </a:xfrm>
+          <a:prstGeom prst="ellipse">
+            <a:avLst/>
+          </a:prstGeom>
+          <a:solidFill>
+            <a:srgbClr val="14B8A6">
+              <a:alpha val="15000"/>
+            </a:srgbClr>
+          </a:solidFill>
+          <a:ln/>
+        </p:spPr>
+      </p:sp>
+      <p:sp>
+        <p:nvSpPr>
+          <p:cNvPr id="6" name="Text 4"/>
+          <p:cNvSpPr/>
+          <p:nvPr/>
+        </p:nvSpPr>
+        <p:spPr>
+          <a:xfrm>
+            <a:off x="822960" y="1783080"/>
+            <a:ext cx="10545775" cy="365760"/>
+          </a:xfrm>
+          <a:prstGeom prst="rect">
+            <a:avLst/>
+          </a:prstGeom>
+          <a:noFill/>
+          <a:ln/>
+        </p:spPr>
+        <p:txBody>
+          <a:bodyPr wrap="square" rtlCol="0" anchor="ctr"/>
+          <a:lstStyle/>
+          <a:p>
+            <a:pPr algn="l" indent="0" marL="0">
+              <a:buNone/>
+            </a:pPr>
+            <a:r>
+              <a:rPr lang="en-US" sz="1300" b="1" spc="800" kern="0" dirty="0">
+                <a:solidFill>
+                  <a:srgbClr val="7DD3FC"/>
+                </a:solidFill>
+                <a:latin typeface="Calibri" pitchFamily="34" charset="0"/>
+                <a:ea typeface="Calibri" pitchFamily="34" charset="-122"/>
+                <a:cs typeface="Calibri" pitchFamily="34" charset="-120"/>
+              </a:rPr>
+              <a:t>PLAN WITH INTENTION</a:t>
+            </a:r>
+            <a:endParaRPr lang="en-US" sz="1300" dirty="0"/>
+          </a:p>
+        </p:txBody>
+      </p:sp>
+      <p:sp>
+        <p:nvSpPr>
+          <p:cNvPr id="7" name="Text 5"/>
+          <p:cNvSpPr/>
+          <p:nvPr/>
+        </p:nvSpPr>
+        <p:spPr>
+          <a:xfrm>
+            <a:off x="822960" y="2286000"/>
+            <a:ext cx="10545775" cy="2011680"/>
+          </a:xfrm>
+          <a:prstGeom prst="rect">
+            <a:avLst/>
+          </a:prstGeom>
+          <a:noFill/>
+          <a:ln/>
+        </p:spPr>
+        <p:txBody>
+          <a:bodyPr wrap="square" rtlCol="0" anchor="t"/>
+          <a:lstStyle/>
+          <a:p>
+            <a:pPr algn="l" indent="0" marL="0">
+              <a:spcAft>
+                <a:spcPts val="200"/>
+              </a:spcAft>
+              <a:buNone/>
+            </a:pPr>
+            <a:r>
+              <a:rPr lang="en-US" sz="5600" b="1" dirty="0">
+                <a:solidFill>
+                  <a:srgbClr val="FFFFFF"/>
+                </a:solidFill>
+                <a:latin typeface="Calibri" pitchFamily="34" charset="0"/>
+                <a:ea typeface="Calibri" pitchFamily="34" charset="-122"/>
+                <a:cs typeface="Calibri" pitchFamily="34" charset="-120"/>
+              </a:rPr>
+              <a:t>Rich lessons, </a:t>
+            </a:r>
+            <a:pPr algn="l" indent="0" marL="0">
+              <a:spcAft>
+                <a:spcPts val="200"/>
+              </a:spcAft>
+              <a:buNone/>
+            </a:pPr>
+            <a:r>
+              <a:rPr lang="en-US" sz="5600" b="1" dirty="0">
+                <a:solidFill>
+                  <a:srgbClr val="7DD3FC"/>
+                </a:solidFill>
+                <a:latin typeface="Calibri" pitchFamily="34" charset="0"/>
+                <a:ea typeface="Calibri" pitchFamily="34" charset="-122"/>
+                <a:cs typeface="Calibri" pitchFamily="34" charset="-120"/>
+              </a:rPr>
+              <a:t>built in minutes.</a:t>
+            </a:r>
+            <a:endParaRPr lang="en-US" sz="5600" dirty="0"/>
+          </a:p>
+        </p:txBody>
+      </p:sp>
+      <p:sp>
+        <p:nvSpPr>
+          <p:cNvPr id="8" name="Text 6"/>
+          <p:cNvSpPr/>
+          <p:nvPr/>
+        </p:nvSpPr>
+        <p:spPr>
+          <a:xfrm>
+            <a:off x="822960" y="4937760"/>
+            <a:ext cx="8225705" cy="1280160"/>
+          </a:xfrm>
+          <a:prstGeom prst="rect">
+            <a:avLst/>
+          </a:prstGeom>
+          <a:noFill/>
+          <a:ln/>
+        </p:spPr>
+        <p:txBody>
+          <a:bodyPr wrap="square" rtlCol="0" anchor="ctr"/>
+          <a:lstStyle/>
+          <a:p>
+            <a:pPr algn="l" indent="0" marL="0">
+              <a:spcBef>
+                <a:spcPts val="400"/>
+              </a:spcBef>
+              <a:buNone/>
+            </a:pPr>
+            <a:r>
+              <a:rPr lang="en-US" sz="1800" dirty="0">
+                <a:solidFill>
+                  <a:srgbClr val="D7D3E8"/>
+                </a:solidFill>
+                <a:latin typeface="Calibri" pitchFamily="34" charset="0"/>
+                <a:ea typeface="Calibri" pitchFamily="34" charset="-122"/>
+                <a:cs typeface="Calibri" pitchFamily="34" charset="-120"/>
+              </a:rPr>
+              <a:t>Drag activities into shape. Sequence with purpose. Save the structure — keep the soul.</a:t>
+            </a:r>
+            <a:endParaRPr lang="en-US" sz="1800" dirty="0"/>
+          </a:p>
+        </p:txBody>
+      </p:sp>
       <p:pic>
         <p:nvPicPr>
-          <p:cNvPr id="2" name="Image 0" descr="/home/runner/workspace/artifacts/ccd-promo/scripts/frames/scene-06.jpg">    </p:cNvPr>
+          <p:cNvPr id="9" name="Image 0" descr="/home/runner/workspace/artifacts/ccd-promo/public/ccdesigner-wordmark.png">    </p:cNvPr>
           <p:cNvPicPr>
             <a:picLocks noChangeAspect="1"/>
           </p:cNvPicPr>
@@ -3768,14 +8901,53 @@
         </p:blipFill>
         <p:spPr>
           <a:xfrm>
-            <a:off x="0" y="0"/>
-            <a:ext cx="12191695" cy="6858000"/>
+            <a:off x="411480" y="365760"/>
+            <a:ext cx="1463040" cy="384048"/>
           </a:xfrm>
           <a:prstGeom prst="rect">
             <a:avLst/>
           </a:prstGeom>
         </p:spPr>
       </p:pic>
+      <p:sp>
+        <p:nvSpPr>
+          <p:cNvPr id="10" name="Text 7"/>
+          <p:cNvSpPr/>
+          <p:nvPr/>
+        </p:nvSpPr>
+        <p:spPr>
+          <a:xfrm>
+            <a:off x="10911535" y="365760"/>
+            <a:ext cx="914400" cy="274320"/>
+          </a:xfrm>
+          <a:prstGeom prst="rect">
+            <a:avLst/>
+          </a:prstGeom>
+          <a:noFill/>
+          <a:ln/>
+        </p:spPr>
+        <p:txBody>
+          <a:bodyPr wrap="square" rtlCol="0" anchor="ctr"/>
+          <a:lstStyle/>
+          <a:p>
+            <a:pPr algn="r" indent="0" marL="0">
+              <a:buNone/>
+            </a:pPr>
+            <a:r>
+              <a:rPr lang="en-US" sz="900" b="1" spc="400" kern="0" dirty="0">
+                <a:solidFill>
+                  <a:srgbClr val="8B85A8"/>
+                </a:solidFill>
+                <a:latin typeface="Calibri" pitchFamily="34" charset="0"/>
+                <a:ea typeface="Calibri" pitchFamily="34" charset="-122"/>
+                <a:cs typeface="Calibri" pitchFamily="34" charset="-120"/>
+              </a:rPr>
+              <a:t>06 / 22</a:t>
+            </a:r>
+            <a:endParaRPr lang="en-US" sz="900" dirty="0"/>
+          </a:p>
+        </p:txBody>
+      </p:sp>
     </p:spTree>
   </p:cSld>
   <p:clrMapOvr>
@@ -3790,7 +8962,7 @@
     <p:bg>
       <p:bgPr>
         <a:solidFill>
-          <a:srgbClr val="000000"/>
+          <a:srgbClr val="0B0820"/>
         </a:solidFill>
       </p:bgPr>
     </p:bg>
@@ -3808,9 +8980,245 @@
           <a:chExt cx="0" cy="0"/>
         </a:xfrm>
       </p:grpSpPr>
+      <p:sp>
+        <p:nvSpPr>
+          <p:cNvPr id="2" name="Shape 0"/>
+          <p:cNvSpPr/>
+          <p:nvPr/>
+        </p:nvSpPr>
+        <p:spPr>
+          <a:xfrm>
+            <a:off x="0" y="0"/>
+            <a:ext cx="12191695" cy="6858000"/>
+          </a:xfrm>
+          <a:prstGeom prst="rect">
+            <a:avLst/>
+          </a:prstGeom>
+          <a:solidFill>
+            <a:srgbClr val="0B0820"/>
+          </a:solidFill>
+          <a:ln w="12700">
+            <a:solidFill>
+              <a:srgbClr val="0B0820"/>
+            </a:solidFill>
+            <a:prstDash val="solid"/>
+          </a:ln>
+        </p:spPr>
+      </p:sp>
+      <p:sp>
+        <p:nvSpPr>
+          <p:cNvPr id="3" name="Shape 1"/>
+          <p:cNvSpPr/>
+          <p:nvPr/>
+        </p:nvSpPr>
+        <p:spPr>
+          <a:xfrm>
+            <a:off x="0" y="0"/>
+            <a:ext cx="7924602" cy="6858000"/>
+          </a:xfrm>
+          <a:prstGeom prst="rect">
+            <a:avLst/>
+          </a:prstGeom>
+          <a:solidFill>
+            <a:srgbClr val="120F2E">
+              <a:alpha val="75000"/>
+            </a:srgbClr>
+          </a:solidFill>
+          <a:ln w="12700">
+            <a:solidFill>
+              <a:srgbClr val="120F2E"/>
+            </a:solidFill>
+            <a:prstDash val="solid"/>
+          </a:ln>
+        </p:spPr>
+      </p:sp>
+      <p:sp>
+        <p:nvSpPr>
+          <p:cNvPr id="4" name="Shape 2"/>
+          <p:cNvSpPr/>
+          <p:nvPr/>
+        </p:nvSpPr>
+        <p:spPr>
+          <a:xfrm>
+            <a:off x="-2286000" y="3200400"/>
+            <a:ext cx="7315200" cy="7315200"/>
+          </a:xfrm>
+          <a:prstGeom prst="ellipse">
+            <a:avLst/>
+          </a:prstGeom>
+          <a:solidFill>
+            <a:srgbClr val="7C3AED">
+              <a:alpha val="20000"/>
+            </a:srgbClr>
+          </a:solidFill>
+          <a:ln/>
+        </p:spPr>
+      </p:sp>
+      <p:sp>
+        <p:nvSpPr>
+          <p:cNvPr id="5" name="Shape 3"/>
+          <p:cNvSpPr/>
+          <p:nvPr/>
+        </p:nvSpPr>
+        <p:spPr>
+          <a:xfrm>
+            <a:off x="8534095" y="-2743200"/>
+            <a:ext cx="6400800" cy="6400800"/>
+          </a:xfrm>
+          <a:prstGeom prst="ellipse">
+            <a:avLst/>
+          </a:prstGeom>
+          <a:solidFill>
+            <a:srgbClr val="14B8A6">
+              <a:alpha val="15000"/>
+            </a:srgbClr>
+          </a:solidFill>
+          <a:ln/>
+        </p:spPr>
+      </p:sp>
+      <p:sp>
+        <p:nvSpPr>
+          <p:cNvPr id="6" name="Text 4"/>
+          <p:cNvSpPr/>
+          <p:nvPr/>
+        </p:nvSpPr>
+        <p:spPr>
+          <a:xfrm>
+            <a:off x="822960" y="1783080"/>
+            <a:ext cx="10545775" cy="365760"/>
+          </a:xfrm>
+          <a:prstGeom prst="rect">
+            <a:avLst/>
+          </a:prstGeom>
+          <a:noFill/>
+          <a:ln/>
+        </p:spPr>
+        <p:txBody>
+          <a:bodyPr wrap="square" rtlCol="0" anchor="ctr"/>
+          <a:lstStyle/>
+          <a:p>
+            <a:pPr algn="l" indent="0" marL="0">
+              <a:buNone/>
+            </a:pPr>
+            <a:r>
+              <a:rPr lang="en-US" sz="1300" b="1" spc="800" kern="0" dirty="0">
+                <a:solidFill>
+                  <a:srgbClr val="FB7185"/>
+                </a:solidFill>
+                <a:latin typeface="Calibri" pitchFamily="34" charset="0"/>
+                <a:ea typeface="Calibri" pitchFamily="34" charset="-122"/>
+                <a:cs typeface="Calibri" pitchFamily="34" charset="-120"/>
+              </a:rPr>
+              <a:t>BUILT FOR THE ARTS</a:t>
+            </a:r>
+            <a:endParaRPr lang="en-US" sz="1300" dirty="0"/>
+          </a:p>
+        </p:txBody>
+      </p:sp>
+      <p:sp>
+        <p:nvSpPr>
+          <p:cNvPr id="7" name="Text 5"/>
+          <p:cNvSpPr/>
+          <p:nvPr/>
+        </p:nvSpPr>
+        <p:spPr>
+          <a:xfrm>
+            <a:off x="822960" y="2286000"/>
+            <a:ext cx="10545775" cy="2011680"/>
+          </a:xfrm>
+          <a:prstGeom prst="rect">
+            <a:avLst/>
+          </a:prstGeom>
+          <a:noFill/>
+          <a:ln/>
+        </p:spPr>
+        <p:txBody>
+          <a:bodyPr wrap="square" rtlCol="0" anchor="t"/>
+          <a:lstStyle/>
+          <a:p>
+            <a:pPr algn="l" indent="0" marL="0">
+              <a:spcAft>
+                <a:spcPts val="200"/>
+              </a:spcAft>
+              <a:buNone/>
+            </a:pPr>
+            <a:r>
+              <a:rPr lang="en-US" sz="5600" b="1" dirty="0">
+                <a:solidFill>
+                  <a:srgbClr val="FFFFFF"/>
+                </a:solidFill>
+                <a:latin typeface="Calibri" pitchFamily="34" charset="0"/>
+                <a:ea typeface="Calibri" pitchFamily="34" charset="-122"/>
+                <a:cs typeface="Calibri" pitchFamily="34" charset="-120"/>
+              </a:rPr>
+              <a:t>Drama. Dance. </a:t>
+            </a:r>
+            <a:pPr algn="l" indent="0" marL="0">
+              <a:spcAft>
+                <a:spcPts val="200"/>
+              </a:spcAft>
+              <a:buNone/>
+            </a:pPr>
+            <a:r>
+              <a:rPr lang="en-US" sz="5600" b="1" dirty="0">
+                <a:solidFill>
+                  <a:srgbClr val="FB7185"/>
+                </a:solidFill>
+                <a:latin typeface="Calibri" pitchFamily="34" charset="0"/>
+                <a:ea typeface="Calibri" pitchFamily="34" charset="-122"/>
+                <a:cs typeface="Calibri" pitchFamily="34" charset="-120"/>
+              </a:rPr>
+              <a:t>Music.</a:t>
+            </a:r>
+            <a:endParaRPr lang="en-US" sz="5600" dirty="0"/>
+          </a:p>
+        </p:txBody>
+      </p:sp>
+      <p:sp>
+        <p:nvSpPr>
+          <p:cNvPr id="8" name="Text 6"/>
+          <p:cNvSpPr/>
+          <p:nvPr/>
+        </p:nvSpPr>
+        <p:spPr>
+          <a:xfrm>
+            <a:off x="822960" y="4937760"/>
+            <a:ext cx="8225705" cy="1280160"/>
+          </a:xfrm>
+          <a:prstGeom prst="rect">
+            <a:avLst/>
+          </a:prstGeom>
+          <a:noFill/>
+          <a:ln/>
+        </p:spPr>
+        <p:txBody>
+          <a:bodyPr wrap="square" rtlCol="0" anchor="ctr"/>
+          <a:lstStyle/>
+          <a:p>
+            <a:pPr algn="l" indent="0" marL="0">
+              <a:spcBef>
+                <a:spcPts val="400"/>
+              </a:spcBef>
+              <a:buNone/>
+            </a:pPr>
+            <a:r>
+              <a:rPr lang="en-US" sz="1800" dirty="0">
+                <a:solidFill>
+                  <a:srgbClr val="D7D3E8"/>
+                </a:solidFill>
+                <a:latin typeface="Calibri" pitchFamily="34" charset="0"/>
+                <a:ea typeface="Calibri" pitchFamily="34" charset="-122"/>
+                <a:cs typeface="Calibri" pitchFamily="34" charset="-120"/>
+              </a:rPr>
+              <a:t>Designed by performing-arts teachers, for the rituals, vocabularies and rehearsal practices of every discipline.</a:t>
+            </a:r>
+            <a:endParaRPr lang="en-US" sz="1800" dirty="0"/>
+          </a:p>
+        </p:txBody>
+      </p:sp>
       <p:pic>
         <p:nvPicPr>
-          <p:cNvPr id="2" name="Image 0" descr="/home/runner/workspace/artifacts/ccd-promo/scripts/frames/scene-07.jpg">    </p:cNvPr>
+          <p:cNvPr id="9" name="Image 0" descr="/home/runner/workspace/artifacts/ccd-promo/public/ccdesigner-wordmark.png">    </p:cNvPr>
           <p:cNvPicPr>
             <a:picLocks noChangeAspect="1"/>
           </p:cNvPicPr>
@@ -3824,14 +9232,53 @@
         </p:blipFill>
         <p:spPr>
           <a:xfrm>
-            <a:off x="0" y="0"/>
-            <a:ext cx="12191695" cy="6858000"/>
+            <a:off x="411480" y="365760"/>
+            <a:ext cx="1463040" cy="384048"/>
           </a:xfrm>
           <a:prstGeom prst="rect">
             <a:avLst/>
           </a:prstGeom>
         </p:spPr>
       </p:pic>
+      <p:sp>
+        <p:nvSpPr>
+          <p:cNvPr id="10" name="Text 7"/>
+          <p:cNvSpPr/>
+          <p:nvPr/>
+        </p:nvSpPr>
+        <p:spPr>
+          <a:xfrm>
+            <a:off x="10911535" y="365760"/>
+            <a:ext cx="914400" cy="274320"/>
+          </a:xfrm>
+          <a:prstGeom prst="rect">
+            <a:avLst/>
+          </a:prstGeom>
+          <a:noFill/>
+          <a:ln/>
+        </p:spPr>
+        <p:txBody>
+          <a:bodyPr wrap="square" rtlCol="0" anchor="ctr"/>
+          <a:lstStyle/>
+          <a:p>
+            <a:pPr algn="r" indent="0" marL="0">
+              <a:buNone/>
+            </a:pPr>
+            <a:r>
+              <a:rPr lang="en-US" sz="900" b="1" spc="400" kern="0" dirty="0">
+                <a:solidFill>
+                  <a:srgbClr val="8B85A8"/>
+                </a:solidFill>
+                <a:latin typeface="Calibri" pitchFamily="34" charset="0"/>
+                <a:ea typeface="Calibri" pitchFamily="34" charset="-122"/>
+                <a:cs typeface="Calibri" pitchFamily="34" charset="-120"/>
+              </a:rPr>
+              <a:t>07 / 22</a:t>
+            </a:r>
+            <a:endParaRPr lang="en-US" sz="900" dirty="0"/>
+          </a:p>
+        </p:txBody>
+      </p:sp>
     </p:spTree>
   </p:cSld>
   <p:clrMapOvr>
@@ -3846,7 +9293,7 @@
     <p:bg>
       <p:bgPr>
         <a:solidFill>
-          <a:srgbClr val="000000"/>
+          <a:srgbClr val="0B0820"/>
         </a:solidFill>
       </p:bgPr>
     </p:bg>
@@ -3864,9 +9311,262 @@
           <a:chExt cx="0" cy="0"/>
         </a:xfrm>
       </p:grpSpPr>
+      <p:sp>
+        <p:nvSpPr>
+          <p:cNvPr id="2" name="Shape 0"/>
+          <p:cNvSpPr/>
+          <p:nvPr/>
+        </p:nvSpPr>
+        <p:spPr>
+          <a:xfrm>
+            <a:off x="0" y="0"/>
+            <a:ext cx="12191695" cy="6858000"/>
+          </a:xfrm>
+          <a:prstGeom prst="rect">
+            <a:avLst/>
+          </a:prstGeom>
+          <a:solidFill>
+            <a:srgbClr val="0B0820"/>
+          </a:solidFill>
+          <a:ln w="12700">
+            <a:solidFill>
+              <a:srgbClr val="0B0820"/>
+            </a:solidFill>
+            <a:prstDash val="solid"/>
+          </a:ln>
+        </p:spPr>
+      </p:sp>
+      <p:sp>
+        <p:nvSpPr>
+          <p:cNvPr id="3" name="Shape 1"/>
+          <p:cNvSpPr/>
+          <p:nvPr/>
+        </p:nvSpPr>
+        <p:spPr>
+          <a:xfrm>
+            <a:off x="0" y="0"/>
+            <a:ext cx="7924602" cy="6858000"/>
+          </a:xfrm>
+          <a:prstGeom prst="rect">
+            <a:avLst/>
+          </a:prstGeom>
+          <a:solidFill>
+            <a:srgbClr val="120F2E">
+              <a:alpha val="75000"/>
+            </a:srgbClr>
+          </a:solidFill>
+          <a:ln w="12700">
+            <a:solidFill>
+              <a:srgbClr val="120F2E"/>
+            </a:solidFill>
+            <a:prstDash val="solid"/>
+          </a:ln>
+        </p:spPr>
+      </p:sp>
+      <p:sp>
+        <p:nvSpPr>
+          <p:cNvPr id="4" name="Shape 2"/>
+          <p:cNvSpPr/>
+          <p:nvPr/>
+        </p:nvSpPr>
+        <p:spPr>
+          <a:xfrm>
+            <a:off x="-2286000" y="3200400"/>
+            <a:ext cx="7315200" cy="7315200"/>
+          </a:xfrm>
+          <a:prstGeom prst="ellipse">
+            <a:avLst/>
+          </a:prstGeom>
+          <a:solidFill>
+            <a:srgbClr val="7C3AED">
+              <a:alpha val="20000"/>
+            </a:srgbClr>
+          </a:solidFill>
+          <a:ln/>
+        </p:spPr>
+      </p:sp>
+      <p:sp>
+        <p:nvSpPr>
+          <p:cNvPr id="5" name="Shape 3"/>
+          <p:cNvSpPr/>
+          <p:nvPr/>
+        </p:nvSpPr>
+        <p:spPr>
+          <a:xfrm>
+            <a:off x="8534095" y="-2743200"/>
+            <a:ext cx="6400800" cy="6400800"/>
+          </a:xfrm>
+          <a:prstGeom prst="ellipse">
+            <a:avLst/>
+          </a:prstGeom>
+          <a:solidFill>
+            <a:srgbClr val="14B8A6">
+              <a:alpha val="15000"/>
+            </a:srgbClr>
+          </a:solidFill>
+          <a:ln/>
+        </p:spPr>
+      </p:sp>
+      <p:sp>
+        <p:nvSpPr>
+          <p:cNvPr id="6" name="Text 4"/>
+          <p:cNvSpPr/>
+          <p:nvPr/>
+        </p:nvSpPr>
+        <p:spPr>
+          <a:xfrm>
+            <a:off x="822960" y="1783080"/>
+            <a:ext cx="10545775" cy="365760"/>
+          </a:xfrm>
+          <a:prstGeom prst="rect">
+            <a:avLst/>
+          </a:prstGeom>
+          <a:noFill/>
+          <a:ln/>
+        </p:spPr>
+        <p:txBody>
+          <a:bodyPr wrap="square" rtlCol="0" anchor="ctr"/>
+          <a:lstStyle/>
+          <a:p>
+            <a:pPr algn="ctr" indent="0" marL="0">
+              <a:buNone/>
+            </a:pPr>
+            <a:r>
+              <a:rPr lang="en-US" sz="1300" b="1" spc="800" kern="0" dirty="0">
+                <a:solidFill>
+                  <a:srgbClr val="F59E0B"/>
+                </a:solidFill>
+                <a:latin typeface="Calibri" pitchFamily="34" charset="0"/>
+                <a:ea typeface="Calibri" pitchFamily="34" charset="-122"/>
+                <a:cs typeface="Calibri" pitchFamily="34" charset="-120"/>
+              </a:rPr>
+              <a:t>CURIOSITY, BY DESIGN</a:t>
+            </a:r>
+            <a:endParaRPr lang="en-US" sz="1300" dirty="0"/>
+          </a:p>
+        </p:txBody>
+      </p:sp>
+      <p:sp>
+        <p:nvSpPr>
+          <p:cNvPr id="7" name="Text 5"/>
+          <p:cNvSpPr/>
+          <p:nvPr/>
+        </p:nvSpPr>
+        <p:spPr>
+          <a:xfrm>
+            <a:off x="822960" y="2286000"/>
+            <a:ext cx="10545775" cy="2011680"/>
+          </a:xfrm>
+          <a:prstGeom prst="rect">
+            <a:avLst/>
+          </a:prstGeom>
+          <a:noFill/>
+          <a:ln/>
+        </p:spPr>
+        <p:txBody>
+          <a:bodyPr wrap="square" rtlCol="0" anchor="t"/>
+          <a:lstStyle/>
+          <a:p>
+            <a:pPr algn="ctr" indent="0" marL="0">
+              <a:spcAft>
+                <a:spcPts val="200"/>
+              </a:spcAft>
+              <a:buNone/>
+            </a:pPr>
+            <a:r>
+              <a:rPr lang="en-US" sz="6000" b="1" dirty="0">
+                <a:solidFill>
+                  <a:srgbClr val="FFFFFF"/>
+                </a:solidFill>
+                <a:latin typeface="Calibri" pitchFamily="34" charset="0"/>
+                <a:ea typeface="Calibri" pitchFamily="34" charset="-122"/>
+                <a:cs typeface="Calibri" pitchFamily="34" charset="-120"/>
+              </a:rPr>
+              <a:t>Encourage </a:t>
+            </a:r>
+            <a:pPr algn="ctr" indent="0" marL="0">
+              <a:spcAft>
+                <a:spcPts val="200"/>
+              </a:spcAft>
+              <a:buNone/>
+            </a:pPr>
+            <a:r>
+              <a:rPr lang="en-US" sz="6000" b="1" dirty="0">
+                <a:solidFill>
+                  <a:srgbClr val="FBBF24"/>
+                </a:solidFill>
+                <a:latin typeface="Calibri" pitchFamily="34" charset="0"/>
+                <a:ea typeface="Calibri" pitchFamily="34" charset="-122"/>
+                <a:cs typeface="Calibri" pitchFamily="34" charset="-120"/>
+              </a:rPr>
+              <a:t>curiosity</a:t>
+            </a:r>
+            <a:pPr algn="ctr" indent="0" marL="0">
+              <a:spcAft>
+                <a:spcPts val="200"/>
+              </a:spcAft>
+              <a:buNone/>
+            </a:pPr>
+            <a:r>
+              <a:rPr lang="en-US" sz="6000" b="1" dirty="0">
+                <a:solidFill>
+                  <a:srgbClr val="FFFFFF"/>
+                </a:solidFill>
+                <a:latin typeface="Calibri" pitchFamily="34" charset="0"/>
+                <a:ea typeface="Calibri" pitchFamily="34" charset="-122"/>
+                <a:cs typeface="Calibri" pitchFamily="34" charset="-120"/>
+              </a:rPr>
+              <a:t> and imagination.</a:t>
+            </a:r>
+            <a:endParaRPr lang="en-US" sz="6000" dirty="0"/>
+          </a:p>
+        </p:txBody>
+      </p:sp>
+      <p:sp>
+        <p:nvSpPr>
+          <p:cNvPr id="8" name="Text 6"/>
+          <p:cNvSpPr/>
+          <p:nvPr/>
+        </p:nvSpPr>
+        <p:spPr>
+          <a:xfrm>
+            <a:off x="822960" y="4754880"/>
+            <a:ext cx="10545775" cy="1280160"/>
+          </a:xfrm>
+          <a:prstGeom prst="rect">
+            <a:avLst/>
+          </a:prstGeom>
+          <a:noFill/>
+          <a:ln/>
+        </p:spPr>
+        <p:txBody>
+          <a:bodyPr wrap="square" rtlCol="0" anchor="ctr"/>
+          <a:lstStyle/>
+          <a:p>
+            <a:pPr algn="ctr" indent="0" marL="0">
+              <a:spcBef>
+                <a:spcPts val="400"/>
+              </a:spcBef>
+              <a:buNone/>
+            </a:pPr>
+            <a:r>
+              <a:rPr lang="en-US" sz="1800" dirty="0">
+                <a:solidFill>
+                  <a:srgbClr val="D7D3E8"/>
+                </a:solidFill>
+                <a:latin typeface="Calibri" pitchFamily="34" charset="0"/>
+                <a:ea typeface="Calibri" pitchFamily="34" charset="-122"/>
+                <a:cs typeface="Calibri" pitchFamily="34" charset="-120"/>
+              </a:rPr>
+              <a:t>Design moments of wonder, risk-taking, and play — woven into every learning sequence.</a:t>
+            </a:r>
+            <a:endParaRPr lang="en-US" sz="1800" dirty="0"/>
+          </a:p>
+        </p:txBody>
+      </p:sp>
       <p:pic>
         <p:nvPicPr>
-          <p:cNvPr id="2" name="Image 0" descr="/home/runner/workspace/artifacts/ccd-promo/scripts/frames/scene-08.jpg">    </p:cNvPr>
+          <p:cNvPr id="9" name="Image 0" descr="/home/runner/workspace/artifacts/ccd-promo/public/ccdesigner-wordmark.png">    </p:cNvPr>
           <p:cNvPicPr>
             <a:picLocks noChangeAspect="1"/>
           </p:cNvPicPr>
@@ -3880,14 +9580,53 @@
         </p:blipFill>
         <p:spPr>
           <a:xfrm>
-            <a:off x="0" y="0"/>
-            <a:ext cx="12191695" cy="6858000"/>
+            <a:off x="411480" y="365760"/>
+            <a:ext cx="1463040" cy="384048"/>
           </a:xfrm>
           <a:prstGeom prst="rect">
             <a:avLst/>
           </a:prstGeom>
         </p:spPr>
       </p:pic>
+      <p:sp>
+        <p:nvSpPr>
+          <p:cNvPr id="10" name="Text 7"/>
+          <p:cNvSpPr/>
+          <p:nvPr/>
+        </p:nvSpPr>
+        <p:spPr>
+          <a:xfrm>
+            <a:off x="10911535" y="365760"/>
+            <a:ext cx="914400" cy="274320"/>
+          </a:xfrm>
+          <a:prstGeom prst="rect">
+            <a:avLst/>
+          </a:prstGeom>
+          <a:noFill/>
+          <a:ln/>
+        </p:spPr>
+        <p:txBody>
+          <a:bodyPr wrap="square" rtlCol="0" anchor="ctr"/>
+          <a:lstStyle/>
+          <a:p>
+            <a:pPr algn="r" indent="0" marL="0">
+              <a:buNone/>
+            </a:pPr>
+            <a:r>
+              <a:rPr lang="en-US" sz="900" b="1" spc="400" kern="0" dirty="0">
+                <a:solidFill>
+                  <a:srgbClr val="8B85A8"/>
+                </a:solidFill>
+                <a:latin typeface="Calibri" pitchFamily="34" charset="0"/>
+                <a:ea typeface="Calibri" pitchFamily="34" charset="-122"/>
+                <a:cs typeface="Calibri" pitchFamily="34" charset="-120"/>
+              </a:rPr>
+              <a:t>08 / 22</a:t>
+            </a:r>
+            <a:endParaRPr lang="en-US" sz="900" dirty="0"/>
+          </a:p>
+        </p:txBody>
+      </p:sp>
     </p:spTree>
   </p:cSld>
   <p:clrMapOvr>
@@ -3902,7 +9641,7 @@
     <p:bg>
       <p:bgPr>
         <a:solidFill>
-          <a:srgbClr val="000000"/>
+          <a:srgbClr val="0B0820"/>
         </a:solidFill>
       </p:bgPr>
     </p:bg>
@@ -3920,9 +9659,262 @@
           <a:chExt cx="0" cy="0"/>
         </a:xfrm>
       </p:grpSpPr>
+      <p:sp>
+        <p:nvSpPr>
+          <p:cNvPr id="2" name="Shape 0"/>
+          <p:cNvSpPr/>
+          <p:nvPr/>
+        </p:nvSpPr>
+        <p:spPr>
+          <a:xfrm>
+            <a:off x="0" y="0"/>
+            <a:ext cx="12191695" cy="6858000"/>
+          </a:xfrm>
+          <a:prstGeom prst="rect">
+            <a:avLst/>
+          </a:prstGeom>
+          <a:solidFill>
+            <a:srgbClr val="0B0820"/>
+          </a:solidFill>
+          <a:ln w="12700">
+            <a:solidFill>
+              <a:srgbClr val="0B0820"/>
+            </a:solidFill>
+            <a:prstDash val="solid"/>
+          </a:ln>
+        </p:spPr>
+      </p:sp>
+      <p:sp>
+        <p:nvSpPr>
+          <p:cNvPr id="3" name="Shape 1"/>
+          <p:cNvSpPr/>
+          <p:nvPr/>
+        </p:nvSpPr>
+        <p:spPr>
+          <a:xfrm>
+            <a:off x="0" y="0"/>
+            <a:ext cx="7924602" cy="6858000"/>
+          </a:xfrm>
+          <a:prstGeom prst="rect">
+            <a:avLst/>
+          </a:prstGeom>
+          <a:solidFill>
+            <a:srgbClr val="120F2E">
+              <a:alpha val="75000"/>
+            </a:srgbClr>
+          </a:solidFill>
+          <a:ln w="12700">
+            <a:solidFill>
+              <a:srgbClr val="120F2E"/>
+            </a:solidFill>
+            <a:prstDash val="solid"/>
+          </a:ln>
+        </p:spPr>
+      </p:sp>
+      <p:sp>
+        <p:nvSpPr>
+          <p:cNvPr id="4" name="Shape 2"/>
+          <p:cNvSpPr/>
+          <p:nvPr/>
+        </p:nvSpPr>
+        <p:spPr>
+          <a:xfrm>
+            <a:off x="-2286000" y="3200400"/>
+            <a:ext cx="7315200" cy="7315200"/>
+          </a:xfrm>
+          <a:prstGeom prst="ellipse">
+            <a:avLst/>
+          </a:prstGeom>
+          <a:solidFill>
+            <a:srgbClr val="7C3AED">
+              <a:alpha val="20000"/>
+            </a:srgbClr>
+          </a:solidFill>
+          <a:ln/>
+        </p:spPr>
+      </p:sp>
+      <p:sp>
+        <p:nvSpPr>
+          <p:cNvPr id="5" name="Shape 3"/>
+          <p:cNvSpPr/>
+          <p:nvPr/>
+        </p:nvSpPr>
+        <p:spPr>
+          <a:xfrm>
+            <a:off x="8534095" y="-2743200"/>
+            <a:ext cx="6400800" cy="6400800"/>
+          </a:xfrm>
+          <a:prstGeom prst="ellipse">
+            <a:avLst/>
+          </a:prstGeom>
+          <a:solidFill>
+            <a:srgbClr val="14B8A6">
+              <a:alpha val="15000"/>
+            </a:srgbClr>
+          </a:solidFill>
+          <a:ln/>
+        </p:spPr>
+      </p:sp>
+      <p:sp>
+        <p:nvSpPr>
+          <p:cNvPr id="6" name="Text 4"/>
+          <p:cNvSpPr/>
+          <p:nvPr/>
+        </p:nvSpPr>
+        <p:spPr>
+          <a:xfrm>
+            <a:off x="822960" y="1783080"/>
+            <a:ext cx="10545775" cy="365760"/>
+          </a:xfrm>
+          <a:prstGeom prst="rect">
+            <a:avLst/>
+          </a:prstGeom>
+          <a:noFill/>
+          <a:ln/>
+        </p:spPr>
+        <p:txBody>
+          <a:bodyPr wrap="square" rtlCol="0" anchor="ctr"/>
+          <a:lstStyle/>
+          <a:p>
+            <a:pPr algn="l" indent="0" marL="0">
+              <a:buNone/>
+            </a:pPr>
+            <a:r>
+              <a:rPr lang="en-US" sz="1300" b="1" spc="800" kern="0" dirty="0">
+                <a:solidFill>
+                  <a:srgbClr val="A5B4FC"/>
+                </a:solidFill>
+                <a:latin typeface="Calibri" pitchFamily="34" charset="0"/>
+                <a:ea typeface="Calibri" pitchFamily="34" charset="-122"/>
+                <a:cs typeface="Calibri" pitchFamily="34" charset="-120"/>
+              </a:rPr>
+              <a:t>AN ASSISTANT, NOT A REPLACEMENT</a:t>
+            </a:r>
+            <a:endParaRPr lang="en-US" sz="1300" dirty="0"/>
+          </a:p>
+        </p:txBody>
+      </p:sp>
+      <p:sp>
+        <p:nvSpPr>
+          <p:cNvPr id="7" name="Text 5"/>
+          <p:cNvSpPr/>
+          <p:nvPr/>
+        </p:nvSpPr>
+        <p:spPr>
+          <a:xfrm>
+            <a:off x="822960" y="2286000"/>
+            <a:ext cx="10545775" cy="2011680"/>
+          </a:xfrm>
+          <a:prstGeom prst="rect">
+            <a:avLst/>
+          </a:prstGeom>
+          <a:noFill/>
+          <a:ln/>
+        </p:spPr>
+        <p:txBody>
+          <a:bodyPr wrap="square" rtlCol="0" anchor="t"/>
+          <a:lstStyle/>
+          <a:p>
+            <a:pPr algn="l" indent="0" marL="0">
+              <a:spcAft>
+                <a:spcPts val="200"/>
+              </a:spcAft>
+              <a:buNone/>
+            </a:pPr>
+            <a:r>
+              <a:rPr lang="en-US" sz="5600" b="1" dirty="0">
+                <a:solidFill>
+                  <a:srgbClr val="FFFFFF"/>
+                </a:solidFill>
+                <a:latin typeface="Calibri" pitchFamily="34" charset="0"/>
+                <a:ea typeface="Calibri" pitchFamily="34" charset="-122"/>
+                <a:cs typeface="Calibri" pitchFamily="34" charset="-120"/>
+              </a:rPr>
+              <a:t>AI that </a:t>
+            </a:r>
+            <a:pPr algn="l" indent="0" marL="0">
+              <a:spcAft>
+                <a:spcPts val="200"/>
+              </a:spcAft>
+              <a:buNone/>
+            </a:pPr>
+            <a:r>
+              <a:rPr lang="en-US" sz="5600" b="1" dirty="0">
+                <a:solidFill>
+                  <a:srgbClr val="A5B4FC"/>
+                </a:solidFill>
+                <a:latin typeface="Calibri" pitchFamily="34" charset="0"/>
+                <a:ea typeface="Calibri" pitchFamily="34" charset="-122"/>
+                <a:cs typeface="Calibri" pitchFamily="34" charset="-120"/>
+              </a:rPr>
+              <a:t>amplifies</a:t>
+            </a:r>
+            <a:pPr algn="l" indent="0" marL="0">
+              <a:spcAft>
+                <a:spcPts val="200"/>
+              </a:spcAft>
+              <a:buNone/>
+            </a:pPr>
+            <a:r>
+              <a:rPr lang="en-US" sz="5600" b="1" dirty="0">
+                <a:solidFill>
+                  <a:srgbClr val="FFFFFF"/>
+                </a:solidFill>
+                <a:latin typeface="Calibri" pitchFamily="34" charset="0"/>
+                <a:ea typeface="Calibri" pitchFamily="34" charset="-122"/>
+                <a:cs typeface="Calibri" pitchFamily="34" charset="-120"/>
+              </a:rPr>
+              <a:t> your thinking.</a:t>
+            </a:r>
+            <a:endParaRPr lang="en-US" sz="5600" dirty="0"/>
+          </a:p>
+        </p:txBody>
+      </p:sp>
+      <p:sp>
+        <p:nvSpPr>
+          <p:cNvPr id="8" name="Text 6"/>
+          <p:cNvSpPr/>
+          <p:nvPr/>
+        </p:nvSpPr>
+        <p:spPr>
+          <a:xfrm>
+            <a:off x="822960" y="4937760"/>
+            <a:ext cx="8225705" cy="1280160"/>
+          </a:xfrm>
+          <a:prstGeom prst="rect">
+            <a:avLst/>
+          </a:prstGeom>
+          <a:noFill/>
+          <a:ln/>
+        </p:spPr>
+        <p:txBody>
+          <a:bodyPr wrap="square" rtlCol="0" anchor="ctr"/>
+          <a:lstStyle/>
+          <a:p>
+            <a:pPr algn="l" indent="0" marL="0">
+              <a:spcBef>
+                <a:spcPts val="400"/>
+              </a:spcBef>
+              <a:buNone/>
+            </a:pPr>
+            <a:r>
+              <a:rPr lang="en-US" sz="1800" dirty="0">
+                <a:solidFill>
+                  <a:srgbClr val="D7D3E8"/>
+                </a:solidFill>
+                <a:latin typeface="Calibri" pitchFamily="34" charset="0"/>
+                <a:ea typeface="Calibri" pitchFamily="34" charset="-122"/>
+                <a:cs typeface="Calibri" pitchFamily="34" charset="-120"/>
+              </a:rPr>
+              <a:t>A creative thinking partner — never a replacement for the teacher in the room.</a:t>
+            </a:r>
+            <a:endParaRPr lang="en-US" sz="1800" dirty="0"/>
+          </a:p>
+        </p:txBody>
+      </p:sp>
       <p:pic>
         <p:nvPicPr>
-          <p:cNvPr id="2" name="Image 0" descr="/home/runner/workspace/artifacts/ccd-promo/scripts/frames/scene-09.jpg">    </p:cNvPr>
+          <p:cNvPr id="9" name="Image 0" descr="/home/runner/workspace/artifacts/ccd-promo/public/ccdesigner-wordmark.png">    </p:cNvPr>
           <p:cNvPicPr>
             <a:picLocks noChangeAspect="1"/>
           </p:cNvPicPr>
@@ -3936,14 +9928,53 @@
         </p:blipFill>
         <p:spPr>
           <a:xfrm>
-            <a:off x="0" y="0"/>
-            <a:ext cx="12191695" cy="6858000"/>
+            <a:off x="411480" y="365760"/>
+            <a:ext cx="1463040" cy="384048"/>
           </a:xfrm>
           <a:prstGeom prst="rect">
             <a:avLst/>
           </a:prstGeom>
         </p:spPr>
       </p:pic>
+      <p:sp>
+        <p:nvSpPr>
+          <p:cNvPr id="10" name="Text 7"/>
+          <p:cNvSpPr/>
+          <p:nvPr/>
+        </p:nvSpPr>
+        <p:spPr>
+          <a:xfrm>
+            <a:off x="10911535" y="365760"/>
+            <a:ext cx="914400" cy="274320"/>
+          </a:xfrm>
+          <a:prstGeom prst="rect">
+            <a:avLst/>
+          </a:prstGeom>
+          <a:noFill/>
+          <a:ln/>
+        </p:spPr>
+        <p:txBody>
+          <a:bodyPr wrap="square" rtlCol="0" anchor="ctr"/>
+          <a:lstStyle/>
+          <a:p>
+            <a:pPr algn="r" indent="0" marL="0">
+              <a:buNone/>
+            </a:pPr>
+            <a:r>
+              <a:rPr lang="en-US" sz="900" b="1" spc="400" kern="0" dirty="0">
+                <a:solidFill>
+                  <a:srgbClr val="8B85A8"/>
+                </a:solidFill>
+                <a:latin typeface="Calibri" pitchFamily="34" charset="0"/>
+                <a:ea typeface="Calibri" pitchFamily="34" charset="-122"/>
+                <a:cs typeface="Calibri" pitchFamily="34" charset="-120"/>
+              </a:rPr>
+              <a:t>09 / 22</a:t>
+            </a:r>
+            <a:endParaRPr lang="en-US" sz="900" dirty="0"/>
+          </a:p>
+        </p:txBody>
+      </p:sp>
     </p:spTree>
   </p:cSld>
   <p:clrMapOvr>
